--- a/deck/consultation-deck.pptx
+++ b/deck/consultation-deck.pptx
@@ -44,9 +44,10 @@
     <p:sldId id="292" r:id="rId38"/>
     <p:sldId id="293" r:id="rId39"/>
     <p:sldId id="294" r:id="rId40"/>
+    <p:sldId id="295" r:id="rId41"/>
   </p:sldIdLst>
   <p:notesMasterIdLst>
-    <p:notesMasterId r:id="rId41"/>
+    <p:notesMasterId r:id="rId42"/>
   </p:notesMasterIdLst>
   <p:sldSz cx="9144000" cy="5143500"/>
   <p:notesSz cx="5143500" cy="9144000"/>
@@ -3468,6 +3469,94 @@
             <a:fld id="{F7021451-1387-4CA6-816F-3879F97B5CBC}" type="slidenum">
               <a:rPr lang="en-US"/>
               <a:t>4</a:t>
+            </a:fld>
+            <a:endParaRPr lang="en-US"/>
+          </a:p>
+        </p:txBody>
+      </p:sp>
+    </p:spTree>
+    <p:extLst>
+      <p:ext uri="{BB962C8B-B14F-4D97-AF65-F5344CB8AC3E}">
+        <p14:creationId xmlns:p14="http://schemas.microsoft.com/office/powerpoint/2010/main" val="1024086991"/>
+      </p:ext>
+    </p:extLst>
+  </p:cSld>
+  <p:clrMapOvr>
+    <a:masterClrMapping/>
+  </p:clrMapOvr>
+</p:notes>
+</file>
+
+<file path=ppt/notesSlides/notesSlide40.xml><?xml version="1.0" encoding="utf-8"?>
+<p:notes xmlns:a="http://schemas.openxmlformats.org/drawingml/2006/main" xmlns:r="http://schemas.openxmlformats.org/officeDocument/2006/relationships" xmlns:p="http://schemas.openxmlformats.org/presentationml/2006/main">
+  <p:cSld>
+    <p:spTree>
+      <p:nvGrpSpPr>
+        <p:cNvPr id="1" name=""/>
+        <p:cNvGrpSpPr/>
+        <p:nvPr/>
+      </p:nvGrpSpPr>
+      <p:grpSpPr>
+        <a:xfrm>
+          <a:off x="0" y="0"/>
+          <a:ext cx="0" cy="0"/>
+          <a:chOff x="0" y="0"/>
+          <a:chExt cx="0" cy="0"/>
+        </a:xfrm>
+      </p:grpSpPr>
+      <p:sp>
+        <p:nvSpPr>
+          <p:cNvPr id="2" name="Slide Image Placeholder 1"/>
+          <p:cNvSpPr>
+            <a:spLocks noGrp="1" noRot="1" noChangeAspect="1"/>
+          </p:cNvSpPr>
+          <p:nvPr>
+            <p:ph type="sldImg"/>
+          </p:nvPr>
+        </p:nvSpPr>
+        <p:spPr/>
+      </p:sp>
+      <p:sp>
+        <p:nvSpPr>
+          <p:cNvPr id="3" name="Notes Placeholder 2"/>
+          <p:cNvSpPr>
+            <a:spLocks noGrp="1"/>
+          </p:cNvSpPr>
+          <p:nvPr>
+            <p:ph type="body" idx="1"/>
+          </p:nvPr>
+        </p:nvSpPr>
+        <p:spPr/>
+        <p:txBody>
+          <a:bodyPr/>
+          <a:lstStyle/>
+          <a:p>
+            <a:r>
+              <a:rPr lang="en-US" dirty="0"/>
+              <a:t/>
+            </a:r>
+            <a:endParaRPr lang="en-US" dirty="0"/>
+          </a:p>
+        </p:txBody>
+      </p:sp>
+      <p:sp>
+        <p:nvSpPr>
+          <p:cNvPr id="4" name="Slide Number Placeholder 3"/>
+          <p:cNvSpPr>
+            <a:spLocks noGrp="1"/>
+          </p:cNvSpPr>
+          <p:nvPr>
+            <p:ph type="sldNum" sz="quarter" idx="10"/>
+          </p:nvPr>
+        </p:nvSpPr>
+        <p:spPr/>
+        <p:txBody>
+          <a:bodyPr/>
+          <a:lstStyle/>
+          <a:p>
+            <a:fld id="{F7021451-1387-4CA6-816F-3879F97B5CBC}" type="slidenum">
+              <a:rPr lang="en-US"/>
+              <a:t>40</a:t>
             </a:fld>
             <a:endParaRPr lang="en-US"/>
           </a:p>
@@ -15022,7 +15111,7 @@
                 <a:ea typeface="Yu Gothic" pitchFamily="34" charset="-122"/>
                 <a:cs typeface="Yu Gothic" pitchFamily="34" charset="-120"/>
               </a:rPr>
-              <a:t>プレッシャーがあっても、</a:t>
+              <a:t>ここぞの一本を、取り切る。</a:t>
             </a:r>
             <a:endParaRPr lang="en-US" sz="1800" dirty="0"/>
           </a:p>
@@ -15042,7 +15131,7 @@
                 <a:ea typeface="Yu Gothic" pitchFamily="34" charset="-122"/>
                 <a:cs typeface="Yu Gothic" pitchFamily="34" charset="-120"/>
               </a:rPr>
-              <a:t>自分がやるべきことがわかり、実践できる選手になる。</a:t>
+              <a:t>怖くても、迷っても、自分を戻せる選手になる。</a:t>
             </a:r>
             <a:endParaRPr lang="en-US" sz="1800" dirty="0"/>
           </a:p>
@@ -15208,12 +15297,12 @@
         </p:nvSpPr>
         <p:spPr>
           <a:xfrm>
-            <a:off x="457200" y="1783080"/>
-            <a:ext cx="7863840" cy="548640"/>
+            <a:off x="457200" y="1737360"/>
+            <a:ext cx="7863840" cy="493776"/>
           </a:xfrm>
           <a:prstGeom prst="roundRect">
             <a:avLst>
-              <a:gd name="adj" fmla="val 10000"/>
+              <a:gd name="adj" fmla="val 11111"/>
             </a:avLst>
           </a:prstGeom>
           <a:solidFill>
@@ -15235,24 +15324,24 @@
         </p:nvSpPr>
         <p:spPr>
           <a:xfrm>
-            <a:off x="777240" y="1783080"/>
-            <a:ext cx="1554480" cy="548640"/>
-          </a:xfrm>
-          <a:prstGeom prst="rect">
-            <a:avLst/>
-          </a:prstGeom>
-          <a:noFill/>
-          <a:ln/>
-        </p:spPr>
-        <p:txBody>
-          <a:bodyPr wrap="square" lIns="0" tIns="0" rIns="0" bIns="0" rtlCol="0" anchor="ctr"/>
-          <a:lstStyle/>
-          <a:p>
-            <a:pPr indent="0" marL="0">
-              <a:buNone/>
-            </a:pPr>
-            <a:r>
-              <a:rPr lang="en-US" sz="1700" b="1" dirty="0">
+            <a:off x="777240" y="1737360"/>
+            <a:ext cx="1371600" cy="493776"/>
+          </a:xfrm>
+          <a:prstGeom prst="rect">
+            <a:avLst/>
+          </a:prstGeom>
+          <a:noFill/>
+          <a:ln/>
+        </p:spPr>
+        <p:txBody>
+          <a:bodyPr wrap="square" lIns="0" tIns="0" rIns="0" bIns="0" rtlCol="0" anchor="ctr"/>
+          <a:lstStyle/>
+          <a:p>
+            <a:pPr indent="0" marL="0">
+              <a:buNone/>
+            </a:pPr>
+            <a:r>
+              <a:rPr lang="en-US" sz="1600" b="1" dirty="0">
                 <a:solidFill>
                   <a:srgbClr val="7A1524"/>
                 </a:solidFill>
@@ -15260,9 +15349,9 @@
                 <a:ea typeface="Yu Gothic" pitchFamily="34" charset="-122"/>
                 <a:cs typeface="Yu Gothic" pitchFamily="34" charset="-120"/>
               </a:rPr>
-              <a:t>形式</a:t>
-            </a:r>
-            <a:endParaRPr lang="en-US" sz="1700" dirty="0"/>
+              <a:t>期間</a:t>
+            </a:r>
+            <a:endParaRPr lang="en-US" sz="1600" dirty="0"/>
           </a:p>
         </p:txBody>
       </p:sp>
@@ -15274,24 +15363,24 @@
         </p:nvSpPr>
         <p:spPr>
           <a:xfrm>
-            <a:off x="2377440" y="1783080"/>
-            <a:ext cx="5760720" cy="548640"/>
-          </a:xfrm>
-          <a:prstGeom prst="rect">
-            <a:avLst/>
-          </a:prstGeom>
-          <a:noFill/>
-          <a:ln/>
-        </p:spPr>
-        <p:txBody>
-          <a:bodyPr wrap="square" lIns="0" tIns="0" rIns="0" bIns="0" rtlCol="0" anchor="ctr"/>
-          <a:lstStyle/>
-          <a:p>
-            <a:pPr indent="0" marL="0">
-              <a:buNone/>
-            </a:pPr>
-            <a:r>
-              <a:rPr lang="en-US" sz="1800" dirty="0">
+            <a:off x="2194560" y="1737360"/>
+            <a:ext cx="5943600" cy="493776"/>
+          </a:xfrm>
+          <a:prstGeom prst="rect">
+            <a:avLst/>
+          </a:prstGeom>
+          <a:noFill/>
+          <a:ln/>
+        </p:spPr>
+        <p:txBody>
+          <a:bodyPr wrap="square" lIns="0" tIns="0" rIns="0" bIns="0" rtlCol="0" anchor="ctr"/>
+          <a:lstStyle/>
+          <a:p>
+            <a:pPr indent="0" marL="0">
+              <a:buNone/>
+            </a:pPr>
+            <a:r>
+              <a:rPr lang="en-US" sz="1600" dirty="0">
                 <a:solidFill>
                   <a:srgbClr val="3B3634"/>
                 </a:solidFill>
@@ -15299,9 +15388,9 @@
                 <a:ea typeface="Yu Gothic" pitchFamily="34" charset="-122"/>
                 <a:cs typeface="Yu Gothic" pitchFamily="34" charset="-120"/>
               </a:rPr>
-              <a:t>完全1対1／Zoom</a:t>
-            </a:r>
-            <a:endParaRPr lang="en-US" sz="1800" dirty="0"/>
+              <a:t>3か月</a:t>
+            </a:r>
+            <a:endParaRPr lang="en-US" sz="1600" dirty="0"/>
           </a:p>
         </p:txBody>
       </p:sp>
@@ -15313,12 +15402,12 @@
         </p:nvSpPr>
         <p:spPr>
           <a:xfrm>
-            <a:off x="457200" y="2423160"/>
-            <a:ext cx="7863840" cy="548640"/>
+            <a:off x="457200" y="2304288"/>
+            <a:ext cx="7863840" cy="493776"/>
           </a:xfrm>
           <a:prstGeom prst="roundRect">
             <a:avLst>
-              <a:gd name="adj" fmla="val 10000"/>
+              <a:gd name="adj" fmla="val 11111"/>
             </a:avLst>
           </a:prstGeom>
           <a:solidFill>
@@ -15340,24 +15429,24 @@
         </p:nvSpPr>
         <p:spPr>
           <a:xfrm>
-            <a:off x="777240" y="2423160"/>
-            <a:ext cx="1554480" cy="548640"/>
-          </a:xfrm>
-          <a:prstGeom prst="rect">
-            <a:avLst/>
-          </a:prstGeom>
-          <a:noFill/>
-          <a:ln/>
-        </p:spPr>
-        <p:txBody>
-          <a:bodyPr wrap="square" lIns="0" tIns="0" rIns="0" bIns="0" rtlCol="0" anchor="ctr"/>
-          <a:lstStyle/>
-          <a:p>
-            <a:pPr indent="0" marL="0">
-              <a:buNone/>
-            </a:pPr>
-            <a:r>
-              <a:rPr lang="en-US" sz="1700" b="1" dirty="0">
+            <a:off x="777240" y="2304288"/>
+            <a:ext cx="1371600" cy="493776"/>
+          </a:xfrm>
+          <a:prstGeom prst="rect">
+            <a:avLst/>
+          </a:prstGeom>
+          <a:noFill/>
+          <a:ln/>
+        </p:spPr>
+        <p:txBody>
+          <a:bodyPr wrap="square" lIns="0" tIns="0" rIns="0" bIns="0" rtlCol="0" anchor="ctr"/>
+          <a:lstStyle/>
+          <a:p>
+            <a:pPr indent="0" marL="0">
+              <a:buNone/>
+            </a:pPr>
+            <a:r>
+              <a:rPr lang="en-US" sz="1600" b="1" dirty="0">
                 <a:solidFill>
                   <a:srgbClr val="7A1524"/>
                 </a:solidFill>
@@ -15367,7 +15456,7 @@
               </a:rPr>
               <a:t>回数</a:t>
             </a:r>
-            <a:endParaRPr lang="en-US" sz="1700" dirty="0"/>
+            <a:endParaRPr lang="en-US" sz="1600" dirty="0"/>
           </a:p>
         </p:txBody>
       </p:sp>
@@ -15379,24 +15468,24 @@
         </p:nvSpPr>
         <p:spPr>
           <a:xfrm>
-            <a:off x="2377440" y="2423160"/>
-            <a:ext cx="5760720" cy="548640"/>
-          </a:xfrm>
-          <a:prstGeom prst="rect">
-            <a:avLst/>
-          </a:prstGeom>
-          <a:noFill/>
-          <a:ln/>
-        </p:spPr>
-        <p:txBody>
-          <a:bodyPr wrap="square" lIns="0" tIns="0" rIns="0" bIns="0" rtlCol="0" anchor="ctr"/>
-          <a:lstStyle/>
-          <a:p>
-            <a:pPr indent="0" marL="0">
-              <a:buNone/>
-            </a:pPr>
-            <a:r>
-              <a:rPr lang="en-US" sz="1800" dirty="0">
+            <a:off x="2194560" y="2304288"/>
+            <a:ext cx="5943600" cy="493776"/>
+          </a:xfrm>
+          <a:prstGeom prst="rect">
+            <a:avLst/>
+          </a:prstGeom>
+          <a:noFill/>
+          <a:ln/>
+        </p:spPr>
+        <p:txBody>
+          <a:bodyPr wrap="square" lIns="0" tIns="0" rIns="0" bIns="0" rtlCol="0" anchor="ctr"/>
+          <a:lstStyle/>
+          <a:p>
+            <a:pPr indent="0" marL="0">
+              <a:buNone/>
+            </a:pPr>
+            <a:r>
+              <a:rPr lang="en-US" sz="1600" dirty="0">
                 <a:solidFill>
                   <a:srgbClr val="3B3634"/>
                 </a:solidFill>
@@ -15404,9 +15493,9 @@
                 <a:ea typeface="Yu Gothic" pitchFamily="34" charset="-122"/>
                 <a:cs typeface="Yu Gothic" pitchFamily="34" charset="-120"/>
               </a:rPr>
-              <a:t>全10回（1回60分）</a:t>
-            </a:r>
-            <a:endParaRPr lang="en-US" sz="1800" dirty="0"/>
+              <a:t>個別セッション 最大10回（7〜10回程度）</a:t>
+            </a:r>
+            <a:endParaRPr lang="en-US" sz="1600" dirty="0"/>
           </a:p>
         </p:txBody>
       </p:sp>
@@ -15418,12 +15507,12 @@
         </p:nvSpPr>
         <p:spPr>
           <a:xfrm>
-            <a:off x="457200" y="3063240"/>
-            <a:ext cx="7863840" cy="548640"/>
+            <a:off x="457200" y="2871216"/>
+            <a:ext cx="7863840" cy="493776"/>
           </a:xfrm>
           <a:prstGeom prst="roundRect">
             <a:avLst>
-              <a:gd name="adj" fmla="val 10000"/>
+              <a:gd name="adj" fmla="val 11111"/>
             </a:avLst>
           </a:prstGeom>
           <a:solidFill>
@@ -15445,24 +15534,24 @@
         </p:nvSpPr>
         <p:spPr>
           <a:xfrm>
-            <a:off x="777240" y="3063240"/>
-            <a:ext cx="1554480" cy="548640"/>
-          </a:xfrm>
-          <a:prstGeom prst="rect">
-            <a:avLst/>
-          </a:prstGeom>
-          <a:noFill/>
-          <a:ln/>
-        </p:spPr>
-        <p:txBody>
-          <a:bodyPr wrap="square" lIns="0" tIns="0" rIns="0" bIns="0" rtlCol="0" anchor="ctr"/>
-          <a:lstStyle/>
-          <a:p>
-            <a:pPr indent="0" marL="0">
-              <a:buNone/>
-            </a:pPr>
-            <a:r>
-              <a:rPr lang="en-US" sz="1700" b="1" dirty="0">
+            <a:off x="777240" y="2871216"/>
+            <a:ext cx="1371600" cy="493776"/>
+          </a:xfrm>
+          <a:prstGeom prst="rect">
+            <a:avLst/>
+          </a:prstGeom>
+          <a:noFill/>
+          <a:ln/>
+        </p:spPr>
+        <p:txBody>
+          <a:bodyPr wrap="square" lIns="0" tIns="0" rIns="0" bIns="0" rtlCol="0" anchor="ctr"/>
+          <a:lstStyle/>
+          <a:p>
+            <a:pPr indent="0" marL="0">
+              <a:buNone/>
+            </a:pPr>
+            <a:r>
+              <a:rPr lang="en-US" sz="1600" b="1" dirty="0">
                 <a:solidFill>
                   <a:srgbClr val="7A1524"/>
                 </a:solidFill>
@@ -15470,9 +15559,9 @@
                 <a:ea typeface="Yu Gothic" pitchFamily="34" charset="-122"/>
                 <a:cs typeface="Yu Gothic" pitchFamily="34" charset="-120"/>
               </a:rPr>
-              <a:t>期間</a:t>
-            </a:r>
-            <a:endParaRPr lang="en-US" sz="1700" dirty="0"/>
+              <a:t>1回</a:t>
+            </a:r>
+            <a:endParaRPr lang="en-US" sz="1600" dirty="0"/>
           </a:p>
         </p:txBody>
       </p:sp>
@@ -15484,24 +15573,24 @@
         </p:nvSpPr>
         <p:spPr>
           <a:xfrm>
-            <a:off x="2377440" y="3063240"/>
-            <a:ext cx="5760720" cy="548640"/>
-          </a:xfrm>
-          <a:prstGeom prst="rect">
-            <a:avLst/>
-          </a:prstGeom>
-          <a:noFill/>
-          <a:ln/>
-        </p:spPr>
-        <p:txBody>
-          <a:bodyPr wrap="square" lIns="0" tIns="0" rIns="0" bIns="0" rtlCol="0" anchor="ctr"/>
-          <a:lstStyle/>
-          <a:p>
-            <a:pPr indent="0" marL="0">
-              <a:buNone/>
-            </a:pPr>
-            <a:r>
-              <a:rPr lang="en-US" sz="1800" dirty="0">
+            <a:off x="2194560" y="2871216"/>
+            <a:ext cx="5943600" cy="493776"/>
+          </a:xfrm>
+          <a:prstGeom prst="rect">
+            <a:avLst/>
+          </a:prstGeom>
+          <a:noFill/>
+          <a:ln/>
+        </p:spPr>
+        <p:txBody>
+          <a:bodyPr wrap="square" lIns="0" tIns="0" rIns="0" bIns="0" rtlCol="0" anchor="ctr"/>
+          <a:lstStyle/>
+          <a:p>
+            <a:pPr indent="0" marL="0">
+              <a:buNone/>
+            </a:pPr>
+            <a:r>
+              <a:rPr lang="en-US" sz="1600" dirty="0">
                 <a:solidFill>
                   <a:srgbClr val="3B3634"/>
                 </a:solidFill>
@@ -15509,9 +15598,9 @@
                 <a:ea typeface="Yu Gothic" pitchFamily="34" charset="-122"/>
                 <a:cs typeface="Yu Gothic" pitchFamily="34" charset="-120"/>
               </a:rPr>
-              <a:t>最長3か月</a:t>
-            </a:r>
-            <a:endParaRPr lang="en-US" sz="1800" dirty="0"/>
+              <a:t>60分（講義・ワーク30分＋個別コーチング30分）</a:t>
+            </a:r>
+            <a:endParaRPr lang="en-US" sz="1600" dirty="0"/>
           </a:p>
         </p:txBody>
       </p:sp>
@@ -15523,12 +15612,12 @@
         </p:nvSpPr>
         <p:spPr>
           <a:xfrm>
-            <a:off x="457200" y="3703320"/>
-            <a:ext cx="7863840" cy="548640"/>
+            <a:off x="457200" y="3438144"/>
+            <a:ext cx="7863840" cy="493776"/>
           </a:xfrm>
           <a:prstGeom prst="roundRect">
             <a:avLst>
-              <a:gd name="adj" fmla="val 10000"/>
+              <a:gd name="adj" fmla="val 11111"/>
             </a:avLst>
           </a:prstGeom>
           <a:solidFill>
@@ -15550,8 +15639,191 @@
         </p:nvSpPr>
         <p:spPr>
           <a:xfrm>
-            <a:off x="777240" y="3703320"/>
-            <a:ext cx="1554480" cy="548640"/>
+            <a:off x="777240" y="3438144"/>
+            <a:ext cx="1371600" cy="493776"/>
+          </a:xfrm>
+          <a:prstGeom prst="rect">
+            <a:avLst/>
+          </a:prstGeom>
+          <a:noFill/>
+          <a:ln/>
+        </p:spPr>
+        <p:txBody>
+          <a:bodyPr wrap="square" lIns="0" tIns="0" rIns="0" bIns="0" rtlCol="0" anchor="ctr"/>
+          <a:lstStyle/>
+          <a:p>
+            <a:pPr indent="0" marL="0">
+              <a:buNone/>
+            </a:pPr>
+            <a:r>
+              <a:rPr lang="en-US" sz="1600" b="1" dirty="0">
+                <a:solidFill>
+                  <a:srgbClr val="7A1524"/>
+                </a:solidFill>
+                <a:latin typeface="Yu Gothic" pitchFamily="34" charset="0"/>
+                <a:ea typeface="Yu Gothic" pitchFamily="34" charset="-122"/>
+                <a:cs typeface="Yu Gothic" pitchFamily="34" charset="-120"/>
+              </a:rPr>
+              <a:t>形式</a:t>
+            </a:r>
+            <a:endParaRPr lang="en-US" sz="1600" dirty="0"/>
+          </a:p>
+        </p:txBody>
+      </p:sp>
+      <p:sp>
+        <p:nvSpPr>
+          <p:cNvPr id="16" name="Text 14"/>
+          <p:cNvSpPr txBox="1"/>
+          <p:nvPr/>
+        </p:nvSpPr>
+        <p:spPr>
+          <a:xfrm>
+            <a:off x="2194560" y="3438144"/>
+            <a:ext cx="5943600" cy="493776"/>
+          </a:xfrm>
+          <a:prstGeom prst="rect">
+            <a:avLst/>
+          </a:prstGeom>
+          <a:noFill/>
+          <a:ln/>
+        </p:spPr>
+        <p:txBody>
+          <a:bodyPr wrap="square" lIns="0" tIns="0" rIns="0" bIns="0" rtlCol="0" anchor="ctr"/>
+          <a:lstStyle/>
+          <a:p>
+            <a:pPr indent="0" marL="0">
+              <a:buNone/>
+            </a:pPr>
+            <a:r>
+              <a:rPr lang="en-US" sz="1600" dirty="0">
+                <a:solidFill>
+                  <a:srgbClr val="3B3634"/>
+                </a:solidFill>
+                <a:latin typeface="Yu Gothic" pitchFamily="34" charset="0"/>
+                <a:ea typeface="Yu Gothic" pitchFamily="34" charset="-122"/>
+                <a:cs typeface="Yu Gothic" pitchFamily="34" charset="-120"/>
+              </a:rPr>
+              <a:t>完全1対1／Zoom</a:t>
+            </a:r>
+            <a:endParaRPr lang="en-US" sz="1600" dirty="0"/>
+          </a:p>
+        </p:txBody>
+      </p:sp>
+      <p:sp>
+        <p:nvSpPr>
+          <p:cNvPr id="17" name="Shape 15"/>
+          <p:cNvSpPr/>
+          <p:nvPr/>
+        </p:nvSpPr>
+        <p:spPr>
+          <a:xfrm>
+            <a:off x="457200" y="4005072"/>
+            <a:ext cx="7863840" cy="493776"/>
+          </a:xfrm>
+          <a:prstGeom prst="roundRect">
+            <a:avLst>
+              <a:gd name="adj" fmla="val 11111"/>
+            </a:avLst>
+          </a:prstGeom>
+          <a:solidFill>
+            <a:srgbClr val="FAF3F4"/>
+          </a:solidFill>
+          <a:ln w="12700">
+            <a:solidFill>
+              <a:srgbClr val="FAF3F4"/>
+            </a:solidFill>
+            <a:prstDash val="solid"/>
+          </a:ln>
+        </p:spPr>
+      </p:sp>
+      <p:sp>
+        <p:nvSpPr>
+          <p:cNvPr id="18" name="Text 16"/>
+          <p:cNvSpPr txBox="1"/>
+          <p:nvPr/>
+        </p:nvSpPr>
+        <p:spPr>
+          <a:xfrm>
+            <a:off x="777240" y="4005072"/>
+            <a:ext cx="1371600" cy="493776"/>
+          </a:xfrm>
+          <a:prstGeom prst="rect">
+            <a:avLst/>
+          </a:prstGeom>
+          <a:noFill/>
+          <a:ln/>
+        </p:spPr>
+        <p:txBody>
+          <a:bodyPr wrap="square" lIns="0" tIns="0" rIns="0" bIns="0" rtlCol="0" anchor="ctr"/>
+          <a:lstStyle/>
+          <a:p>
+            <a:pPr indent="0" marL="0">
+              <a:buNone/>
+            </a:pPr>
+            <a:r>
+              <a:rPr lang="en-US" sz="1600" b="1" dirty="0">
+                <a:solidFill>
+                  <a:srgbClr val="7A1524"/>
+                </a:solidFill>
+                <a:latin typeface="Yu Gothic" pitchFamily="34" charset="0"/>
+                <a:ea typeface="Yu Gothic" pitchFamily="34" charset="-122"/>
+                <a:cs typeface="Yu Gothic" pitchFamily="34" charset="-120"/>
+              </a:rPr>
+              <a:t>ペース</a:t>
+            </a:r>
+            <a:endParaRPr lang="en-US" sz="1600" dirty="0"/>
+          </a:p>
+        </p:txBody>
+      </p:sp>
+      <p:sp>
+        <p:nvSpPr>
+          <p:cNvPr id="19" name="Text 17"/>
+          <p:cNvSpPr txBox="1"/>
+          <p:nvPr/>
+        </p:nvSpPr>
+        <p:spPr>
+          <a:xfrm>
+            <a:off x="2194560" y="4005072"/>
+            <a:ext cx="5943600" cy="493776"/>
+          </a:xfrm>
+          <a:prstGeom prst="rect">
+            <a:avLst/>
+          </a:prstGeom>
+          <a:noFill/>
+          <a:ln/>
+        </p:spPr>
+        <p:txBody>
+          <a:bodyPr wrap="square" lIns="0" tIns="0" rIns="0" bIns="0" rtlCol="0" anchor="ctr"/>
+          <a:lstStyle/>
+          <a:p>
+            <a:pPr indent="0" marL="0">
+              <a:buNone/>
+            </a:pPr>
+            <a:r>
+              <a:rPr lang="en-US" sz="1600" dirty="0">
+                <a:solidFill>
+                  <a:srgbClr val="3B3634"/>
+                </a:solidFill>
+                <a:latin typeface="Yu Gothic" pitchFamily="34" charset="0"/>
+                <a:ea typeface="Yu Gothic" pitchFamily="34" charset="-122"/>
+                <a:cs typeface="Yu Gothic" pitchFamily="34" charset="-120"/>
+              </a:rPr>
+              <a:t>試合日程に合わせて調整</a:t>
+            </a:r>
+            <a:endParaRPr lang="en-US" sz="1600" dirty="0"/>
+          </a:p>
+        </p:txBody>
+      </p:sp>
+      <p:sp>
+        <p:nvSpPr>
+          <p:cNvPr id="20" name="Text 18"/>
+          <p:cNvSpPr txBox="1"/>
+          <p:nvPr/>
+        </p:nvSpPr>
+        <p:spPr>
+          <a:xfrm>
+            <a:off x="457200" y="4617720"/>
+            <a:ext cx="7498080" cy="411480"/>
           </a:xfrm>
           <a:prstGeom prst="rect">
             <a:avLst/>
@@ -15575,104 +15847,9 @@
                 <a:ea typeface="Yu Gothic" pitchFamily="34" charset="-122"/>
                 <a:cs typeface="Yu Gothic" pitchFamily="34" charset="-120"/>
               </a:rPr>
-              <a:t>ペース</a:t>
+              <a:t>知識を聞くだけではなく、「あなたならどうする？」まで一緒につくります。</a:t>
             </a:r>
             <a:endParaRPr lang="en-US" sz="1700" dirty="0"/>
-          </a:p>
-        </p:txBody>
-      </p:sp>
-      <p:sp>
-        <p:nvSpPr>
-          <p:cNvPr id="16" name="Text 14"/>
-          <p:cNvSpPr txBox="1"/>
-          <p:nvPr/>
-        </p:nvSpPr>
-        <p:spPr>
-          <a:xfrm>
-            <a:off x="2377440" y="3703320"/>
-            <a:ext cx="5760720" cy="548640"/>
-          </a:xfrm>
-          <a:prstGeom prst="rect">
-            <a:avLst/>
-          </a:prstGeom>
-          <a:noFill/>
-          <a:ln/>
-        </p:spPr>
-        <p:txBody>
-          <a:bodyPr wrap="square" lIns="0" tIns="0" rIns="0" bIns="0" rtlCol="0" anchor="ctr"/>
-          <a:lstStyle/>
-          <a:p>
-            <a:pPr indent="0" marL="0">
-              <a:buNone/>
-            </a:pPr>
-            <a:r>
-              <a:rPr lang="en-US" sz="1800" dirty="0">
-                <a:solidFill>
-                  <a:srgbClr val="3B3634"/>
-                </a:solidFill>
-                <a:latin typeface="Yu Gothic" pitchFamily="34" charset="0"/>
-                <a:ea typeface="Yu Gothic" pitchFamily="34" charset="-122"/>
-                <a:cs typeface="Yu Gothic" pitchFamily="34" charset="-120"/>
-              </a:rPr>
-              <a:t>試合日程に合わせて調整</a:t>
-            </a:r>
-            <a:endParaRPr lang="en-US" sz="1800" dirty="0"/>
-          </a:p>
-        </p:txBody>
-      </p:sp>
-      <p:sp>
-        <p:nvSpPr>
-          <p:cNvPr id="17" name="Text 15"/>
-          <p:cNvSpPr txBox="1"/>
-          <p:nvPr/>
-        </p:nvSpPr>
-        <p:spPr>
-          <a:xfrm>
-            <a:off x="457200" y="4389120"/>
-            <a:ext cx="7863840" cy="548640"/>
-          </a:xfrm>
-          <a:prstGeom prst="rect">
-            <a:avLst/>
-          </a:prstGeom>
-          <a:noFill/>
-          <a:ln/>
-        </p:spPr>
-        <p:txBody>
-          <a:bodyPr wrap="square" lIns="0" tIns="0" rIns="0" bIns="0" rtlCol="0" anchor="ctr"/>
-          <a:lstStyle/>
-          <a:p>
-            <a:pPr indent="0" marL="0">
-              <a:buNone/>
-            </a:pPr>
-            <a:r>
-              <a:rPr lang="en-US" sz="1800" b="1" dirty="0">
-                <a:solidFill>
-                  <a:srgbClr val="7A1524"/>
-                </a:solidFill>
-                <a:latin typeface="Yu Gothic" pitchFamily="34" charset="0"/>
-                <a:ea typeface="Yu Gothic" pitchFamily="34" charset="-122"/>
-                <a:cs typeface="Yu Gothic" pitchFamily="34" charset="-120"/>
-              </a:rPr>
-              <a:t>知識を聞くだけではなく、</a:t>
-            </a:r>
-            <a:endParaRPr lang="en-US" sz="1800" dirty="0"/>
-          </a:p>
-          <a:p>
-            <a:pPr indent="0" marL="0">
-              <a:buNone/>
-            </a:pPr>
-            <a:r>
-              <a:rPr lang="en-US" sz="1800" b="1" dirty="0">
-                <a:solidFill>
-                  <a:srgbClr val="7A1524"/>
-                </a:solidFill>
-                <a:latin typeface="Yu Gothic" pitchFamily="34" charset="0"/>
-                <a:ea typeface="Yu Gothic" pitchFamily="34" charset="-122"/>
-                <a:cs typeface="Yu Gothic" pitchFamily="34" charset="-120"/>
-              </a:rPr>
-              <a:t>「あなたならどうする？」まで一緒につくります。</a:t>
-            </a:r>
-            <a:endParaRPr lang="en-US" sz="1800" dirty="0"/>
           </a:p>
         </p:txBody>
       </p:sp>
@@ -15822,7 +15999,7 @@
                 <a:ea typeface="Yu Mincho" pitchFamily="34" charset="-122"/>
                 <a:cs typeface="Yu Mincho" pitchFamily="34" charset="-120"/>
               </a:rPr>
-              <a:t>10回で扱うこと</a:t>
+              <a:t>3か月の流れ</a:t>
             </a:r>
             <a:endParaRPr lang="en-US" sz="3300" dirty="0"/>
           </a:p>
@@ -15836,18 +16013,20 @@
         </p:nvSpPr>
         <p:spPr>
           <a:xfrm>
-            <a:off x="457200" y="1847088"/>
-            <a:ext cx="329184" cy="329184"/>
-          </a:xfrm>
-          <a:prstGeom prst="ellipse">
-            <a:avLst/>
+            <a:off x="457200" y="1783080"/>
+            <a:ext cx="7863840" cy="420624"/>
+          </a:xfrm>
+          <a:prstGeom prst="roundRect">
+            <a:avLst>
+              <a:gd name="adj" fmla="val 13043"/>
+            </a:avLst>
           </a:prstGeom>
           <a:solidFill>
-            <a:srgbClr val="7A1524"/>
+            <a:srgbClr val="FAF3F4"/>
           </a:solidFill>
           <a:ln w="12700">
             <a:solidFill>
-              <a:srgbClr val="7A1524"/>
+              <a:srgbClr val="FAF3F4"/>
             </a:solidFill>
             <a:prstDash val="solid"/>
           </a:ln>
@@ -15861,34 +16040,34 @@
         </p:nvSpPr>
         <p:spPr>
           <a:xfrm>
-            <a:off x="457200" y="1847088"/>
-            <a:ext cx="329184" cy="329184"/>
-          </a:xfrm>
-          <a:prstGeom prst="rect">
-            <a:avLst/>
-          </a:prstGeom>
-          <a:noFill/>
-          <a:ln/>
-        </p:spPr>
-        <p:txBody>
-          <a:bodyPr wrap="square" lIns="0" tIns="0" rIns="0" bIns="0" rtlCol="0" anchor="ctr"/>
-          <a:lstStyle/>
-          <a:p>
-            <a:pPr algn="ctr" indent="0" marL="0">
-              <a:buNone/>
-            </a:pPr>
-            <a:r>
-              <a:rPr lang="en-US" sz="1300" b="1" dirty="0">
-                <a:solidFill>
-                  <a:srgbClr val="FFFFFF"/>
-                </a:solidFill>
-                <a:latin typeface="Yu Gothic" pitchFamily="34" charset="0"/>
-                <a:ea typeface="Yu Gothic" pitchFamily="34" charset="-122"/>
-                <a:cs typeface="Yu Gothic" pitchFamily="34" charset="-120"/>
-              </a:rPr>
-              <a:t>1</a:t>
-            </a:r>
-            <a:endParaRPr lang="en-US" sz="1300" dirty="0"/>
+            <a:off x="777240" y="1783080"/>
+            <a:ext cx="1188720" cy="420624"/>
+          </a:xfrm>
+          <a:prstGeom prst="rect">
+            <a:avLst/>
+          </a:prstGeom>
+          <a:noFill/>
+          <a:ln/>
+        </p:spPr>
+        <p:txBody>
+          <a:bodyPr wrap="square" lIns="0" tIns="0" rIns="0" bIns="0" rtlCol="0" anchor="ctr"/>
+          <a:lstStyle/>
+          <a:p>
+            <a:pPr indent="0" marL="0">
+              <a:buNone/>
+            </a:pPr>
+            <a:r>
+              <a:rPr lang="en-US" sz="1250" b="1" spc="100" kern="0" dirty="0">
+                <a:solidFill>
+                  <a:srgbClr val="7A1524"/>
+                </a:solidFill>
+                <a:latin typeface="Yu Gothic" pitchFamily="34" charset="0"/>
+                <a:ea typeface="Yu Gothic" pitchFamily="34" charset="-122"/>
+                <a:cs typeface="Yu Gothic" pitchFamily="34" charset="-120"/>
+              </a:rPr>
+              <a:t>STEP 1</a:t>
+            </a:r>
+            <a:endParaRPr lang="en-US" sz="1250" dirty="0"/>
           </a:p>
         </p:txBody>
       </p:sp>
@@ -15900,24 +16079,24 @@
         </p:nvSpPr>
         <p:spPr>
           <a:xfrm>
-            <a:off x="914400" y="1783080"/>
-            <a:ext cx="3657600" cy="457200"/>
-          </a:xfrm>
-          <a:prstGeom prst="rect">
-            <a:avLst/>
-          </a:prstGeom>
-          <a:noFill/>
-          <a:ln/>
-        </p:spPr>
-        <p:txBody>
-          <a:bodyPr wrap="square" lIns="0" tIns="0" rIns="0" bIns="0" rtlCol="0" anchor="ctr"/>
-          <a:lstStyle/>
-          <a:p>
-            <a:pPr indent="0" marL="0">
-              <a:buNone/>
-            </a:pPr>
-            <a:r>
-              <a:rPr lang="en-US" sz="1700" dirty="0">
+            <a:off x="2103120" y="1783080"/>
+            <a:ext cx="6035040" cy="420624"/>
+          </a:xfrm>
+          <a:prstGeom prst="rect">
+            <a:avLst/>
+          </a:prstGeom>
+          <a:noFill/>
+          <a:ln/>
+        </p:spPr>
+        <p:txBody>
+          <a:bodyPr wrap="square" lIns="0" tIns="0" rIns="0" bIns="0" rtlCol="0" anchor="ctr"/>
+          <a:lstStyle/>
+          <a:p>
+            <a:pPr indent="0" marL="0">
+              <a:buNone/>
+            </a:pPr>
+            <a:r>
+              <a:rPr lang="en-US" sz="1600" dirty="0">
                 <a:solidFill>
                   <a:srgbClr val="3B3634"/>
                 </a:solidFill>
@@ -15925,9 +16104,9 @@
                 <a:ea typeface="Yu Gothic" pitchFamily="34" charset="-122"/>
                 <a:cs typeface="Yu Gothic" pitchFamily="34" charset="-120"/>
               </a:rPr>
-              <a:t>自分の崩れ方を知る</a:t>
-            </a:r>
-            <a:endParaRPr lang="en-US" sz="1700" dirty="0"/>
+              <a:t>勝ちたい試合・取りたい一本を明確にする</a:t>
+            </a:r>
+            <a:endParaRPr lang="en-US" sz="1600" dirty="0"/>
           </a:p>
         </p:txBody>
       </p:sp>
@@ -15939,18 +16118,20 @@
         </p:nvSpPr>
         <p:spPr>
           <a:xfrm>
-            <a:off x="457200" y="2450592"/>
-            <a:ext cx="329184" cy="329184"/>
-          </a:xfrm>
-          <a:prstGeom prst="ellipse">
-            <a:avLst/>
+            <a:off x="457200" y="2258568"/>
+            <a:ext cx="7863840" cy="420624"/>
+          </a:xfrm>
+          <a:prstGeom prst="roundRect">
+            <a:avLst>
+              <a:gd name="adj" fmla="val 13043"/>
+            </a:avLst>
           </a:prstGeom>
           <a:solidFill>
-            <a:srgbClr val="7A1524"/>
+            <a:srgbClr val="FAF3F4"/>
           </a:solidFill>
           <a:ln w="12700">
             <a:solidFill>
-              <a:srgbClr val="7A1524"/>
+              <a:srgbClr val="FAF3F4"/>
             </a:solidFill>
             <a:prstDash val="solid"/>
           </a:ln>
@@ -15964,34 +16145,34 @@
         </p:nvSpPr>
         <p:spPr>
           <a:xfrm>
-            <a:off x="457200" y="2450592"/>
-            <a:ext cx="329184" cy="329184"/>
-          </a:xfrm>
-          <a:prstGeom prst="rect">
-            <a:avLst/>
-          </a:prstGeom>
-          <a:noFill/>
-          <a:ln/>
-        </p:spPr>
-        <p:txBody>
-          <a:bodyPr wrap="square" lIns="0" tIns="0" rIns="0" bIns="0" rtlCol="0" anchor="ctr"/>
-          <a:lstStyle/>
-          <a:p>
-            <a:pPr algn="ctr" indent="0" marL="0">
-              <a:buNone/>
-            </a:pPr>
-            <a:r>
-              <a:rPr lang="en-US" sz="1300" b="1" dirty="0">
-                <a:solidFill>
-                  <a:srgbClr val="FFFFFF"/>
-                </a:solidFill>
-                <a:latin typeface="Yu Gothic" pitchFamily="34" charset="0"/>
-                <a:ea typeface="Yu Gothic" pitchFamily="34" charset="-122"/>
-                <a:cs typeface="Yu Gothic" pitchFamily="34" charset="-120"/>
-              </a:rPr>
-              <a:t>2</a:t>
-            </a:r>
-            <a:endParaRPr lang="en-US" sz="1300" dirty="0"/>
+            <a:off x="777240" y="2258568"/>
+            <a:ext cx="1188720" cy="420624"/>
+          </a:xfrm>
+          <a:prstGeom prst="rect">
+            <a:avLst/>
+          </a:prstGeom>
+          <a:noFill/>
+          <a:ln/>
+        </p:spPr>
+        <p:txBody>
+          <a:bodyPr wrap="square" lIns="0" tIns="0" rIns="0" bIns="0" rtlCol="0" anchor="ctr"/>
+          <a:lstStyle/>
+          <a:p>
+            <a:pPr indent="0" marL="0">
+              <a:buNone/>
+            </a:pPr>
+            <a:r>
+              <a:rPr lang="en-US" sz="1250" b="1" spc="100" kern="0" dirty="0">
+                <a:solidFill>
+                  <a:srgbClr val="7A1524"/>
+                </a:solidFill>
+                <a:latin typeface="Yu Gothic" pitchFamily="34" charset="0"/>
+                <a:ea typeface="Yu Gothic" pitchFamily="34" charset="-122"/>
+                <a:cs typeface="Yu Gothic" pitchFamily="34" charset="-120"/>
+              </a:rPr>
+              <a:t>STEP 2</a:t>
+            </a:r>
+            <a:endParaRPr lang="en-US" sz="1250" dirty="0"/>
           </a:p>
         </p:txBody>
       </p:sp>
@@ -16003,24 +16184,24 @@
         </p:nvSpPr>
         <p:spPr>
           <a:xfrm>
-            <a:off x="914400" y="2386584"/>
-            <a:ext cx="3657600" cy="457200"/>
-          </a:xfrm>
-          <a:prstGeom prst="rect">
-            <a:avLst/>
-          </a:prstGeom>
-          <a:noFill/>
-          <a:ln/>
-        </p:spPr>
-        <p:txBody>
-          <a:bodyPr wrap="square" lIns="0" tIns="0" rIns="0" bIns="0" rtlCol="0" anchor="ctr"/>
-          <a:lstStyle/>
-          <a:p>
-            <a:pPr indent="0" marL="0">
-              <a:buNone/>
-            </a:pPr>
-            <a:r>
-              <a:rPr lang="en-US" sz="1700" dirty="0">
+            <a:off x="2103120" y="2258568"/>
+            <a:ext cx="6035040" cy="420624"/>
+          </a:xfrm>
+          <a:prstGeom prst="rect">
+            <a:avLst/>
+          </a:prstGeom>
+          <a:noFill/>
+          <a:ln/>
+        </p:spPr>
+        <p:txBody>
+          <a:bodyPr wrap="square" lIns="0" tIns="0" rIns="0" bIns="0" rtlCol="0" anchor="ctr"/>
+          <a:lstStyle/>
+          <a:p>
+            <a:pPr indent="0" marL="0">
+              <a:buNone/>
+            </a:pPr>
+            <a:r>
+              <a:rPr lang="en-US" sz="1600" dirty="0">
                 <a:solidFill>
                   <a:srgbClr val="3B3634"/>
                 </a:solidFill>
@@ -16028,9 +16209,9 @@
                 <a:ea typeface="Yu Gothic" pitchFamily="34" charset="-122"/>
                 <a:cs typeface="Yu Gothic" pitchFamily="34" charset="-120"/>
               </a:rPr>
-              <a:t>取りたい記録から逆算する</a:t>
-            </a:r>
-            <a:endParaRPr lang="en-US" sz="1700" dirty="0"/>
+              <a:t>自分が崩れるパターンを知る</a:t>
+            </a:r>
+            <a:endParaRPr lang="en-US" sz="1600" dirty="0"/>
           </a:p>
         </p:txBody>
       </p:sp>
@@ -16042,18 +16223,20 @@
         </p:nvSpPr>
         <p:spPr>
           <a:xfrm>
-            <a:off x="457200" y="3054096"/>
-            <a:ext cx="329184" cy="329184"/>
-          </a:xfrm>
-          <a:prstGeom prst="ellipse">
-            <a:avLst/>
+            <a:off x="457200" y="2734056"/>
+            <a:ext cx="7863840" cy="420624"/>
+          </a:xfrm>
+          <a:prstGeom prst="roundRect">
+            <a:avLst>
+              <a:gd name="adj" fmla="val 13043"/>
+            </a:avLst>
           </a:prstGeom>
           <a:solidFill>
-            <a:srgbClr val="7A1524"/>
+            <a:srgbClr val="FAF3F4"/>
           </a:solidFill>
           <a:ln w="12700">
             <a:solidFill>
-              <a:srgbClr val="7A1524"/>
+              <a:srgbClr val="FAF3F4"/>
             </a:solidFill>
             <a:prstDash val="solid"/>
           </a:ln>
@@ -16067,34 +16250,34 @@
         </p:nvSpPr>
         <p:spPr>
           <a:xfrm>
-            <a:off x="457200" y="3054096"/>
-            <a:ext cx="329184" cy="329184"/>
-          </a:xfrm>
-          <a:prstGeom prst="rect">
-            <a:avLst/>
-          </a:prstGeom>
-          <a:noFill/>
-          <a:ln/>
-        </p:spPr>
-        <p:txBody>
-          <a:bodyPr wrap="square" lIns="0" tIns="0" rIns="0" bIns="0" rtlCol="0" anchor="ctr"/>
-          <a:lstStyle/>
-          <a:p>
-            <a:pPr algn="ctr" indent="0" marL="0">
-              <a:buNone/>
-            </a:pPr>
-            <a:r>
-              <a:rPr lang="en-US" sz="1300" b="1" dirty="0">
-                <a:solidFill>
-                  <a:srgbClr val="FFFFFF"/>
-                </a:solidFill>
-                <a:latin typeface="Yu Gothic" pitchFamily="34" charset="0"/>
-                <a:ea typeface="Yu Gothic" pitchFamily="34" charset="-122"/>
-                <a:cs typeface="Yu Gothic" pitchFamily="34" charset="-120"/>
-              </a:rPr>
-              <a:t>3</a:t>
-            </a:r>
-            <a:endParaRPr lang="en-US" sz="1300" dirty="0"/>
+            <a:off x="777240" y="2734056"/>
+            <a:ext cx="1188720" cy="420624"/>
+          </a:xfrm>
+          <a:prstGeom prst="rect">
+            <a:avLst/>
+          </a:prstGeom>
+          <a:noFill/>
+          <a:ln/>
+        </p:spPr>
+        <p:txBody>
+          <a:bodyPr wrap="square" lIns="0" tIns="0" rIns="0" bIns="0" rtlCol="0" anchor="ctr"/>
+          <a:lstStyle/>
+          <a:p>
+            <a:pPr indent="0" marL="0">
+              <a:buNone/>
+            </a:pPr>
+            <a:r>
+              <a:rPr lang="en-US" sz="1250" b="1" spc="100" kern="0" dirty="0">
+                <a:solidFill>
+                  <a:srgbClr val="7A1524"/>
+                </a:solidFill>
+                <a:latin typeface="Yu Gothic" pitchFamily="34" charset="0"/>
+                <a:ea typeface="Yu Gothic" pitchFamily="34" charset="-122"/>
+                <a:cs typeface="Yu Gothic" pitchFamily="34" charset="-120"/>
+              </a:rPr>
+              <a:t>STEP 3</a:t>
+            </a:r>
+            <a:endParaRPr lang="en-US" sz="1250" dirty="0"/>
           </a:p>
         </p:txBody>
       </p:sp>
@@ -16106,24 +16289,24 @@
         </p:nvSpPr>
         <p:spPr>
           <a:xfrm>
-            <a:off x="914400" y="2990088"/>
-            <a:ext cx="3657600" cy="457200"/>
-          </a:xfrm>
-          <a:prstGeom prst="rect">
-            <a:avLst/>
-          </a:prstGeom>
-          <a:noFill/>
-          <a:ln/>
-        </p:spPr>
-        <p:txBody>
-          <a:bodyPr wrap="square" lIns="0" tIns="0" rIns="0" bIns="0" rtlCol="0" anchor="ctr"/>
-          <a:lstStyle/>
-          <a:p>
-            <a:pPr indent="0" marL="0">
-              <a:buNone/>
-            </a:pPr>
-            <a:r>
-              <a:rPr lang="en-US" sz="1700" dirty="0">
+            <a:off x="2103120" y="2734056"/>
+            <a:ext cx="6035040" cy="420624"/>
+          </a:xfrm>
+          <a:prstGeom prst="rect">
+            <a:avLst/>
+          </a:prstGeom>
+          <a:noFill/>
+          <a:ln/>
+        </p:spPr>
+        <p:txBody>
+          <a:bodyPr wrap="square" lIns="0" tIns="0" rIns="0" bIns="0" rtlCol="0" anchor="ctr"/>
+          <a:lstStyle/>
+          <a:p>
+            <a:pPr indent="0" marL="0">
+              <a:buNone/>
+            </a:pPr>
+            <a:r>
+              <a:rPr lang="en-US" sz="1600" dirty="0">
                 <a:solidFill>
                   <a:srgbClr val="3B3634"/>
                 </a:solidFill>
@@ -16131,9 +16314,9 @@
                 <a:ea typeface="Yu Gothic" pitchFamily="34" charset="-122"/>
                 <a:cs typeface="Yu Gothic" pitchFamily="34" charset="-120"/>
               </a:rPr>
-              <a:t>プレッシャーを理解する</a:t>
-            </a:r>
-            <a:endParaRPr lang="en-US" sz="1700" dirty="0"/>
+              <a:t>自分に合ったメンタルスキルをつくる</a:t>
+            </a:r>
+            <a:endParaRPr lang="en-US" sz="1600" dirty="0"/>
           </a:p>
         </p:txBody>
       </p:sp>
@@ -16145,18 +16328,20 @@
         </p:nvSpPr>
         <p:spPr>
           <a:xfrm>
-            <a:off x="457200" y="3657600"/>
-            <a:ext cx="329184" cy="329184"/>
-          </a:xfrm>
-          <a:prstGeom prst="ellipse">
-            <a:avLst/>
+            <a:off x="457200" y="3209544"/>
+            <a:ext cx="7863840" cy="420624"/>
+          </a:xfrm>
+          <a:prstGeom prst="roundRect">
+            <a:avLst>
+              <a:gd name="adj" fmla="val 13043"/>
+            </a:avLst>
           </a:prstGeom>
           <a:solidFill>
-            <a:srgbClr val="7A1524"/>
+            <a:srgbClr val="FAF3F4"/>
           </a:solidFill>
           <a:ln w="12700">
             <a:solidFill>
-              <a:srgbClr val="7A1524"/>
+              <a:srgbClr val="FAF3F4"/>
             </a:solidFill>
             <a:prstDash val="solid"/>
           </a:ln>
@@ -16170,34 +16355,34 @@
         </p:nvSpPr>
         <p:spPr>
           <a:xfrm>
-            <a:off x="457200" y="3657600"/>
-            <a:ext cx="329184" cy="329184"/>
-          </a:xfrm>
-          <a:prstGeom prst="rect">
-            <a:avLst/>
-          </a:prstGeom>
-          <a:noFill/>
-          <a:ln/>
-        </p:spPr>
-        <p:txBody>
-          <a:bodyPr wrap="square" lIns="0" tIns="0" rIns="0" bIns="0" rtlCol="0" anchor="ctr"/>
-          <a:lstStyle/>
-          <a:p>
-            <a:pPr algn="ctr" indent="0" marL="0">
-              <a:buNone/>
-            </a:pPr>
-            <a:r>
-              <a:rPr lang="en-US" sz="1300" b="1" dirty="0">
-                <a:solidFill>
-                  <a:srgbClr val="FFFFFF"/>
-                </a:solidFill>
-                <a:latin typeface="Yu Gothic" pitchFamily="34" charset="0"/>
-                <a:ea typeface="Yu Gothic" pitchFamily="34" charset="-122"/>
-                <a:cs typeface="Yu Gothic" pitchFamily="34" charset="-120"/>
-              </a:rPr>
-              <a:t>4</a:t>
-            </a:r>
-            <a:endParaRPr lang="en-US" sz="1300" dirty="0"/>
+            <a:off x="777240" y="3209544"/>
+            <a:ext cx="1188720" cy="420624"/>
+          </a:xfrm>
+          <a:prstGeom prst="rect">
+            <a:avLst/>
+          </a:prstGeom>
+          <a:noFill/>
+          <a:ln/>
+        </p:spPr>
+        <p:txBody>
+          <a:bodyPr wrap="square" lIns="0" tIns="0" rIns="0" bIns="0" rtlCol="0" anchor="ctr"/>
+          <a:lstStyle/>
+          <a:p>
+            <a:pPr indent="0" marL="0">
+              <a:buNone/>
+            </a:pPr>
+            <a:r>
+              <a:rPr lang="en-US" sz="1250" b="1" spc="100" kern="0" dirty="0">
+                <a:solidFill>
+                  <a:srgbClr val="7A1524"/>
+                </a:solidFill>
+                <a:latin typeface="Yu Gothic" pitchFamily="34" charset="0"/>
+                <a:ea typeface="Yu Gothic" pitchFamily="34" charset="-122"/>
+                <a:cs typeface="Yu Gothic" pitchFamily="34" charset="-120"/>
+              </a:rPr>
+              <a:t>STEP 4</a:t>
+            </a:r>
+            <a:endParaRPr lang="en-US" sz="1250" dirty="0"/>
           </a:p>
         </p:txBody>
       </p:sp>
@@ -16209,24 +16394,24 @@
         </p:nvSpPr>
         <p:spPr>
           <a:xfrm>
-            <a:off x="914400" y="3593592"/>
-            <a:ext cx="3657600" cy="457200"/>
-          </a:xfrm>
-          <a:prstGeom prst="rect">
-            <a:avLst/>
-          </a:prstGeom>
-          <a:noFill/>
-          <a:ln/>
-        </p:spPr>
-        <p:txBody>
-          <a:bodyPr wrap="square" lIns="0" tIns="0" rIns="0" bIns="0" rtlCol="0" anchor="ctr"/>
-          <a:lstStyle/>
-          <a:p>
-            <a:pPr indent="0" marL="0">
-              <a:buNone/>
-            </a:pPr>
-            <a:r>
-              <a:rPr lang="en-US" sz="1700" dirty="0">
+            <a:off x="2103120" y="3209544"/>
+            <a:ext cx="6035040" cy="420624"/>
+          </a:xfrm>
+          <a:prstGeom prst="rect">
+            <a:avLst/>
+          </a:prstGeom>
+          <a:noFill/>
+          <a:ln/>
+        </p:spPr>
+        <p:txBody>
+          <a:bodyPr wrap="square" lIns="0" tIns="0" rIns="0" bIns="0" rtlCol="0" anchor="ctr"/>
+          <a:lstStyle/>
+          <a:p>
+            <a:pPr indent="0" marL="0">
+              <a:buNone/>
+            </a:pPr>
+            <a:r>
+              <a:rPr lang="en-US" sz="1600" dirty="0">
                 <a:solidFill>
                   <a:srgbClr val="3B3634"/>
                 </a:solidFill>
@@ -16234,9 +16419,9 @@
                 <a:ea typeface="Yu Gothic" pitchFamily="34" charset="-122"/>
                 <a:cs typeface="Yu Gothic" pitchFamily="34" charset="-120"/>
               </a:rPr>
-              <a:t>自分だけのルーティン</a:t>
-            </a:r>
-            <a:endParaRPr lang="en-US" sz="1700" dirty="0"/>
+              <a:t>自分専用の試合ルーティンをつくる</a:t>
+            </a:r>
+            <a:endParaRPr lang="en-US" sz="1600" dirty="0"/>
           </a:p>
         </p:txBody>
       </p:sp>
@@ -16248,18 +16433,20 @@
         </p:nvSpPr>
         <p:spPr>
           <a:xfrm>
-            <a:off x="457200" y="4261104"/>
-            <a:ext cx="329184" cy="329184"/>
-          </a:xfrm>
-          <a:prstGeom prst="ellipse">
-            <a:avLst/>
+            <a:off x="457200" y="3685032"/>
+            <a:ext cx="7863840" cy="420624"/>
+          </a:xfrm>
+          <a:prstGeom prst="roundRect">
+            <a:avLst>
+              <a:gd name="adj" fmla="val 13043"/>
+            </a:avLst>
           </a:prstGeom>
           <a:solidFill>
-            <a:srgbClr val="7A1524"/>
+            <a:srgbClr val="FAF3F4"/>
           </a:solidFill>
           <a:ln w="12700">
             <a:solidFill>
-              <a:srgbClr val="7A1524"/>
+              <a:srgbClr val="FAF3F4"/>
             </a:solidFill>
             <a:prstDash val="solid"/>
           </a:ln>
@@ -16273,34 +16460,34 @@
         </p:nvSpPr>
         <p:spPr>
           <a:xfrm>
-            <a:off x="457200" y="4261104"/>
-            <a:ext cx="329184" cy="329184"/>
-          </a:xfrm>
-          <a:prstGeom prst="rect">
-            <a:avLst/>
-          </a:prstGeom>
-          <a:noFill/>
-          <a:ln/>
-        </p:spPr>
-        <p:txBody>
-          <a:bodyPr wrap="square" lIns="0" tIns="0" rIns="0" bIns="0" rtlCol="0" anchor="ctr"/>
-          <a:lstStyle/>
-          <a:p>
-            <a:pPr algn="ctr" indent="0" marL="0">
-              <a:buNone/>
-            </a:pPr>
-            <a:r>
-              <a:rPr lang="en-US" sz="1300" b="1" dirty="0">
-                <a:solidFill>
-                  <a:srgbClr val="FFFFFF"/>
-                </a:solidFill>
-                <a:latin typeface="Yu Gothic" pitchFamily="34" charset="0"/>
-                <a:ea typeface="Yu Gothic" pitchFamily="34" charset="-122"/>
-                <a:cs typeface="Yu Gothic" pitchFamily="34" charset="-120"/>
-              </a:rPr>
-              <a:t>5</a:t>
-            </a:r>
-            <a:endParaRPr lang="en-US" sz="1300" dirty="0"/>
+            <a:off x="777240" y="3685032"/>
+            <a:ext cx="1188720" cy="420624"/>
+          </a:xfrm>
+          <a:prstGeom prst="rect">
+            <a:avLst/>
+          </a:prstGeom>
+          <a:noFill/>
+          <a:ln/>
+        </p:spPr>
+        <p:txBody>
+          <a:bodyPr wrap="square" lIns="0" tIns="0" rIns="0" bIns="0" rtlCol="0" anchor="ctr"/>
+          <a:lstStyle/>
+          <a:p>
+            <a:pPr indent="0" marL="0">
+              <a:buNone/>
+            </a:pPr>
+            <a:r>
+              <a:rPr lang="en-US" sz="1250" b="1" spc="100" kern="0" dirty="0">
+                <a:solidFill>
+                  <a:srgbClr val="7A1524"/>
+                </a:solidFill>
+                <a:latin typeface="Yu Gothic" pitchFamily="34" charset="0"/>
+                <a:ea typeface="Yu Gothic" pitchFamily="34" charset="-122"/>
+                <a:cs typeface="Yu Gothic" pitchFamily="34" charset="-120"/>
+              </a:rPr>
+              <a:t>STEP 5</a:t>
+            </a:r>
+            <a:endParaRPr lang="en-US" sz="1250" dirty="0"/>
           </a:p>
         </p:txBody>
       </p:sp>
@@ -16312,24 +16499,24 @@
         </p:nvSpPr>
         <p:spPr>
           <a:xfrm>
-            <a:off x="914400" y="4197096"/>
-            <a:ext cx="3657600" cy="457200"/>
-          </a:xfrm>
-          <a:prstGeom prst="rect">
-            <a:avLst/>
-          </a:prstGeom>
-          <a:noFill/>
-          <a:ln/>
-        </p:spPr>
-        <p:txBody>
-          <a:bodyPr wrap="square" lIns="0" tIns="0" rIns="0" bIns="0" rtlCol="0" anchor="ctr"/>
-          <a:lstStyle/>
-          <a:p>
-            <a:pPr indent="0" marL="0">
-              <a:buNone/>
-            </a:pPr>
-            <a:r>
-              <a:rPr lang="en-US" sz="1700" dirty="0">
+            <a:off x="2103120" y="3685032"/>
+            <a:ext cx="6035040" cy="420624"/>
+          </a:xfrm>
+          <a:prstGeom prst="rect">
+            <a:avLst/>
+          </a:prstGeom>
+          <a:noFill/>
+          <a:ln/>
+        </p:spPr>
+        <p:txBody>
+          <a:bodyPr wrap="square" lIns="0" tIns="0" rIns="0" bIns="0" rtlCol="0" anchor="ctr"/>
+          <a:lstStyle/>
+          <a:p>
+            <a:pPr indent="0" marL="0">
+              <a:buNone/>
+            </a:pPr>
+            <a:r>
+              <a:rPr lang="en-US" sz="1600" dirty="0">
                 <a:solidFill>
                   <a:srgbClr val="3B3634"/>
                 </a:solidFill>
@@ -16337,9 +16524,9 @@
                 <a:ea typeface="Yu Gothic" pitchFamily="34" charset="-122"/>
                 <a:cs typeface="Yu Gothic" pitchFamily="34" charset="-120"/>
               </a:rPr>
-              <a:t>失敗しても崩れない</a:t>
-            </a:r>
-            <a:endParaRPr lang="en-US" sz="1700" dirty="0"/>
+              <a:t>本番を想定して使ってみる</a:t>
+            </a:r>
+            <a:endParaRPr lang="en-US" sz="1600" dirty="0"/>
           </a:p>
         </p:txBody>
       </p:sp>
@@ -16351,18 +16538,20 @@
         </p:nvSpPr>
         <p:spPr>
           <a:xfrm>
-            <a:off x="4800600" y="1847088"/>
-            <a:ext cx="329184" cy="329184"/>
-          </a:xfrm>
-          <a:prstGeom prst="ellipse">
-            <a:avLst/>
+            <a:off x="457200" y="4160520"/>
+            <a:ext cx="7863840" cy="420624"/>
+          </a:xfrm>
+          <a:prstGeom prst="roundRect">
+            <a:avLst>
+              <a:gd name="adj" fmla="val 13043"/>
+            </a:avLst>
           </a:prstGeom>
           <a:solidFill>
-            <a:srgbClr val="7A1524"/>
+            <a:srgbClr val="540E19"/>
           </a:solidFill>
           <a:ln w="12700">
             <a:solidFill>
-              <a:srgbClr val="7A1524"/>
+              <a:srgbClr val="540E19"/>
             </a:solidFill>
             <a:prstDash val="solid"/>
           </a:ln>
@@ -16376,24 +16565,63 @@
         </p:nvSpPr>
         <p:spPr>
           <a:xfrm>
-            <a:off x="4800600" y="1847088"/>
-            <a:ext cx="329184" cy="329184"/>
-          </a:xfrm>
-          <a:prstGeom prst="rect">
-            <a:avLst/>
-          </a:prstGeom>
-          <a:noFill/>
-          <a:ln/>
-        </p:spPr>
-        <p:txBody>
-          <a:bodyPr wrap="square" lIns="0" tIns="0" rIns="0" bIns="0" rtlCol="0" anchor="ctr"/>
-          <a:lstStyle/>
-          <a:p>
-            <a:pPr algn="ctr" indent="0" marL="0">
-              <a:buNone/>
-            </a:pPr>
-            <a:r>
-              <a:rPr lang="en-US" sz="1300" b="1" dirty="0">
+            <a:off x="777240" y="4160520"/>
+            <a:ext cx="1188720" cy="420624"/>
+          </a:xfrm>
+          <a:prstGeom prst="rect">
+            <a:avLst/>
+          </a:prstGeom>
+          <a:noFill/>
+          <a:ln/>
+        </p:spPr>
+        <p:txBody>
+          <a:bodyPr wrap="square" lIns="0" tIns="0" rIns="0" bIns="0" rtlCol="0" anchor="ctr"/>
+          <a:lstStyle/>
+          <a:p>
+            <a:pPr indent="0" marL="0">
+              <a:buNone/>
+            </a:pPr>
+            <a:r>
+              <a:rPr lang="en-US" sz="1250" b="1" spc="100" kern="0" dirty="0">
+                <a:solidFill>
+                  <a:srgbClr val="F0B9C3"/>
+                </a:solidFill>
+                <a:latin typeface="Yu Gothic" pitchFamily="34" charset="0"/>
+                <a:ea typeface="Yu Gothic" pitchFamily="34" charset="-122"/>
+                <a:cs typeface="Yu Gothic" pitchFamily="34" charset="-120"/>
+              </a:rPr>
+              <a:t>STEP 6</a:t>
+            </a:r>
+            <a:endParaRPr lang="en-US" sz="1250" dirty="0"/>
+          </a:p>
+        </p:txBody>
+      </p:sp>
+      <p:sp>
+        <p:nvSpPr>
+          <p:cNvPr id="22" name="Text 20"/>
+          <p:cNvSpPr txBox="1"/>
+          <p:nvPr/>
+        </p:nvSpPr>
+        <p:spPr>
+          <a:xfrm>
+            <a:off x="2103120" y="4160520"/>
+            <a:ext cx="6035040" cy="420624"/>
+          </a:xfrm>
+          <a:prstGeom prst="rect">
+            <a:avLst/>
+          </a:prstGeom>
+          <a:noFill/>
+          <a:ln/>
+        </p:spPr>
+        <p:txBody>
+          <a:bodyPr wrap="square" lIns="0" tIns="0" rIns="0" bIns="0" rtlCol="0" anchor="ctr"/>
+          <a:lstStyle/>
+          <a:p>
+            <a:pPr indent="0" marL="0">
+              <a:buNone/>
+            </a:pPr>
+            <a:r>
+              <a:rPr lang="en-US" sz="1600" b="1" dirty="0">
                 <a:solidFill>
                   <a:srgbClr val="FFFFFF"/>
                 </a:solidFill>
@@ -16401,460 +16629,48 @@
                 <a:ea typeface="Yu Gothic" pitchFamily="34" charset="-122"/>
                 <a:cs typeface="Yu Gothic" pitchFamily="34" charset="-120"/>
               </a:rPr>
-              <a:t>6</a:t>
-            </a:r>
-            <a:endParaRPr lang="en-US" sz="1300" dirty="0"/>
-          </a:p>
-        </p:txBody>
-      </p:sp>
-      <p:sp>
-        <p:nvSpPr>
-          <p:cNvPr id="22" name="Text 20"/>
-          <p:cNvSpPr txBox="1"/>
-          <p:nvPr/>
-        </p:nvSpPr>
-        <p:spPr>
-          <a:xfrm>
-            <a:off x="5257800" y="1783080"/>
-            <a:ext cx="3657600" cy="457200"/>
-          </a:xfrm>
-          <a:prstGeom prst="rect">
-            <a:avLst/>
-          </a:prstGeom>
-          <a:noFill/>
-          <a:ln/>
-        </p:spPr>
-        <p:txBody>
-          <a:bodyPr wrap="square" lIns="0" tIns="0" rIns="0" bIns="0" rtlCol="0" anchor="ctr"/>
-          <a:lstStyle/>
-          <a:p>
-            <a:pPr indent="0" marL="0">
-              <a:buNone/>
-            </a:pPr>
-            <a:r>
-              <a:rPr lang="en-US" sz="1700" dirty="0">
-                <a:solidFill>
-                  <a:srgbClr val="3B3634"/>
-                </a:solidFill>
-                <a:latin typeface="Yu Gothic" pitchFamily="34" charset="0"/>
-                <a:ea typeface="Yu Gothic" pitchFamily="34" charset="-122"/>
-                <a:cs typeface="Yu Gothic" pitchFamily="34" charset="-120"/>
-              </a:rPr>
-              <a:t>自分の試合に集中する</a:t>
-            </a:r>
-            <a:endParaRPr lang="en-US" sz="1700" dirty="0"/>
-          </a:p>
-        </p:txBody>
-      </p:sp>
-      <p:sp>
-        <p:nvSpPr>
-          <p:cNvPr id="23" name="Shape 21"/>
-          <p:cNvSpPr/>
-          <p:nvPr/>
-        </p:nvSpPr>
-        <p:spPr>
-          <a:xfrm>
-            <a:off x="4800600" y="2450592"/>
-            <a:ext cx="329184" cy="329184"/>
-          </a:xfrm>
-          <a:prstGeom prst="ellipse">
-            <a:avLst/>
-          </a:prstGeom>
-          <a:solidFill>
-            <a:srgbClr val="7A1524"/>
-          </a:solidFill>
-          <a:ln w="12700">
-            <a:solidFill>
-              <a:srgbClr val="7A1524"/>
-            </a:solidFill>
-            <a:prstDash val="solid"/>
-          </a:ln>
-        </p:spPr>
-      </p:sp>
-      <p:sp>
-        <p:nvSpPr>
-          <p:cNvPr id="24" name="Text 22"/>
-          <p:cNvSpPr txBox="1"/>
-          <p:nvPr/>
-        </p:nvSpPr>
-        <p:spPr>
-          <a:xfrm>
-            <a:off x="4800600" y="2450592"/>
-            <a:ext cx="329184" cy="329184"/>
-          </a:xfrm>
-          <a:prstGeom prst="rect">
-            <a:avLst/>
-          </a:prstGeom>
-          <a:noFill/>
-          <a:ln/>
-        </p:spPr>
-        <p:txBody>
-          <a:bodyPr wrap="square" lIns="0" tIns="0" rIns="0" bIns="0" rtlCol="0" anchor="ctr"/>
-          <a:lstStyle/>
-          <a:p>
-            <a:pPr algn="ctr" indent="0" marL="0">
-              <a:buNone/>
-            </a:pPr>
-            <a:r>
-              <a:rPr lang="en-US" sz="1300" b="1" dirty="0">
-                <a:solidFill>
-                  <a:srgbClr val="FFFFFF"/>
-                </a:solidFill>
-                <a:latin typeface="Yu Gothic" pitchFamily="34" charset="0"/>
-                <a:ea typeface="Yu Gothic" pitchFamily="34" charset="-122"/>
-                <a:cs typeface="Yu Gothic" pitchFamily="34" charset="-120"/>
-              </a:rPr>
-              <a:t>7</a:t>
-            </a:r>
-            <a:endParaRPr lang="en-US" sz="1300" dirty="0"/>
-          </a:p>
-        </p:txBody>
-      </p:sp>
-      <p:sp>
-        <p:nvSpPr>
-          <p:cNvPr id="25" name="Text 23"/>
-          <p:cNvSpPr txBox="1"/>
-          <p:nvPr/>
-        </p:nvSpPr>
-        <p:spPr>
-          <a:xfrm>
-            <a:off x="5257800" y="2386584"/>
-            <a:ext cx="3657600" cy="457200"/>
-          </a:xfrm>
-          <a:prstGeom prst="rect">
-            <a:avLst/>
-          </a:prstGeom>
-          <a:noFill/>
-          <a:ln/>
-        </p:spPr>
-        <p:txBody>
-          <a:bodyPr wrap="square" lIns="0" tIns="0" rIns="0" bIns="0" rtlCol="0" anchor="ctr"/>
-          <a:lstStyle/>
-          <a:p>
-            <a:pPr indent="0" marL="0">
-              <a:buNone/>
-            </a:pPr>
-            <a:r>
-              <a:rPr lang="en-US" sz="1700" dirty="0">
-                <a:solidFill>
-                  <a:srgbClr val="3B3634"/>
-                </a:solidFill>
-                <a:latin typeface="Yu Gothic" pitchFamily="34" charset="0"/>
-                <a:ea typeface="Yu Gothic" pitchFamily="34" charset="-122"/>
-                <a:cs typeface="Yu Gothic" pitchFamily="34" charset="-120"/>
-              </a:rPr>
-              <a:t>頑張る・休むを選ぶ</a:t>
-            </a:r>
-            <a:endParaRPr lang="en-US" sz="1700" dirty="0"/>
-          </a:p>
-        </p:txBody>
-      </p:sp>
-      <p:sp>
-        <p:nvSpPr>
-          <p:cNvPr id="26" name="Shape 24"/>
-          <p:cNvSpPr/>
-          <p:nvPr/>
-        </p:nvSpPr>
-        <p:spPr>
-          <a:xfrm>
-            <a:off x="4800600" y="3054096"/>
-            <a:ext cx="329184" cy="329184"/>
-          </a:xfrm>
-          <a:prstGeom prst="ellipse">
-            <a:avLst/>
-          </a:prstGeom>
-          <a:solidFill>
-            <a:srgbClr val="7A1524"/>
-          </a:solidFill>
-          <a:ln w="12700">
-            <a:solidFill>
-              <a:srgbClr val="7A1524"/>
-            </a:solidFill>
-            <a:prstDash val="solid"/>
-          </a:ln>
-        </p:spPr>
-      </p:sp>
-      <p:sp>
-        <p:nvSpPr>
-          <p:cNvPr id="27" name="Text 25"/>
-          <p:cNvSpPr txBox="1"/>
-          <p:nvPr/>
-        </p:nvSpPr>
-        <p:spPr>
-          <a:xfrm>
-            <a:off x="4800600" y="3054096"/>
-            <a:ext cx="329184" cy="329184"/>
-          </a:xfrm>
-          <a:prstGeom prst="rect">
-            <a:avLst/>
-          </a:prstGeom>
-          <a:noFill/>
-          <a:ln/>
-        </p:spPr>
-        <p:txBody>
-          <a:bodyPr wrap="square" lIns="0" tIns="0" rIns="0" bIns="0" rtlCol="0" anchor="ctr"/>
-          <a:lstStyle/>
-          <a:p>
-            <a:pPr algn="ctr" indent="0" marL="0">
-              <a:buNone/>
-            </a:pPr>
-            <a:r>
-              <a:rPr lang="en-US" sz="1300" b="1" dirty="0">
-                <a:solidFill>
-                  <a:srgbClr val="FFFFFF"/>
-                </a:solidFill>
-                <a:latin typeface="Yu Gothic" pitchFamily="34" charset="0"/>
-                <a:ea typeface="Yu Gothic" pitchFamily="34" charset="-122"/>
-                <a:cs typeface="Yu Gothic" pitchFamily="34" charset="-120"/>
-              </a:rPr>
-              <a:t>8</a:t>
-            </a:r>
-            <a:endParaRPr lang="en-US" sz="1300" dirty="0"/>
-          </a:p>
-        </p:txBody>
-      </p:sp>
-      <p:sp>
-        <p:nvSpPr>
-          <p:cNvPr id="28" name="Text 26"/>
-          <p:cNvSpPr txBox="1"/>
-          <p:nvPr/>
-        </p:nvSpPr>
-        <p:spPr>
-          <a:xfrm>
-            <a:off x="5257800" y="2990088"/>
-            <a:ext cx="3657600" cy="457200"/>
-          </a:xfrm>
-          <a:prstGeom prst="rect">
-            <a:avLst/>
-          </a:prstGeom>
-          <a:noFill/>
-          <a:ln/>
-        </p:spPr>
-        <p:txBody>
-          <a:bodyPr wrap="square" lIns="0" tIns="0" rIns="0" bIns="0" rtlCol="0" anchor="ctr"/>
-          <a:lstStyle/>
-          <a:p>
-            <a:pPr indent="0" marL="0">
-              <a:buNone/>
-            </a:pPr>
-            <a:r>
-              <a:rPr lang="en-US" sz="1700" dirty="0">
-                <a:solidFill>
-                  <a:srgbClr val="3B3634"/>
-                </a:solidFill>
-                <a:latin typeface="Yu Gothic" pitchFamily="34" charset="0"/>
-                <a:ea typeface="Yu Gothic" pitchFamily="34" charset="-122"/>
-                <a:cs typeface="Yu Gothic" pitchFamily="34" charset="-120"/>
-              </a:rPr>
-              <a:t>自己信頼を育てる</a:t>
-            </a:r>
-            <a:endParaRPr lang="en-US" sz="1700" dirty="0"/>
-          </a:p>
-        </p:txBody>
-      </p:sp>
-      <p:sp>
-        <p:nvSpPr>
-          <p:cNvPr id="29" name="Shape 27"/>
-          <p:cNvSpPr/>
-          <p:nvPr/>
-        </p:nvSpPr>
-        <p:spPr>
-          <a:xfrm>
-            <a:off x="4800600" y="3657600"/>
-            <a:ext cx="329184" cy="329184"/>
-          </a:xfrm>
-          <a:prstGeom prst="ellipse">
-            <a:avLst/>
-          </a:prstGeom>
-          <a:solidFill>
-            <a:srgbClr val="7A1524"/>
-          </a:solidFill>
-          <a:ln w="12700">
-            <a:solidFill>
-              <a:srgbClr val="7A1524"/>
-            </a:solidFill>
-            <a:prstDash val="solid"/>
-          </a:ln>
-        </p:spPr>
-      </p:sp>
-      <p:sp>
-        <p:nvSpPr>
-          <p:cNvPr id="30" name="Text 28"/>
-          <p:cNvSpPr txBox="1"/>
-          <p:nvPr/>
-        </p:nvSpPr>
-        <p:spPr>
-          <a:xfrm>
-            <a:off x="4800600" y="3657600"/>
-            <a:ext cx="329184" cy="329184"/>
-          </a:xfrm>
-          <a:prstGeom prst="rect">
-            <a:avLst/>
-          </a:prstGeom>
-          <a:noFill/>
-          <a:ln/>
-        </p:spPr>
-        <p:txBody>
-          <a:bodyPr wrap="square" lIns="0" tIns="0" rIns="0" bIns="0" rtlCol="0" anchor="ctr"/>
-          <a:lstStyle/>
-          <a:p>
-            <a:pPr algn="ctr" indent="0" marL="0">
-              <a:buNone/>
-            </a:pPr>
-            <a:r>
-              <a:rPr lang="en-US" sz="1300" b="1" dirty="0">
-                <a:solidFill>
-                  <a:srgbClr val="FFFFFF"/>
-                </a:solidFill>
-                <a:latin typeface="Yu Gothic" pitchFamily="34" charset="0"/>
-                <a:ea typeface="Yu Gothic" pitchFamily="34" charset="-122"/>
-                <a:cs typeface="Yu Gothic" pitchFamily="34" charset="-120"/>
-              </a:rPr>
-              <a:t>9</a:t>
-            </a:r>
-            <a:endParaRPr lang="en-US" sz="1300" dirty="0"/>
-          </a:p>
-        </p:txBody>
-      </p:sp>
-      <p:sp>
-        <p:nvSpPr>
-          <p:cNvPr id="31" name="Text 29"/>
-          <p:cNvSpPr txBox="1"/>
-          <p:nvPr/>
-        </p:nvSpPr>
-        <p:spPr>
-          <a:xfrm>
-            <a:off x="5257800" y="3593592"/>
-            <a:ext cx="3657600" cy="457200"/>
-          </a:xfrm>
-          <a:prstGeom prst="rect">
-            <a:avLst/>
-          </a:prstGeom>
-          <a:noFill/>
-          <a:ln/>
-        </p:spPr>
-        <p:txBody>
-          <a:bodyPr wrap="square" lIns="0" tIns="0" rIns="0" bIns="0" rtlCol="0" anchor="ctr"/>
-          <a:lstStyle/>
-          <a:p>
-            <a:pPr indent="0" marL="0">
-              <a:buNone/>
-            </a:pPr>
-            <a:r>
-              <a:rPr lang="en-US" sz="1700" dirty="0">
-                <a:solidFill>
-                  <a:srgbClr val="3B3634"/>
-                </a:solidFill>
-                <a:latin typeface="Yu Gothic" pitchFamily="34" charset="0"/>
-                <a:ea typeface="Yu Gothic" pitchFamily="34" charset="-122"/>
-                <a:cs typeface="Yu Gothic" pitchFamily="34" charset="-120"/>
-              </a:rPr>
-              <a:t>プランBを持つ</a:t>
-            </a:r>
-            <a:endParaRPr lang="en-US" sz="1700" dirty="0"/>
-          </a:p>
-        </p:txBody>
-      </p:sp>
-      <p:sp>
-        <p:nvSpPr>
-          <p:cNvPr id="32" name="Shape 30"/>
-          <p:cNvSpPr/>
-          <p:nvPr/>
-        </p:nvSpPr>
-        <p:spPr>
-          <a:xfrm>
-            <a:off x="4800600" y="4261104"/>
-            <a:ext cx="329184" cy="329184"/>
-          </a:xfrm>
-          <a:prstGeom prst="ellipse">
-            <a:avLst/>
-          </a:prstGeom>
-          <a:solidFill>
-            <a:srgbClr val="7A1524"/>
-          </a:solidFill>
-          <a:ln w="12700">
-            <a:solidFill>
-              <a:srgbClr val="7A1524"/>
-            </a:solidFill>
-            <a:prstDash val="solid"/>
-          </a:ln>
-        </p:spPr>
-      </p:sp>
-      <p:sp>
-        <p:nvSpPr>
-          <p:cNvPr id="33" name="Text 31"/>
-          <p:cNvSpPr txBox="1"/>
-          <p:nvPr/>
-        </p:nvSpPr>
-        <p:spPr>
-          <a:xfrm>
-            <a:off x="4800600" y="4261104"/>
-            <a:ext cx="329184" cy="329184"/>
-          </a:xfrm>
-          <a:prstGeom prst="rect">
-            <a:avLst/>
-          </a:prstGeom>
-          <a:noFill/>
-          <a:ln/>
-        </p:spPr>
-        <p:txBody>
-          <a:bodyPr wrap="square" lIns="0" tIns="0" rIns="0" bIns="0" rtlCol="0" anchor="ctr"/>
-          <a:lstStyle/>
-          <a:p>
-            <a:pPr algn="ctr" indent="0" marL="0">
-              <a:buNone/>
-            </a:pPr>
-            <a:r>
-              <a:rPr lang="en-US" sz="1300" b="1" dirty="0">
-                <a:solidFill>
-                  <a:srgbClr val="FFFFFF"/>
-                </a:solidFill>
-                <a:latin typeface="Yu Gothic" pitchFamily="34" charset="0"/>
-                <a:ea typeface="Yu Gothic" pitchFamily="34" charset="-122"/>
-                <a:cs typeface="Yu Gothic" pitchFamily="34" charset="-120"/>
-              </a:rPr>
-              <a:t>10</a:t>
-            </a:r>
-            <a:endParaRPr lang="en-US" sz="1300" dirty="0"/>
-          </a:p>
-        </p:txBody>
-      </p:sp>
-      <p:sp>
-        <p:nvSpPr>
-          <p:cNvPr id="34" name="Text 32"/>
-          <p:cNvSpPr txBox="1"/>
-          <p:nvPr/>
-        </p:nvSpPr>
-        <p:spPr>
-          <a:xfrm>
-            <a:off x="5257800" y="4197096"/>
-            <a:ext cx="3657600" cy="457200"/>
-          </a:xfrm>
-          <a:prstGeom prst="rect">
-            <a:avLst/>
-          </a:prstGeom>
-          <a:noFill/>
-          <a:ln/>
-        </p:spPr>
-        <p:txBody>
-          <a:bodyPr wrap="square" lIns="0" tIns="0" rIns="0" bIns="0" rtlCol="0" anchor="ctr"/>
-          <a:lstStyle/>
-          <a:p>
-            <a:pPr indent="0" marL="0">
-              <a:buNone/>
-            </a:pPr>
-            <a:r>
-              <a:rPr lang="en-US" sz="1700" dirty="0">
-                <a:solidFill>
-                  <a:srgbClr val="3B3634"/>
-                </a:solidFill>
-                <a:latin typeface="Yu Gothic" pitchFamily="34" charset="0"/>
-                <a:ea typeface="Yu Gothic" pitchFamily="34" charset="-122"/>
-                <a:cs typeface="Yu Gothic" pitchFamily="34" charset="-120"/>
-              </a:rPr>
-              <a:t>自分だけの大会メンタルプラン</a:t>
-            </a:r>
-            <a:endParaRPr lang="en-US" sz="1700" dirty="0"/>
+              <a:t>MY BEST LIFT PLAN 完成</a:t>
+            </a:r>
+            <a:endParaRPr lang="en-US" sz="1600" dirty="0"/>
+          </a:p>
+        </p:txBody>
+      </p:sp>
+      <p:sp>
+        <p:nvSpPr>
+          <p:cNvPr id="23" name="Text 21"/>
+          <p:cNvSpPr txBox="1"/>
+          <p:nvPr/>
+        </p:nvSpPr>
+        <p:spPr>
+          <a:xfrm>
+            <a:off x="457200" y="4681728"/>
+            <a:ext cx="7498080" cy="365760"/>
+          </a:xfrm>
+          <a:prstGeom prst="rect">
+            <a:avLst/>
+          </a:prstGeom>
+          <a:noFill/>
+          <a:ln/>
+        </p:spPr>
+        <p:txBody>
+          <a:bodyPr wrap="square" lIns="0" tIns="0" rIns="0" bIns="0" rtlCol="0" anchor="ctr"/>
+          <a:lstStyle/>
+          <a:p>
+            <a:pPr indent="0" marL="0">
+              <a:buNone/>
+            </a:pPr>
+            <a:r>
+              <a:rPr lang="en-US" sz="1500" dirty="0">
+                <a:solidFill>
+                  <a:srgbClr val="6B6360"/>
+                </a:solidFill>
+                <a:latin typeface="Yu Gothic" pitchFamily="34" charset="0"/>
+                <a:ea typeface="Yu Gothic" pitchFamily="34" charset="-122"/>
+                <a:cs typeface="Yu Gothic" pitchFamily="34" charset="-120"/>
+              </a:rPr>
+              <a:t>一斉スタートではありません。あなたの大会日と現在地に合わせて進めます。</a:t>
+            </a:r>
+            <a:endParaRPr lang="en-US" sz="1500" dirty="0"/>
           </a:p>
         </p:txBody>
       </p:sp>
@@ -16976,66 +16792,102 @@
         </p:nvSpPr>
         <p:spPr>
           <a:xfrm>
-            <a:off x="457200" y="868680"/>
-            <a:ext cx="8138160" cy="1188720"/>
-          </a:xfrm>
-          <a:prstGeom prst="rect">
-            <a:avLst/>
-          </a:prstGeom>
-          <a:noFill/>
-          <a:ln/>
-        </p:spPr>
-        <p:txBody>
-          <a:bodyPr wrap="square" lIns="0" tIns="0" rIns="0" bIns="0" rtlCol="0" anchor="t"/>
-          <a:lstStyle/>
-          <a:p>
-            <a:pPr algn="l" indent="0" marL="0">
-              <a:lnSpc>
-                <a:spcPts val="3480"/>
-              </a:lnSpc>
-              <a:buNone/>
-            </a:pPr>
-            <a:r>
-              <a:rPr lang="en-US" sz="2400" b="1" dirty="0">
+            <a:off x="457200" y="841248"/>
+            <a:ext cx="7863840" cy="384048"/>
+          </a:xfrm>
+          <a:prstGeom prst="rect">
+            <a:avLst/>
+          </a:prstGeom>
+          <a:noFill/>
+          <a:ln/>
+        </p:spPr>
+        <p:txBody>
+          <a:bodyPr wrap="square" lIns="0" tIns="0" rIns="0" bIns="0" rtlCol="0" anchor="ctr"/>
+          <a:lstStyle/>
+          <a:p>
+            <a:pPr indent="0" marL="0">
+              <a:buNone/>
+            </a:pPr>
+            <a:r>
+              <a:rPr lang="en-US" sz="1600" b="1" spc="200" kern="0" dirty="0">
                 <a:solidFill>
                   <a:srgbClr val="F0B9C3"/>
+                </a:solidFill>
+                <a:latin typeface="Yu Gothic" pitchFamily="34" charset="0"/>
+                <a:ea typeface="Yu Gothic" pitchFamily="34" charset="-122"/>
+                <a:cs typeface="Yu Gothic" pitchFamily="34" charset="-120"/>
+              </a:rPr>
+              <a:t>この3か月で完成するもの</a:t>
+            </a:r>
+            <a:endParaRPr lang="en-US" sz="1600" dirty="0"/>
+          </a:p>
+        </p:txBody>
+      </p:sp>
+      <p:sp>
+        <p:nvSpPr>
+          <p:cNvPr id="5" name="Text 3"/>
+          <p:cNvSpPr txBox="1"/>
+          <p:nvPr/>
+        </p:nvSpPr>
+        <p:spPr>
+          <a:xfrm>
+            <a:off x="457200" y="1280160"/>
+            <a:ext cx="7863840" cy="777240"/>
+          </a:xfrm>
+          <a:prstGeom prst="rect">
+            <a:avLst/>
+          </a:prstGeom>
+          <a:noFill/>
+          <a:ln/>
+        </p:spPr>
+        <p:txBody>
+          <a:bodyPr wrap="square" lIns="0" tIns="0" rIns="0" bIns="0" rtlCol="0" anchor="ctr"/>
+          <a:lstStyle/>
+          <a:p>
+            <a:pPr indent="0" marL="0">
+              <a:buNone/>
+            </a:pPr>
+            <a:r>
+              <a:rPr lang="en-US" sz="4000" b="1" spc="100" kern="0" dirty="0">
+                <a:solidFill>
+                  <a:srgbClr val="FFFFFF"/>
                 </a:solidFill>
                 <a:latin typeface="Yu Mincho" pitchFamily="34" charset="0"/>
                 <a:ea typeface="Yu Mincho" pitchFamily="34" charset="-122"/>
                 <a:cs typeface="Yu Mincho" pitchFamily="34" charset="-120"/>
               </a:rPr>
-              <a:t>最終的に目指すのは</a:t>
-            </a:r>
-            <a:endParaRPr lang="en-US" sz="2400" dirty="0"/>
-          </a:p>
-        </p:txBody>
-      </p:sp>
-      <p:sp>
-        <p:nvSpPr>
-          <p:cNvPr id="5" name="Text 3"/>
-          <p:cNvSpPr txBox="1"/>
-          <p:nvPr/>
-        </p:nvSpPr>
-        <p:spPr>
-          <a:xfrm>
-            <a:off x="457200" y="1371600"/>
-            <a:ext cx="7863840" cy="548640"/>
-          </a:xfrm>
-          <a:prstGeom prst="rect">
-            <a:avLst/>
-          </a:prstGeom>
-          <a:noFill/>
-          <a:ln/>
-        </p:spPr>
-        <p:txBody>
-          <a:bodyPr wrap="square" lIns="0" tIns="0" rIns="0" bIns="0" rtlCol="0" anchor="ctr"/>
-          <a:lstStyle/>
-          <a:p>
-            <a:pPr indent="0" marL="0">
-              <a:buNone/>
-            </a:pPr>
-            <a:r>
-              <a:rPr lang="en-US" sz="2200" dirty="0">
+              <a:t>MY BEST LIFT PLAN</a:t>
+            </a:r>
+            <a:endParaRPr lang="en-US" sz="4000" dirty="0"/>
+          </a:p>
+        </p:txBody>
+      </p:sp>
+      <p:sp>
+        <p:nvSpPr>
+          <p:cNvPr id="6" name="Text 4"/>
+          <p:cNvSpPr txBox="1"/>
+          <p:nvPr/>
+        </p:nvSpPr>
+        <p:spPr>
+          <a:xfrm>
+            <a:off x="457200" y="2103120"/>
+            <a:ext cx="7863840" cy="365760"/>
+          </a:xfrm>
+          <a:prstGeom prst="rect">
+            <a:avLst/>
+          </a:prstGeom>
+          <a:noFill/>
+          <a:ln/>
+        </p:spPr>
+        <p:txBody>
+          <a:bodyPr wrap="square" lIns="0" tIns="0" rIns="0" bIns="0" rtlCol="0" anchor="ctr"/>
+          <a:lstStyle/>
+          <a:p>
+            <a:pPr indent="0" marL="0">
+              <a:buNone/>
+            </a:pPr>
+            <a:r>
+              <a:rPr lang="en-US" sz="1600" dirty="0">
                 <a:solidFill>
                   <a:srgbClr val="E8D3D7"/>
                 </a:solidFill>
@@ -17043,71 +16895,9 @@
                 <a:ea typeface="Yu Gothic" pitchFamily="34" charset="-122"/>
                 <a:cs typeface="Yu Gothic" pitchFamily="34" charset="-120"/>
               </a:rPr>
-              <a:t>「緊張しない選手」ではありません。</a:t>
-            </a:r>
-            <a:endParaRPr lang="en-US" sz="2200" dirty="0"/>
-          </a:p>
-        </p:txBody>
-      </p:sp>
-      <p:sp>
-        <p:nvSpPr>
-          <p:cNvPr id="6" name="Text 4"/>
-          <p:cNvSpPr txBox="1"/>
-          <p:nvPr/>
-        </p:nvSpPr>
-        <p:spPr>
-          <a:xfrm>
-            <a:off x="457200" y="2057400"/>
-            <a:ext cx="7863840" cy="1188720"/>
-          </a:xfrm>
-          <a:prstGeom prst="rect">
-            <a:avLst/>
-          </a:prstGeom>
-          <a:noFill/>
-          <a:ln/>
-        </p:spPr>
-        <p:txBody>
-          <a:bodyPr wrap="square" lIns="0" tIns="0" rIns="0" bIns="0" rtlCol="0" anchor="ctr"/>
-          <a:lstStyle/>
-          <a:p>
-            <a:pPr indent="0" marL="0">
-              <a:lnSpc>
-                <a:spcPts val="4200"/>
-              </a:lnSpc>
-              <a:buNone/>
-            </a:pPr>
-            <a:r>
-              <a:rPr lang="en-US" sz="2700" b="1" dirty="0">
-                <a:solidFill>
-                  <a:srgbClr val="FFFFFF"/>
-                </a:solidFill>
-                <a:latin typeface="Yu Mincho" pitchFamily="34" charset="0"/>
-                <a:ea typeface="Yu Mincho" pitchFamily="34" charset="-122"/>
-                <a:cs typeface="Yu Mincho" pitchFamily="34" charset="-120"/>
-              </a:rPr>
-              <a:t>何が起きても、</a:t>
-            </a:r>
-            <a:endParaRPr lang="en-US" sz="2700" dirty="0"/>
-          </a:p>
-          <a:p>
-            <a:pPr indent="0" marL="0">
-              <a:lnSpc>
-                <a:spcPts val="4200"/>
-              </a:lnSpc>
-              <a:buNone/>
-            </a:pPr>
-            <a:r>
-              <a:rPr lang="en-US" sz="2700" b="1" dirty="0">
-                <a:solidFill>
-                  <a:srgbClr val="FFFFFF"/>
-                </a:solidFill>
-                <a:latin typeface="Yu Mincho" pitchFamily="34" charset="0"/>
-                <a:ea typeface="Yu Mincho" pitchFamily="34" charset="-122"/>
-                <a:cs typeface="Yu Mincho" pitchFamily="34" charset="-120"/>
-              </a:rPr>
-              <a:t>「自分が何をすればいいかわかる」</a:t>
-            </a:r>
-            <a:endParaRPr lang="en-US" sz="2700" dirty="0"/>
+              <a:t>「私はこうすれば試合で力を出せる」をまとめた、自分専用の勝負の設計図。</a:t>
+            </a:r>
+            <a:endParaRPr lang="en-US" sz="1600" dirty="0"/>
           </a:p>
         </p:txBody>
       </p:sp>
@@ -17119,20 +16909,20 @@
         </p:nvSpPr>
         <p:spPr>
           <a:xfrm>
-            <a:off x="457200" y="3611880"/>
-            <a:ext cx="7863840" cy="868680"/>
+            <a:off x="457200" y="2606040"/>
+            <a:ext cx="3840480" cy="457200"/>
           </a:xfrm>
           <a:prstGeom prst="roundRect">
             <a:avLst>
-              <a:gd name="adj" fmla="val 8421"/>
+              <a:gd name="adj" fmla="val 10000"/>
             </a:avLst>
           </a:prstGeom>
           <a:solidFill>
-            <a:srgbClr val="A02236"/>
+            <a:srgbClr val="3A0B12"/>
           </a:solidFill>
           <a:ln w="12700">
             <a:solidFill>
-              <a:srgbClr val="A02236"/>
+              <a:srgbClr val="3A0B12"/>
             </a:solidFill>
             <a:prstDash val="solid"/>
           </a:ln>
@@ -17146,24 +16936,24 @@
         </p:nvSpPr>
         <p:spPr>
           <a:xfrm>
-            <a:off x="822960" y="3611880"/>
-            <a:ext cx="7406640" cy="868680"/>
-          </a:xfrm>
-          <a:prstGeom prst="rect">
-            <a:avLst/>
-          </a:prstGeom>
-          <a:noFill/>
-          <a:ln/>
-        </p:spPr>
-        <p:txBody>
-          <a:bodyPr wrap="square" lIns="0" tIns="0" rIns="0" bIns="0" rtlCol="0" anchor="ctr"/>
-          <a:lstStyle/>
-          <a:p>
-            <a:pPr indent="0" marL="0">
-              <a:buNone/>
-            </a:pPr>
-            <a:r>
-              <a:rPr lang="en-US" sz="2000" b="1" dirty="0">
+            <a:off x="640080" y="2606040"/>
+            <a:ext cx="3566160" cy="457200"/>
+          </a:xfrm>
+          <a:prstGeom prst="rect">
+            <a:avLst/>
+          </a:prstGeom>
+          <a:noFill/>
+          <a:ln/>
+        </p:spPr>
+        <p:txBody>
+          <a:bodyPr wrap="square" lIns="0" tIns="0" rIns="0" bIns="0" rtlCol="0" anchor="ctr"/>
+          <a:lstStyle/>
+          <a:p>
+            <a:pPr indent="0" marL="0">
+              <a:buNone/>
+            </a:pPr>
+            <a:r>
+              <a:rPr lang="en-US" sz="1350" dirty="0">
                 <a:solidFill>
                   <a:srgbClr val="FFFFFF"/>
                 </a:solidFill>
@@ -17171,9 +16961,510 @@
                 <a:ea typeface="Yu Gothic" pitchFamily="34" charset="-122"/>
                 <a:cs typeface="Yu Gothic" pitchFamily="34" charset="-120"/>
               </a:rPr>
-              <a:t>そして「試合が楽しみです」と言える選手へ。</a:t>
-            </a:r>
-            <a:endParaRPr lang="en-US" sz="2000" dirty="0"/>
+              <a:t>試合前に整えておく思考と行動</a:t>
+            </a:r>
+            <a:endParaRPr lang="en-US" sz="1350" dirty="0"/>
+          </a:p>
+        </p:txBody>
+      </p:sp>
+      <p:sp>
+        <p:nvSpPr>
+          <p:cNvPr id="9" name="Shape 7"/>
+          <p:cNvSpPr/>
+          <p:nvPr/>
+        </p:nvSpPr>
+        <p:spPr>
+          <a:xfrm>
+            <a:off x="4480560" y="2606040"/>
+            <a:ext cx="3840480" cy="457200"/>
+          </a:xfrm>
+          <a:prstGeom prst="roundRect">
+            <a:avLst>
+              <a:gd name="adj" fmla="val 10000"/>
+            </a:avLst>
+          </a:prstGeom>
+          <a:solidFill>
+            <a:srgbClr val="3A0B12"/>
+          </a:solidFill>
+          <a:ln w="12700">
+            <a:solidFill>
+              <a:srgbClr val="3A0B12"/>
+            </a:solidFill>
+            <a:prstDash val="solid"/>
+          </a:ln>
+        </p:spPr>
+      </p:sp>
+      <p:sp>
+        <p:nvSpPr>
+          <p:cNvPr id="10" name="Text 8"/>
+          <p:cNvSpPr txBox="1"/>
+          <p:nvPr/>
+        </p:nvSpPr>
+        <p:spPr>
+          <a:xfrm>
+            <a:off x="4663440" y="2606040"/>
+            <a:ext cx="3566160" cy="457200"/>
+          </a:xfrm>
+          <a:prstGeom prst="rect">
+            <a:avLst/>
+          </a:prstGeom>
+          <a:noFill/>
+          <a:ln/>
+        </p:spPr>
+        <p:txBody>
+          <a:bodyPr wrap="square" lIns="0" tIns="0" rIns="0" bIns="0" rtlCol="0" anchor="ctr"/>
+          <a:lstStyle/>
+          <a:p>
+            <a:pPr indent="0" marL="0">
+              <a:buNone/>
+            </a:pPr>
+            <a:r>
+              <a:rPr lang="en-US" sz="1350" dirty="0">
+                <a:solidFill>
+                  <a:srgbClr val="FFFFFF"/>
+                </a:solidFill>
+                <a:latin typeface="Yu Gothic" pitchFamily="34" charset="0"/>
+                <a:ea typeface="Yu Gothic" pitchFamily="34" charset="-122"/>
+                <a:cs typeface="Yu Gothic" pitchFamily="34" charset="-120"/>
+              </a:rPr>
+              <a:t>試合当日のルーティン</a:t>
+            </a:r>
+            <a:endParaRPr lang="en-US" sz="1350" dirty="0"/>
+          </a:p>
+        </p:txBody>
+      </p:sp>
+      <p:sp>
+        <p:nvSpPr>
+          <p:cNvPr id="11" name="Shape 9"/>
+          <p:cNvSpPr/>
+          <p:nvPr/>
+        </p:nvSpPr>
+        <p:spPr>
+          <a:xfrm>
+            <a:off x="457200" y="3154680"/>
+            <a:ext cx="3840480" cy="457200"/>
+          </a:xfrm>
+          <a:prstGeom prst="roundRect">
+            <a:avLst>
+              <a:gd name="adj" fmla="val 10000"/>
+            </a:avLst>
+          </a:prstGeom>
+          <a:solidFill>
+            <a:srgbClr val="3A0B12"/>
+          </a:solidFill>
+          <a:ln w="12700">
+            <a:solidFill>
+              <a:srgbClr val="3A0B12"/>
+            </a:solidFill>
+            <a:prstDash val="solid"/>
+          </a:ln>
+        </p:spPr>
+      </p:sp>
+      <p:sp>
+        <p:nvSpPr>
+          <p:cNvPr id="12" name="Text 10"/>
+          <p:cNvSpPr txBox="1"/>
+          <p:nvPr/>
+        </p:nvSpPr>
+        <p:spPr>
+          <a:xfrm>
+            <a:off x="640080" y="3154680"/>
+            <a:ext cx="3566160" cy="457200"/>
+          </a:xfrm>
+          <a:prstGeom prst="rect">
+            <a:avLst/>
+          </a:prstGeom>
+          <a:noFill/>
+          <a:ln/>
+        </p:spPr>
+        <p:txBody>
+          <a:bodyPr wrap="square" lIns="0" tIns="0" rIns="0" bIns="0" rtlCol="0" anchor="ctr"/>
+          <a:lstStyle/>
+          <a:p>
+            <a:pPr indent="0" marL="0">
+              <a:buNone/>
+            </a:pPr>
+            <a:r>
+              <a:rPr lang="en-US" sz="1350" dirty="0">
+                <a:solidFill>
+                  <a:srgbClr val="FFFFFF"/>
+                </a:solidFill>
+                <a:latin typeface="Yu Gothic" pitchFamily="34" charset="0"/>
+                <a:ea typeface="Yu Gothic" pitchFamily="34" charset="-122"/>
+                <a:cs typeface="Yu Gothic" pitchFamily="34" charset="-120"/>
+              </a:rPr>
+              <a:t>重量を前にしたときのセルフトーク</a:t>
+            </a:r>
+            <a:endParaRPr lang="en-US" sz="1350" dirty="0"/>
+          </a:p>
+        </p:txBody>
+      </p:sp>
+      <p:sp>
+        <p:nvSpPr>
+          <p:cNvPr id="13" name="Shape 11"/>
+          <p:cNvSpPr/>
+          <p:nvPr/>
+        </p:nvSpPr>
+        <p:spPr>
+          <a:xfrm>
+            <a:off x="4480560" y="3154680"/>
+            <a:ext cx="3840480" cy="457200"/>
+          </a:xfrm>
+          <a:prstGeom prst="roundRect">
+            <a:avLst>
+              <a:gd name="adj" fmla="val 10000"/>
+            </a:avLst>
+          </a:prstGeom>
+          <a:solidFill>
+            <a:srgbClr val="3A0B12"/>
+          </a:solidFill>
+          <a:ln w="12700">
+            <a:solidFill>
+              <a:srgbClr val="3A0B12"/>
+            </a:solidFill>
+            <a:prstDash val="solid"/>
+          </a:ln>
+        </p:spPr>
+      </p:sp>
+      <p:sp>
+        <p:nvSpPr>
+          <p:cNvPr id="14" name="Text 12"/>
+          <p:cNvSpPr txBox="1"/>
+          <p:nvPr/>
+        </p:nvSpPr>
+        <p:spPr>
+          <a:xfrm>
+            <a:off x="4663440" y="3154680"/>
+            <a:ext cx="3566160" cy="457200"/>
+          </a:xfrm>
+          <a:prstGeom prst="rect">
+            <a:avLst/>
+          </a:prstGeom>
+          <a:noFill/>
+          <a:ln/>
+        </p:spPr>
+        <p:txBody>
+          <a:bodyPr wrap="square" lIns="0" tIns="0" rIns="0" bIns="0" rtlCol="0" anchor="ctr"/>
+          <a:lstStyle/>
+          <a:p>
+            <a:pPr indent="0" marL="0">
+              <a:buNone/>
+            </a:pPr>
+            <a:r>
+              <a:rPr lang="en-US" sz="1350" dirty="0">
+                <a:solidFill>
+                  <a:srgbClr val="FFFFFF"/>
+                </a:solidFill>
+                <a:latin typeface="Yu Gothic" pitchFamily="34" charset="0"/>
+                <a:ea typeface="Yu Gothic" pitchFamily="34" charset="-122"/>
+                <a:cs typeface="Yu Gothic" pitchFamily="34" charset="-120"/>
+              </a:rPr>
+              <a:t>怖くなったときの切り替え方</a:t>
+            </a:r>
+            <a:endParaRPr lang="en-US" sz="1350" dirty="0"/>
+          </a:p>
+        </p:txBody>
+      </p:sp>
+      <p:sp>
+        <p:nvSpPr>
+          <p:cNvPr id="15" name="Shape 13"/>
+          <p:cNvSpPr/>
+          <p:nvPr/>
+        </p:nvSpPr>
+        <p:spPr>
+          <a:xfrm>
+            <a:off x="457200" y="3703320"/>
+            <a:ext cx="3840480" cy="457200"/>
+          </a:xfrm>
+          <a:prstGeom prst="roundRect">
+            <a:avLst>
+              <a:gd name="adj" fmla="val 10000"/>
+            </a:avLst>
+          </a:prstGeom>
+          <a:solidFill>
+            <a:srgbClr val="3A0B12"/>
+          </a:solidFill>
+          <a:ln w="12700">
+            <a:solidFill>
+              <a:srgbClr val="3A0B12"/>
+            </a:solidFill>
+            <a:prstDash val="solid"/>
+          </a:ln>
+        </p:spPr>
+      </p:sp>
+      <p:sp>
+        <p:nvSpPr>
+          <p:cNvPr id="16" name="Text 14"/>
+          <p:cNvSpPr txBox="1"/>
+          <p:nvPr/>
+        </p:nvSpPr>
+        <p:spPr>
+          <a:xfrm>
+            <a:off x="640080" y="3703320"/>
+            <a:ext cx="3566160" cy="457200"/>
+          </a:xfrm>
+          <a:prstGeom prst="rect">
+            <a:avLst/>
+          </a:prstGeom>
+          <a:noFill/>
+          <a:ln/>
+        </p:spPr>
+        <p:txBody>
+          <a:bodyPr wrap="square" lIns="0" tIns="0" rIns="0" bIns="0" rtlCol="0" anchor="ctr"/>
+          <a:lstStyle/>
+          <a:p>
+            <a:pPr indent="0" marL="0">
+              <a:buNone/>
+            </a:pPr>
+            <a:r>
+              <a:rPr lang="en-US" sz="1350" dirty="0">
+                <a:solidFill>
+                  <a:srgbClr val="FFFFFF"/>
+                </a:solidFill>
+                <a:latin typeface="Yu Gothic" pitchFamily="34" charset="0"/>
+                <a:ea typeface="Yu Gothic" pitchFamily="34" charset="-122"/>
+                <a:cs typeface="Yu Gothic" pitchFamily="34" charset="-120"/>
+              </a:rPr>
+              <a:t>失敗した直後のリセット方法</a:t>
+            </a:r>
+            <a:endParaRPr lang="en-US" sz="1350" dirty="0"/>
+          </a:p>
+        </p:txBody>
+      </p:sp>
+      <p:sp>
+        <p:nvSpPr>
+          <p:cNvPr id="17" name="Shape 15"/>
+          <p:cNvSpPr/>
+          <p:nvPr/>
+        </p:nvSpPr>
+        <p:spPr>
+          <a:xfrm>
+            <a:off x="4480560" y="3703320"/>
+            <a:ext cx="3840480" cy="457200"/>
+          </a:xfrm>
+          <a:prstGeom prst="roundRect">
+            <a:avLst>
+              <a:gd name="adj" fmla="val 10000"/>
+            </a:avLst>
+          </a:prstGeom>
+          <a:solidFill>
+            <a:srgbClr val="3A0B12"/>
+          </a:solidFill>
+          <a:ln w="12700">
+            <a:solidFill>
+              <a:srgbClr val="3A0B12"/>
+            </a:solidFill>
+            <a:prstDash val="solid"/>
+          </a:ln>
+        </p:spPr>
+      </p:sp>
+      <p:sp>
+        <p:nvSpPr>
+          <p:cNvPr id="18" name="Text 16"/>
+          <p:cNvSpPr txBox="1"/>
+          <p:nvPr/>
+        </p:nvSpPr>
+        <p:spPr>
+          <a:xfrm>
+            <a:off x="4663440" y="3703320"/>
+            <a:ext cx="3566160" cy="457200"/>
+          </a:xfrm>
+          <a:prstGeom prst="rect">
+            <a:avLst/>
+          </a:prstGeom>
+          <a:noFill/>
+          <a:ln/>
+        </p:spPr>
+        <p:txBody>
+          <a:bodyPr wrap="square" lIns="0" tIns="0" rIns="0" bIns="0" rtlCol="0" anchor="ctr"/>
+          <a:lstStyle/>
+          <a:p>
+            <a:pPr indent="0" marL="0">
+              <a:buNone/>
+            </a:pPr>
+            <a:r>
+              <a:rPr lang="en-US" sz="1350" dirty="0">
+                <a:solidFill>
+                  <a:srgbClr val="FFFFFF"/>
+                </a:solidFill>
+                <a:latin typeface="Yu Gothic" pitchFamily="34" charset="0"/>
+                <a:ea typeface="Yu Gothic" pitchFamily="34" charset="-122"/>
+                <a:cs typeface="Yu Gothic" pitchFamily="34" charset="-120"/>
+              </a:rPr>
+              <a:t>他人の記録や順位との付き合い方</a:t>
+            </a:r>
+            <a:endParaRPr lang="en-US" sz="1350" dirty="0"/>
+          </a:p>
+        </p:txBody>
+      </p:sp>
+      <p:sp>
+        <p:nvSpPr>
+          <p:cNvPr id="19" name="Shape 17"/>
+          <p:cNvSpPr/>
+          <p:nvPr/>
+        </p:nvSpPr>
+        <p:spPr>
+          <a:xfrm>
+            <a:off x="457200" y="4251960"/>
+            <a:ext cx="3840480" cy="457200"/>
+          </a:xfrm>
+          <a:prstGeom prst="roundRect">
+            <a:avLst>
+              <a:gd name="adj" fmla="val 10000"/>
+            </a:avLst>
+          </a:prstGeom>
+          <a:solidFill>
+            <a:srgbClr val="3A0B12"/>
+          </a:solidFill>
+          <a:ln w="12700">
+            <a:solidFill>
+              <a:srgbClr val="3A0B12"/>
+            </a:solidFill>
+            <a:prstDash val="solid"/>
+          </a:ln>
+        </p:spPr>
+      </p:sp>
+      <p:sp>
+        <p:nvSpPr>
+          <p:cNvPr id="20" name="Text 18"/>
+          <p:cNvSpPr txBox="1"/>
+          <p:nvPr/>
+        </p:nvSpPr>
+        <p:spPr>
+          <a:xfrm>
+            <a:off x="640080" y="4251960"/>
+            <a:ext cx="3566160" cy="457200"/>
+          </a:xfrm>
+          <a:prstGeom prst="rect">
+            <a:avLst/>
+          </a:prstGeom>
+          <a:noFill/>
+          <a:ln/>
+        </p:spPr>
+        <p:txBody>
+          <a:bodyPr wrap="square" lIns="0" tIns="0" rIns="0" bIns="0" rtlCol="0" anchor="ctr"/>
+          <a:lstStyle/>
+          <a:p>
+            <a:pPr indent="0" marL="0">
+              <a:buNone/>
+            </a:pPr>
+            <a:r>
+              <a:rPr lang="en-US" sz="1350" dirty="0">
+                <a:solidFill>
+                  <a:srgbClr val="FFFFFF"/>
+                </a:solidFill>
+                <a:latin typeface="Yu Gothic" pitchFamily="34" charset="0"/>
+                <a:ea typeface="Yu Gothic" pitchFamily="34" charset="-122"/>
+                <a:cs typeface="Yu Gothic" pitchFamily="34" charset="-120"/>
+              </a:rPr>
+              <a:t>1・2・3本目それぞれの考え方</a:t>
+            </a:r>
+            <a:endParaRPr lang="en-US" sz="1350" dirty="0"/>
+          </a:p>
+        </p:txBody>
+      </p:sp>
+      <p:sp>
+        <p:nvSpPr>
+          <p:cNvPr id="21" name="Shape 19"/>
+          <p:cNvSpPr/>
+          <p:nvPr/>
+        </p:nvSpPr>
+        <p:spPr>
+          <a:xfrm>
+            <a:off x="4480560" y="4251960"/>
+            <a:ext cx="3840480" cy="457200"/>
+          </a:xfrm>
+          <a:prstGeom prst="roundRect">
+            <a:avLst>
+              <a:gd name="adj" fmla="val 10000"/>
+            </a:avLst>
+          </a:prstGeom>
+          <a:solidFill>
+            <a:srgbClr val="3A0B12"/>
+          </a:solidFill>
+          <a:ln w="12700">
+            <a:solidFill>
+              <a:srgbClr val="3A0B12"/>
+            </a:solidFill>
+            <a:prstDash val="solid"/>
+          </a:ln>
+        </p:spPr>
+      </p:sp>
+      <p:sp>
+        <p:nvSpPr>
+          <p:cNvPr id="22" name="Text 20"/>
+          <p:cNvSpPr txBox="1"/>
+          <p:nvPr/>
+        </p:nvSpPr>
+        <p:spPr>
+          <a:xfrm>
+            <a:off x="4663440" y="4251960"/>
+            <a:ext cx="3566160" cy="457200"/>
+          </a:xfrm>
+          <a:prstGeom prst="rect">
+            <a:avLst/>
+          </a:prstGeom>
+          <a:noFill/>
+          <a:ln/>
+        </p:spPr>
+        <p:txBody>
+          <a:bodyPr wrap="square" lIns="0" tIns="0" rIns="0" bIns="0" rtlCol="0" anchor="ctr"/>
+          <a:lstStyle/>
+          <a:p>
+            <a:pPr indent="0" marL="0">
+              <a:buNone/>
+            </a:pPr>
+            <a:r>
+              <a:rPr lang="en-US" sz="1350" dirty="0">
+                <a:solidFill>
+                  <a:srgbClr val="FFFFFF"/>
+                </a:solidFill>
+                <a:latin typeface="Yu Gothic" pitchFamily="34" charset="0"/>
+                <a:ea typeface="Yu Gothic" pitchFamily="34" charset="-122"/>
+                <a:cs typeface="Yu Gothic" pitchFamily="34" charset="-120"/>
+              </a:rPr>
+              <a:t>ここぞの一本で使う「自分のスイッチ」</a:t>
+            </a:r>
+            <a:endParaRPr lang="en-US" sz="1350" dirty="0"/>
+          </a:p>
+        </p:txBody>
+      </p:sp>
+      <p:sp>
+        <p:nvSpPr>
+          <p:cNvPr id="23" name="Text 21"/>
+          <p:cNvSpPr txBox="1"/>
+          <p:nvPr/>
+        </p:nvSpPr>
+        <p:spPr>
+          <a:xfrm>
+            <a:off x="457200" y="4864608"/>
+            <a:ext cx="7498080" cy="320040"/>
+          </a:xfrm>
+          <a:prstGeom prst="rect">
+            <a:avLst/>
+          </a:prstGeom>
+          <a:noFill/>
+          <a:ln/>
+        </p:spPr>
+        <p:txBody>
+          <a:bodyPr wrap="square" lIns="0" tIns="0" rIns="0" bIns="0" rtlCol="0" anchor="ctr"/>
+          <a:lstStyle/>
+          <a:p>
+            <a:pPr indent="0" marL="0">
+              <a:buNone/>
+            </a:pPr>
+            <a:r>
+              <a:rPr lang="en-US" sz="1400" dirty="0">
+                <a:solidFill>
+                  <a:srgbClr val="F0B9C3"/>
+                </a:solidFill>
+                <a:latin typeface="Yu Gothic" pitchFamily="34" charset="0"/>
+                <a:ea typeface="Yu Gothic" pitchFamily="34" charset="-122"/>
+                <a:cs typeface="Yu Gothic" pitchFamily="34" charset="-120"/>
+              </a:rPr>
+              <a:t>正解を押しつけるのではなく、あなた自身の勝負の型を一緒につくります。</a:t>
+            </a:r>
+            <a:endParaRPr lang="en-US" sz="1400" dirty="0"/>
           </a:p>
         </p:txBody>
       </p:sp>
@@ -17191,7 +17482,7 @@
     <p:bg>
       <p:bgPr>
         <a:solidFill>
-          <a:srgbClr val="FFFFFF"/>
+          <a:srgbClr val="540E19"/>
         </a:solidFill>
       </p:bgPr>
     </p:bg>
@@ -17236,7 +17527,7 @@
             <a:r>
               <a:rPr lang="en-US" sz="1200" b="1" spc="200" kern="0" dirty="0">
                 <a:solidFill>
-                  <a:srgbClr val="7A1524"/>
+                  <a:srgbClr val="F0B9C3"/>
                 </a:solidFill>
                 <a:latin typeface="Yu Gothic" pitchFamily="34" charset="0"/>
                 <a:ea typeface="Yu Gothic" pitchFamily="34" charset="-122"/>
@@ -17275,7 +17566,7 @@
             <a:r>
               <a:rPr lang="en-US" sz="1100" dirty="0">
                 <a:solidFill>
-                  <a:srgbClr val="6B6360"/>
+                  <a:srgbClr val="8A6870"/>
                 </a:solidFill>
                 <a:latin typeface="Yu Gothic" pitchFamily="34" charset="0"/>
                 <a:ea typeface="Yu Gothic" pitchFamily="34" charset="-122"/>
@@ -17295,7 +17586,7 @@
         </p:nvSpPr>
         <p:spPr>
           <a:xfrm>
-            <a:off x="457200" y="914400"/>
+            <a:off x="457200" y="868680"/>
             <a:ext cx="8138160" cy="1188720"/>
           </a:xfrm>
           <a:prstGeom prst="rect">
@@ -17310,22 +17601,22 @@
           <a:p>
             <a:pPr algn="l" indent="0" marL="0">
               <a:lnSpc>
-                <a:spcPts val="3770"/>
+                <a:spcPts val="3480"/>
               </a:lnSpc>
               <a:buNone/>
             </a:pPr>
             <a:r>
-              <a:rPr lang="en-US" sz="2600" b="1" dirty="0">
-                <a:solidFill>
-                  <a:srgbClr val="6B6360"/>
+              <a:rPr lang="en-US" sz="2400" b="1" dirty="0">
+                <a:solidFill>
+                  <a:srgbClr val="F0B9C3"/>
                 </a:solidFill>
                 <a:latin typeface="Yu Mincho" pitchFamily="34" charset="0"/>
                 <a:ea typeface="Yu Mincho" pitchFamily="34" charset="-122"/>
                 <a:cs typeface="Yu Mincho" pitchFamily="34" charset="-120"/>
               </a:rPr>
-              <a:t>受講料</a:t>
-            </a:r>
-            <a:endParaRPr lang="en-US" sz="2600" dirty="0"/>
+              <a:t>最終的に目指すのは</a:t>
+            </a:r>
+            <a:endParaRPr lang="en-US" sz="2400" dirty="0"/>
           </a:p>
         </p:txBody>
       </p:sp>
@@ -17337,73 +17628,121 @@
         </p:nvSpPr>
         <p:spPr>
           <a:xfrm>
-            <a:off x="457200" y="1463040"/>
-            <a:ext cx="7863840" cy="1371600"/>
-          </a:xfrm>
-          <a:prstGeom prst="rect">
-            <a:avLst/>
-          </a:prstGeom>
-          <a:noFill/>
-          <a:ln/>
-        </p:spPr>
-        <p:txBody>
-          <a:bodyPr wrap="square" lIns="0" tIns="0" rIns="0" bIns="0" rtlCol="0" anchor="b"/>
-          <a:lstStyle/>
-          <a:p>
-            <a:pPr indent="0" marL="0">
-              <a:buNone/>
-            </a:pPr>
-            <a:r>
-              <a:rPr lang="en-US" sz="8200" b="1" dirty="0">
-                <a:solidFill>
-                  <a:srgbClr val="7A1524"/>
+            <a:off x="457200" y="1371600"/>
+            <a:ext cx="7863840" cy="548640"/>
+          </a:xfrm>
+          <a:prstGeom prst="rect">
+            <a:avLst/>
+          </a:prstGeom>
+          <a:noFill/>
+          <a:ln/>
+        </p:spPr>
+        <p:txBody>
+          <a:bodyPr wrap="square" lIns="0" tIns="0" rIns="0" bIns="0" rtlCol="0" anchor="ctr"/>
+          <a:lstStyle/>
+          <a:p>
+            <a:pPr indent="0" marL="0">
+              <a:buNone/>
+            </a:pPr>
+            <a:r>
+              <a:rPr lang="en-US" sz="2200" dirty="0">
+                <a:solidFill>
+                  <a:srgbClr val="E8D3D7"/>
+                </a:solidFill>
+                <a:latin typeface="Yu Gothic" pitchFamily="34" charset="0"/>
+                <a:ea typeface="Yu Gothic" pitchFamily="34" charset="-122"/>
+                <a:cs typeface="Yu Gothic" pitchFamily="34" charset="-120"/>
+              </a:rPr>
+              <a:t>「怖くならない自分」ではありません。</a:t>
+            </a:r>
+            <a:endParaRPr lang="en-US" sz="2200" dirty="0"/>
+          </a:p>
+        </p:txBody>
+      </p:sp>
+      <p:sp>
+        <p:nvSpPr>
+          <p:cNvPr id="6" name="Text 4"/>
+          <p:cNvSpPr txBox="1"/>
+          <p:nvPr/>
+        </p:nvSpPr>
+        <p:spPr>
+          <a:xfrm>
+            <a:off x="457200" y="2057400"/>
+            <a:ext cx="7863840" cy="1188720"/>
+          </a:xfrm>
+          <a:prstGeom prst="rect">
+            <a:avLst/>
+          </a:prstGeom>
+          <a:noFill/>
+          <a:ln/>
+        </p:spPr>
+        <p:txBody>
+          <a:bodyPr wrap="square" lIns="0" tIns="0" rIns="0" bIns="0" rtlCol="0" anchor="ctr"/>
+          <a:lstStyle/>
+          <a:p>
+            <a:pPr indent="0" marL="0">
+              <a:lnSpc>
+                <a:spcPts val="4200"/>
+              </a:lnSpc>
+              <a:buNone/>
+            </a:pPr>
+            <a:r>
+              <a:rPr lang="en-US" sz="2700" b="1" dirty="0">
+                <a:solidFill>
+                  <a:srgbClr val="FFFFFF"/>
                 </a:solidFill>
                 <a:latin typeface="Yu Mincho" pitchFamily="34" charset="0"/>
                 <a:ea typeface="Yu Mincho" pitchFamily="34" charset="-122"/>
                 <a:cs typeface="Yu Mincho" pitchFamily="34" charset="-120"/>
               </a:rPr>
-              <a:t>98,000</a:t>
-            </a:r>
-            <a:pPr indent="0" marL="0">
-              <a:buNone/>
-            </a:pPr>
-            <a:r>
-              <a:rPr lang="en-US" sz="2400" b="1" dirty="0">
-                <a:solidFill>
-                  <a:srgbClr val="7A1524"/>
+              <a:t>怖くても、迷っても、</a:t>
+            </a:r>
+            <a:endParaRPr lang="en-US" sz="2700" dirty="0"/>
+          </a:p>
+          <a:p>
+            <a:pPr indent="0" marL="0">
+              <a:lnSpc>
+                <a:spcPts val="4200"/>
+              </a:lnSpc>
+              <a:buNone/>
+            </a:pPr>
+            <a:r>
+              <a:rPr lang="en-US" sz="2700" b="1" dirty="0">
+                <a:solidFill>
+                  <a:srgbClr val="FFFFFF"/>
                 </a:solidFill>
                 <a:latin typeface="Yu Mincho" pitchFamily="34" charset="0"/>
                 <a:ea typeface="Yu Mincho" pitchFamily="34" charset="-122"/>
                 <a:cs typeface="Yu Mincho" pitchFamily="34" charset="-120"/>
               </a:rPr>
-              <a:t>　円（税込）</a:t>
-            </a:r>
-            <a:endParaRPr lang="en-US" sz="8200" dirty="0"/>
-          </a:p>
-        </p:txBody>
-      </p:sp>
-      <p:sp>
-        <p:nvSpPr>
-          <p:cNvPr id="6" name="Shape 4"/>
+              <a:t>自分を戻せる選手になる。</a:t>
+            </a:r>
+            <a:endParaRPr lang="en-US" sz="2700" dirty="0"/>
+          </a:p>
+        </p:txBody>
+      </p:sp>
+      <p:sp>
+        <p:nvSpPr>
+          <p:cNvPr id="7" name="Shape 5"/>
           <p:cNvSpPr/>
           <p:nvPr/>
         </p:nvSpPr>
         <p:spPr>
           <a:xfrm>
-            <a:off x="457200" y="3200400"/>
-            <a:ext cx="1920240" cy="658368"/>
+            <a:off x="457200" y="3611880"/>
+            <a:ext cx="7863840" cy="868680"/>
           </a:xfrm>
           <a:prstGeom prst="roundRect">
             <a:avLst>
-              <a:gd name="adj" fmla="val 50000"/>
+              <a:gd name="adj" fmla="val 8421"/>
             </a:avLst>
           </a:prstGeom>
           <a:solidFill>
-            <a:srgbClr val="FAF3F4"/>
+            <a:srgbClr val="A02236"/>
           </a:solidFill>
           <a:ln w="12700">
             <a:solidFill>
-              <a:srgbClr val="FAF3F4"/>
+              <a:srgbClr val="A02236"/>
             </a:solidFill>
             <a:prstDash val="solid"/>
           </a:ln>
@@ -17411,238 +17750,40 @@
       </p:sp>
       <p:sp>
         <p:nvSpPr>
-          <p:cNvPr id="7" name="Text 5"/>
-          <p:cNvSpPr txBox="1"/>
-          <p:nvPr/>
-        </p:nvSpPr>
-        <p:spPr>
-          <a:xfrm>
-            <a:off x="457200" y="3200400"/>
-            <a:ext cx="1920240" cy="658368"/>
-          </a:xfrm>
-          <a:prstGeom prst="rect">
-            <a:avLst/>
-          </a:prstGeom>
-          <a:noFill/>
-          <a:ln/>
-        </p:spPr>
-        <p:txBody>
-          <a:bodyPr wrap="square" lIns="0" tIns="0" rIns="0" bIns="0" rtlCol="0" anchor="ctr"/>
-          <a:lstStyle/>
-          <a:p>
-            <a:pPr algn="ctr" indent="0" marL="0">
-              <a:buNone/>
-            </a:pPr>
-            <a:r>
-              <a:rPr lang="en-US" sz="1700" b="1" dirty="0">
-                <a:solidFill>
-                  <a:srgbClr val="7A1524"/>
-                </a:solidFill>
-                <a:latin typeface="Yu Gothic" pitchFamily="34" charset="0"/>
-                <a:ea typeface="Yu Gothic" pitchFamily="34" charset="-122"/>
-                <a:cs typeface="Yu Gothic" pitchFamily="34" charset="-120"/>
-              </a:rPr>
-              <a:t>全10回</a:t>
-            </a:r>
-            <a:endParaRPr lang="en-US" sz="1700" dirty="0"/>
-          </a:p>
-        </p:txBody>
-      </p:sp>
-      <p:sp>
-        <p:nvSpPr>
-          <p:cNvPr id="8" name="Shape 6"/>
-          <p:cNvSpPr/>
-          <p:nvPr/>
-        </p:nvSpPr>
-        <p:spPr>
-          <a:xfrm>
-            <a:off x="2560320" y="3200400"/>
-            <a:ext cx="1920240" cy="658368"/>
-          </a:xfrm>
-          <a:prstGeom prst="roundRect">
-            <a:avLst>
-              <a:gd name="adj" fmla="val 50000"/>
-            </a:avLst>
-          </a:prstGeom>
-          <a:solidFill>
-            <a:srgbClr val="FAF3F4"/>
-          </a:solidFill>
-          <a:ln w="12700">
-            <a:solidFill>
-              <a:srgbClr val="FAF3F4"/>
-            </a:solidFill>
-            <a:prstDash val="solid"/>
-          </a:ln>
-        </p:spPr>
-      </p:sp>
-      <p:sp>
-        <p:nvSpPr>
-          <p:cNvPr id="9" name="Text 7"/>
-          <p:cNvSpPr txBox="1"/>
-          <p:nvPr/>
-        </p:nvSpPr>
-        <p:spPr>
-          <a:xfrm>
-            <a:off x="2560320" y="3200400"/>
-            <a:ext cx="1920240" cy="658368"/>
-          </a:xfrm>
-          <a:prstGeom prst="rect">
-            <a:avLst/>
-          </a:prstGeom>
-          <a:noFill/>
-          <a:ln/>
-        </p:spPr>
-        <p:txBody>
-          <a:bodyPr wrap="square" lIns="0" tIns="0" rIns="0" bIns="0" rtlCol="0" anchor="ctr"/>
-          <a:lstStyle/>
-          <a:p>
-            <a:pPr algn="ctr" indent="0" marL="0">
-              <a:buNone/>
-            </a:pPr>
-            <a:r>
-              <a:rPr lang="en-US" sz="1700" b="1" dirty="0">
-                <a:solidFill>
-                  <a:srgbClr val="7A1524"/>
-                </a:solidFill>
-                <a:latin typeface="Yu Gothic" pitchFamily="34" charset="0"/>
-                <a:ea typeface="Yu Gothic" pitchFamily="34" charset="-122"/>
-                <a:cs typeface="Yu Gothic" pitchFamily="34" charset="-120"/>
-              </a:rPr>
-              <a:t>1回60分</a:t>
-            </a:r>
-            <a:endParaRPr lang="en-US" sz="1700" dirty="0"/>
-          </a:p>
-        </p:txBody>
-      </p:sp>
-      <p:sp>
-        <p:nvSpPr>
-          <p:cNvPr id="10" name="Shape 8"/>
-          <p:cNvSpPr/>
-          <p:nvPr/>
-        </p:nvSpPr>
-        <p:spPr>
-          <a:xfrm>
-            <a:off x="4663440" y="3200400"/>
-            <a:ext cx="1920240" cy="658368"/>
-          </a:xfrm>
-          <a:prstGeom prst="roundRect">
-            <a:avLst>
-              <a:gd name="adj" fmla="val 50000"/>
-            </a:avLst>
-          </a:prstGeom>
-          <a:solidFill>
-            <a:srgbClr val="FAF3F4"/>
-          </a:solidFill>
-          <a:ln w="12700">
-            <a:solidFill>
-              <a:srgbClr val="FAF3F4"/>
-            </a:solidFill>
-            <a:prstDash val="solid"/>
-          </a:ln>
-        </p:spPr>
-      </p:sp>
-      <p:sp>
-        <p:nvSpPr>
-          <p:cNvPr id="11" name="Text 9"/>
-          <p:cNvSpPr txBox="1"/>
-          <p:nvPr/>
-        </p:nvSpPr>
-        <p:spPr>
-          <a:xfrm>
-            <a:off x="4663440" y="3200400"/>
-            <a:ext cx="1920240" cy="658368"/>
-          </a:xfrm>
-          <a:prstGeom prst="rect">
-            <a:avLst/>
-          </a:prstGeom>
-          <a:noFill/>
-          <a:ln/>
-        </p:spPr>
-        <p:txBody>
-          <a:bodyPr wrap="square" lIns="0" tIns="0" rIns="0" bIns="0" rtlCol="0" anchor="ctr"/>
-          <a:lstStyle/>
-          <a:p>
-            <a:pPr algn="ctr" indent="0" marL="0">
-              <a:buNone/>
-            </a:pPr>
-            <a:r>
-              <a:rPr lang="en-US" sz="1700" b="1" dirty="0">
-                <a:solidFill>
-                  <a:srgbClr val="7A1524"/>
-                </a:solidFill>
-                <a:latin typeface="Yu Gothic" pitchFamily="34" charset="0"/>
-                <a:ea typeface="Yu Gothic" pitchFamily="34" charset="-122"/>
-                <a:cs typeface="Yu Gothic" pitchFamily="34" charset="-120"/>
-              </a:rPr>
-              <a:t>完全1対1</a:t>
-            </a:r>
-            <a:endParaRPr lang="en-US" sz="1700" dirty="0"/>
-          </a:p>
-        </p:txBody>
-      </p:sp>
-      <p:sp>
-        <p:nvSpPr>
-          <p:cNvPr id="12" name="Shape 10"/>
-          <p:cNvSpPr/>
-          <p:nvPr/>
-        </p:nvSpPr>
-        <p:spPr>
-          <a:xfrm>
-            <a:off x="6766560" y="3200400"/>
-            <a:ext cx="1920240" cy="658368"/>
-          </a:xfrm>
-          <a:prstGeom prst="roundRect">
-            <a:avLst>
-              <a:gd name="adj" fmla="val 50000"/>
-            </a:avLst>
-          </a:prstGeom>
-          <a:solidFill>
-            <a:srgbClr val="FAF3F4"/>
-          </a:solidFill>
-          <a:ln w="12700">
-            <a:solidFill>
-              <a:srgbClr val="FAF3F4"/>
-            </a:solidFill>
-            <a:prstDash val="solid"/>
-          </a:ln>
-        </p:spPr>
-      </p:sp>
-      <p:sp>
-        <p:nvSpPr>
-          <p:cNvPr id="13" name="Text 11"/>
-          <p:cNvSpPr txBox="1"/>
-          <p:nvPr/>
-        </p:nvSpPr>
-        <p:spPr>
-          <a:xfrm>
-            <a:off x="6766560" y="3200400"/>
-            <a:ext cx="1920240" cy="658368"/>
-          </a:xfrm>
-          <a:prstGeom prst="rect">
-            <a:avLst/>
-          </a:prstGeom>
-          <a:noFill/>
-          <a:ln/>
-        </p:spPr>
-        <p:txBody>
-          <a:bodyPr wrap="square" lIns="0" tIns="0" rIns="0" bIns="0" rtlCol="0" anchor="ctr"/>
-          <a:lstStyle/>
-          <a:p>
-            <a:pPr algn="ctr" indent="0" marL="0">
-              <a:buNone/>
-            </a:pPr>
-            <a:r>
-              <a:rPr lang="en-US" sz="1700" b="1" dirty="0">
-                <a:solidFill>
-                  <a:srgbClr val="7A1524"/>
-                </a:solidFill>
-                <a:latin typeface="Yu Gothic" pitchFamily="34" charset="0"/>
-                <a:ea typeface="Yu Gothic" pitchFamily="34" charset="-122"/>
-                <a:cs typeface="Yu Gothic" pitchFamily="34" charset="-120"/>
-              </a:rPr>
-              <a:t>最長3か月</a:t>
-            </a:r>
-            <a:endParaRPr lang="en-US" sz="1700" dirty="0"/>
+          <p:cNvPr id="8" name="Text 6"/>
+          <p:cNvSpPr txBox="1"/>
+          <p:nvPr/>
+        </p:nvSpPr>
+        <p:spPr>
+          <a:xfrm>
+            <a:off x="822960" y="3611880"/>
+            <a:ext cx="7406640" cy="868680"/>
+          </a:xfrm>
+          <a:prstGeom prst="rect">
+            <a:avLst/>
+          </a:prstGeom>
+          <a:noFill/>
+          <a:ln/>
+        </p:spPr>
+        <p:txBody>
+          <a:bodyPr wrap="square" lIns="0" tIns="0" rIns="0" bIns="0" rtlCol="0" anchor="ctr"/>
+          <a:lstStyle/>
+          <a:p>
+            <a:pPr indent="0" marL="0">
+              <a:buNone/>
+            </a:pPr>
+            <a:r>
+              <a:rPr lang="en-US" sz="2000" b="1" dirty="0">
+                <a:solidFill>
+                  <a:srgbClr val="FFFFFF"/>
+                </a:solidFill>
+                <a:latin typeface="Yu Gothic" pitchFamily="34" charset="0"/>
+                <a:ea typeface="Yu Gothic" pitchFamily="34" charset="-122"/>
+                <a:cs typeface="Yu Gothic" pitchFamily="34" charset="-120"/>
+              </a:rPr>
+              <a:t>そして「試合が楽しみです」と言える選手へ。</a:t>
+            </a:r>
+            <a:endParaRPr lang="en-US" sz="2000" dirty="0"/>
           </a:p>
         </p:txBody>
       </p:sp>
@@ -17764,7 +17905,7 @@
         </p:nvSpPr>
         <p:spPr>
           <a:xfrm>
-            <a:off x="457200" y="777240"/>
+            <a:off x="457200" y="914400"/>
             <a:ext cx="8138160" cy="1188720"/>
           </a:xfrm>
           <a:prstGeom prst="rect">
@@ -17779,22 +17920,22 @@
           <a:p>
             <a:pPr algn="l" indent="0" marL="0">
               <a:lnSpc>
-                <a:spcPts val="4785"/>
+                <a:spcPts val="3770"/>
               </a:lnSpc>
               <a:buNone/>
             </a:pPr>
             <a:r>
-              <a:rPr lang="en-US" sz="3300" b="1" dirty="0">
-                <a:solidFill>
-                  <a:srgbClr val="141416"/>
+              <a:rPr lang="en-US" sz="2600" b="1" dirty="0">
+                <a:solidFill>
+                  <a:srgbClr val="6B6360"/>
                 </a:solidFill>
                 <a:latin typeface="Yu Mincho" pitchFamily="34" charset="0"/>
                 <a:ea typeface="Yu Mincho" pitchFamily="34" charset="-122"/>
                 <a:cs typeface="Yu Mincho" pitchFamily="34" charset="-120"/>
               </a:rPr>
-              <a:t>今回は5名限定です</a:t>
-            </a:r>
-            <a:endParaRPr lang="en-US" sz="3300" dirty="0"/>
+              <a:t>受講料</a:t>
+            </a:r>
+            <a:endParaRPr lang="en-US" sz="2600" dirty="0"/>
           </a:p>
         </p:txBody>
       </p:sp>
@@ -17806,186 +17947,73 @@
         </p:nvSpPr>
         <p:spPr>
           <a:xfrm>
-            <a:off x="457200" y="1737360"/>
-            <a:ext cx="7863840" cy="411480"/>
-          </a:xfrm>
-          <a:prstGeom prst="rect">
-            <a:avLst/>
-          </a:prstGeom>
-          <a:noFill/>
-          <a:ln/>
-        </p:spPr>
-        <p:txBody>
-          <a:bodyPr wrap="square" lIns="0" tIns="0" rIns="0" bIns="0" rtlCol="0" anchor="ctr"/>
-          <a:lstStyle/>
-          <a:p>
-            <a:pPr indent="0" marL="0">
-              <a:buNone/>
-            </a:pPr>
-            <a:r>
-              <a:rPr lang="en-US" sz="1800" dirty="0">
-                <a:solidFill>
-                  <a:srgbClr val="3B3634"/>
-                </a:solidFill>
-                <a:latin typeface="Yu Gothic" pitchFamily="34" charset="0"/>
-                <a:ea typeface="Yu Gothic" pitchFamily="34" charset="-122"/>
-                <a:cs typeface="Yu Gothic" pitchFamily="34" charset="-120"/>
-              </a:rPr>
-              <a:t>たくさんの方へ一斉に教える講座ではありません。</a:t>
-            </a:r>
-            <a:endParaRPr lang="en-US" sz="1800" dirty="0"/>
-          </a:p>
-        </p:txBody>
-      </p:sp>
-      <p:sp>
-        <p:nvSpPr>
-          <p:cNvPr id="6" name="Text 4"/>
-          <p:cNvSpPr txBox="1"/>
-          <p:nvPr/>
-        </p:nvSpPr>
-        <p:spPr>
-          <a:xfrm>
-            <a:off x="640080" y="2240280"/>
-            <a:ext cx="7680960" cy="1554480"/>
-          </a:xfrm>
-          <a:prstGeom prst="rect">
-            <a:avLst/>
-          </a:prstGeom>
-          <a:noFill/>
-          <a:ln/>
-        </p:spPr>
-        <p:txBody>
-          <a:bodyPr wrap="square" lIns="0" tIns="0" rIns="0" bIns="0" rtlCol="0" anchor="ctr"/>
-          <a:lstStyle/>
-          <a:p>
-            <a:pPr marL="342900" indent="-342900">
-              <a:spcAft>
-                <a:spcPts val="600"/>
-              </a:spcAft>
-              <a:buSzPct val="100000"/>
-              <a:buChar char="•"/>
-            </a:pPr>
-            <a:r>
-              <a:rPr lang="en-US" sz="1800" dirty="0">
-                <a:solidFill>
-                  <a:srgbClr val="3B3634"/>
-                </a:solidFill>
-                <a:latin typeface="Yu Gothic" pitchFamily="34" charset="0"/>
-                <a:ea typeface="Yu Gothic" pitchFamily="34" charset="-122"/>
-                <a:cs typeface="Yu Gothic" pitchFamily="34" charset="-120"/>
-              </a:rPr>
-              <a:t>次の大会</a:t>
-            </a:r>
-            <a:endParaRPr lang="en-US" sz="1800" dirty="0"/>
-          </a:p>
-          <a:p>
-            <a:pPr marL="342900" indent="-342900">
-              <a:spcAft>
-                <a:spcPts val="600"/>
-              </a:spcAft>
-              <a:buSzPct val="100000"/>
-              <a:buChar char="•"/>
-            </a:pPr>
-            <a:r>
-              <a:rPr lang="en-US" sz="1800" dirty="0">
-                <a:solidFill>
-                  <a:srgbClr val="3B3634"/>
-                </a:solidFill>
-                <a:latin typeface="Yu Gothic" pitchFamily="34" charset="0"/>
-                <a:ea typeface="Yu Gothic" pitchFamily="34" charset="-122"/>
-                <a:cs typeface="Yu Gothic" pitchFamily="34" charset="-120"/>
-              </a:rPr>
-              <a:t>取りたい記録</a:t>
-            </a:r>
-            <a:endParaRPr lang="en-US" sz="1800" dirty="0"/>
-          </a:p>
-          <a:p>
-            <a:pPr marL="342900" indent="-342900">
-              <a:spcAft>
-                <a:spcPts val="600"/>
-              </a:spcAft>
-              <a:buSzPct val="100000"/>
-              <a:buChar char="•"/>
-            </a:pPr>
-            <a:r>
-              <a:rPr lang="en-US" sz="1800" dirty="0">
-                <a:solidFill>
-                  <a:srgbClr val="3B3634"/>
-                </a:solidFill>
-                <a:latin typeface="Yu Gothic" pitchFamily="34" charset="0"/>
-                <a:ea typeface="Yu Gothic" pitchFamily="34" charset="-122"/>
-                <a:cs typeface="Yu Gothic" pitchFamily="34" charset="-120"/>
-              </a:rPr>
-              <a:t>過去の試合</a:t>
-            </a:r>
-            <a:endParaRPr lang="en-US" sz="1800" dirty="0"/>
-          </a:p>
-          <a:p>
-            <a:pPr marL="342900" indent="-342900">
-              <a:spcAft>
-                <a:spcPts val="600"/>
-              </a:spcAft>
-              <a:buSzPct val="100000"/>
-              <a:buChar char="•"/>
-            </a:pPr>
-            <a:r>
-              <a:rPr lang="en-US" sz="1800" dirty="0">
-                <a:solidFill>
-                  <a:srgbClr val="3B3634"/>
-                </a:solidFill>
-                <a:latin typeface="Yu Gothic" pitchFamily="34" charset="0"/>
-                <a:ea typeface="Yu Gothic" pitchFamily="34" charset="-122"/>
-                <a:cs typeface="Yu Gothic" pitchFamily="34" charset="-120"/>
-              </a:rPr>
-              <a:t>考え方の特徴</a:t>
-            </a:r>
-            <a:endParaRPr lang="en-US" sz="1800" dirty="0"/>
-          </a:p>
-          <a:p>
-            <a:pPr marL="342900" indent="-342900">
-              <a:spcAft>
-                <a:spcPts val="600"/>
-              </a:spcAft>
-              <a:buSzPct val="100000"/>
-              <a:buChar char="•"/>
-            </a:pPr>
-            <a:r>
-              <a:rPr lang="en-US" sz="1800" dirty="0">
-                <a:solidFill>
-                  <a:srgbClr val="3B3634"/>
-                </a:solidFill>
-                <a:latin typeface="Yu Gothic" pitchFamily="34" charset="0"/>
-                <a:ea typeface="Yu Gothic" pitchFamily="34" charset="-122"/>
-                <a:cs typeface="Yu Gothic" pitchFamily="34" charset="-120"/>
-              </a:rPr>
-              <a:t>その人に必要なメンタルスキル</a:t>
-            </a:r>
-            <a:endParaRPr lang="en-US" sz="1800" dirty="0"/>
-          </a:p>
-        </p:txBody>
-      </p:sp>
-      <p:sp>
-        <p:nvSpPr>
-          <p:cNvPr id="7" name="Shape 5"/>
+            <a:off x="457200" y="1463040"/>
+            <a:ext cx="7863840" cy="1371600"/>
+          </a:xfrm>
+          <a:prstGeom prst="rect">
+            <a:avLst/>
+          </a:prstGeom>
+          <a:noFill/>
+          <a:ln/>
+        </p:spPr>
+        <p:txBody>
+          <a:bodyPr wrap="square" lIns="0" tIns="0" rIns="0" bIns="0" rtlCol="0" anchor="b"/>
+          <a:lstStyle/>
+          <a:p>
+            <a:pPr indent="0" marL="0">
+              <a:buNone/>
+            </a:pPr>
+            <a:r>
+              <a:rPr lang="en-US" sz="8200" b="1" dirty="0">
+                <a:solidFill>
+                  <a:srgbClr val="7A1524"/>
+                </a:solidFill>
+                <a:latin typeface="Yu Mincho" pitchFamily="34" charset="0"/>
+                <a:ea typeface="Yu Mincho" pitchFamily="34" charset="-122"/>
+                <a:cs typeface="Yu Mincho" pitchFamily="34" charset="-120"/>
+              </a:rPr>
+              <a:t>98,000</a:t>
+            </a:r>
+            <a:pPr indent="0" marL="0">
+              <a:buNone/>
+            </a:pPr>
+            <a:r>
+              <a:rPr lang="en-US" sz="2400" b="1" dirty="0">
+                <a:solidFill>
+                  <a:srgbClr val="7A1524"/>
+                </a:solidFill>
+                <a:latin typeface="Yu Mincho" pitchFamily="34" charset="0"/>
+                <a:ea typeface="Yu Mincho" pitchFamily="34" charset="-122"/>
+                <a:cs typeface="Yu Mincho" pitchFamily="34" charset="-120"/>
+              </a:rPr>
+              <a:t>　円（税込）</a:t>
+            </a:r>
+            <a:endParaRPr lang="en-US" sz="8200" dirty="0"/>
+          </a:p>
+        </p:txBody>
+      </p:sp>
+      <p:sp>
+        <p:nvSpPr>
+          <p:cNvPr id="6" name="Shape 4"/>
           <p:cNvSpPr/>
           <p:nvPr/>
         </p:nvSpPr>
         <p:spPr>
           <a:xfrm>
-            <a:off x="457200" y="3931920"/>
-            <a:ext cx="7863840" cy="685800"/>
+            <a:off x="457200" y="3200400"/>
+            <a:ext cx="1920240" cy="658368"/>
           </a:xfrm>
           <a:prstGeom prst="roundRect">
             <a:avLst>
-              <a:gd name="adj" fmla="val 10667"/>
+              <a:gd name="adj" fmla="val 50000"/>
             </a:avLst>
           </a:prstGeom>
           <a:solidFill>
-            <a:srgbClr val="540E19"/>
+            <a:srgbClr val="FAF3F4"/>
           </a:solidFill>
           <a:ln w="12700">
             <a:solidFill>
-              <a:srgbClr val="540E19"/>
+              <a:srgbClr val="FAF3F4"/>
             </a:solidFill>
             <a:prstDash val="solid"/>
           </a:ln>
@@ -17993,42 +18021,69 @@
       </p:sp>
       <p:sp>
         <p:nvSpPr>
-          <p:cNvPr id="8" name="Text 6"/>
-          <p:cNvSpPr txBox="1"/>
-          <p:nvPr/>
-        </p:nvSpPr>
-        <p:spPr>
-          <a:xfrm>
-            <a:off x="822960" y="3931920"/>
-            <a:ext cx="7406640" cy="685800"/>
-          </a:xfrm>
-          <a:prstGeom prst="rect">
-            <a:avLst/>
-          </a:prstGeom>
-          <a:noFill/>
-          <a:ln/>
-        </p:spPr>
-        <p:txBody>
-          <a:bodyPr wrap="square" lIns="0" tIns="0" rIns="0" bIns="0" rtlCol="0" anchor="ctr"/>
-          <a:lstStyle/>
-          <a:p>
-            <a:pPr indent="0" marL="0">
-              <a:buNone/>
-            </a:pPr>
-            <a:r>
-              <a:rPr lang="en-US" sz="1800" b="1" dirty="0">
-                <a:solidFill>
-                  <a:srgbClr val="FFFFFF"/>
-                </a:solidFill>
-                <a:latin typeface="Yu Gothic" pitchFamily="34" charset="0"/>
-                <a:ea typeface="Yu Gothic" pitchFamily="34" charset="-122"/>
-                <a:cs typeface="Yu Gothic" pitchFamily="34" charset="-120"/>
-              </a:rPr>
-              <a:t>一人ひとりを把握し、じっくり関わりたいから。</a:t>
-            </a:r>
-            <a:endParaRPr lang="en-US" sz="1800" dirty="0"/>
-          </a:p>
-        </p:txBody>
+          <p:cNvPr id="7" name="Text 5"/>
+          <p:cNvSpPr txBox="1"/>
+          <p:nvPr/>
+        </p:nvSpPr>
+        <p:spPr>
+          <a:xfrm>
+            <a:off x="457200" y="3200400"/>
+            <a:ext cx="1920240" cy="658368"/>
+          </a:xfrm>
+          <a:prstGeom prst="rect">
+            <a:avLst/>
+          </a:prstGeom>
+          <a:noFill/>
+          <a:ln/>
+        </p:spPr>
+        <p:txBody>
+          <a:bodyPr wrap="square" lIns="0" tIns="0" rIns="0" bIns="0" rtlCol="0" anchor="ctr"/>
+          <a:lstStyle/>
+          <a:p>
+            <a:pPr algn="ctr" indent="0" marL="0">
+              <a:buNone/>
+            </a:pPr>
+            <a:r>
+              <a:rPr lang="en-US" sz="1700" b="1" dirty="0">
+                <a:solidFill>
+                  <a:srgbClr val="7A1524"/>
+                </a:solidFill>
+                <a:latin typeface="Yu Gothic" pitchFamily="34" charset="0"/>
+                <a:ea typeface="Yu Gothic" pitchFamily="34" charset="-122"/>
+                <a:cs typeface="Yu Gothic" pitchFamily="34" charset="-120"/>
+              </a:rPr>
+              <a:t>3か月</a:t>
+            </a:r>
+            <a:endParaRPr lang="en-US" sz="1700" dirty="0"/>
+          </a:p>
+        </p:txBody>
+      </p:sp>
+      <p:sp>
+        <p:nvSpPr>
+          <p:cNvPr id="8" name="Shape 6"/>
+          <p:cNvSpPr/>
+          <p:nvPr/>
+        </p:nvSpPr>
+        <p:spPr>
+          <a:xfrm>
+            <a:off x="2560320" y="3200400"/>
+            <a:ext cx="1920240" cy="658368"/>
+          </a:xfrm>
+          <a:prstGeom prst="roundRect">
+            <a:avLst>
+              <a:gd name="adj" fmla="val 50000"/>
+            </a:avLst>
+          </a:prstGeom>
+          <a:solidFill>
+            <a:srgbClr val="FAF3F4"/>
+          </a:solidFill>
+          <a:ln w="12700">
+            <a:solidFill>
+              <a:srgbClr val="FAF3F4"/>
+            </a:solidFill>
+            <a:prstDash val="solid"/>
+          </a:ln>
+        </p:spPr>
       </p:sp>
       <p:sp>
         <p:nvSpPr>
@@ -18038,34 +18093,166 @@
         </p:nvSpPr>
         <p:spPr>
           <a:xfrm>
-            <a:off x="457200" y="4709160"/>
-            <a:ext cx="7863840" cy="320040"/>
-          </a:xfrm>
-          <a:prstGeom prst="rect">
-            <a:avLst/>
-          </a:prstGeom>
-          <a:noFill/>
-          <a:ln/>
-        </p:spPr>
-        <p:txBody>
-          <a:bodyPr wrap="square" lIns="0" tIns="0" rIns="0" bIns="0" rtlCol="0" anchor="ctr"/>
-          <a:lstStyle/>
-          <a:p>
-            <a:pPr indent="0" marL="0">
-              <a:buNone/>
-            </a:pPr>
-            <a:r>
-              <a:rPr lang="en-US" sz="1400" dirty="0">
-                <a:solidFill>
-                  <a:srgbClr val="6B6360"/>
-                </a:solidFill>
-                <a:latin typeface="Yu Gothic" pitchFamily="34" charset="0"/>
-                <a:ea typeface="Yu Gothic" pitchFamily="34" charset="-122"/>
-                <a:cs typeface="Yu Gothic" pitchFamily="34" charset="-120"/>
-              </a:rPr>
-              <a:t>5名に達した時点で、今回の受付は終了します。</a:t>
-            </a:r>
-            <a:endParaRPr lang="en-US" sz="1400" dirty="0"/>
+            <a:off x="2560320" y="3200400"/>
+            <a:ext cx="1920240" cy="658368"/>
+          </a:xfrm>
+          <a:prstGeom prst="rect">
+            <a:avLst/>
+          </a:prstGeom>
+          <a:noFill/>
+          <a:ln/>
+        </p:spPr>
+        <p:txBody>
+          <a:bodyPr wrap="square" lIns="0" tIns="0" rIns="0" bIns="0" rtlCol="0" anchor="ctr"/>
+          <a:lstStyle/>
+          <a:p>
+            <a:pPr algn="ctr" indent="0" marL="0">
+              <a:buNone/>
+            </a:pPr>
+            <a:r>
+              <a:rPr lang="en-US" sz="1700" b="1" dirty="0">
+                <a:solidFill>
+                  <a:srgbClr val="7A1524"/>
+                </a:solidFill>
+                <a:latin typeface="Yu Gothic" pitchFamily="34" charset="0"/>
+                <a:ea typeface="Yu Gothic" pitchFamily="34" charset="-122"/>
+                <a:cs typeface="Yu Gothic" pitchFamily="34" charset="-120"/>
+              </a:rPr>
+              <a:t>最大10回</a:t>
+            </a:r>
+            <a:endParaRPr lang="en-US" sz="1700" dirty="0"/>
+          </a:p>
+        </p:txBody>
+      </p:sp>
+      <p:sp>
+        <p:nvSpPr>
+          <p:cNvPr id="10" name="Shape 8"/>
+          <p:cNvSpPr/>
+          <p:nvPr/>
+        </p:nvSpPr>
+        <p:spPr>
+          <a:xfrm>
+            <a:off x="4663440" y="3200400"/>
+            <a:ext cx="1920240" cy="658368"/>
+          </a:xfrm>
+          <a:prstGeom prst="roundRect">
+            <a:avLst>
+              <a:gd name="adj" fmla="val 50000"/>
+            </a:avLst>
+          </a:prstGeom>
+          <a:solidFill>
+            <a:srgbClr val="FAF3F4"/>
+          </a:solidFill>
+          <a:ln w="12700">
+            <a:solidFill>
+              <a:srgbClr val="FAF3F4"/>
+            </a:solidFill>
+            <a:prstDash val="solid"/>
+          </a:ln>
+        </p:spPr>
+      </p:sp>
+      <p:sp>
+        <p:nvSpPr>
+          <p:cNvPr id="11" name="Text 9"/>
+          <p:cNvSpPr txBox="1"/>
+          <p:nvPr/>
+        </p:nvSpPr>
+        <p:spPr>
+          <a:xfrm>
+            <a:off x="4663440" y="3200400"/>
+            <a:ext cx="1920240" cy="658368"/>
+          </a:xfrm>
+          <a:prstGeom prst="rect">
+            <a:avLst/>
+          </a:prstGeom>
+          <a:noFill/>
+          <a:ln/>
+        </p:spPr>
+        <p:txBody>
+          <a:bodyPr wrap="square" lIns="0" tIns="0" rIns="0" bIns="0" rtlCol="0" anchor="ctr"/>
+          <a:lstStyle/>
+          <a:p>
+            <a:pPr algn="ctr" indent="0" marL="0">
+              <a:buNone/>
+            </a:pPr>
+            <a:r>
+              <a:rPr lang="en-US" sz="1700" b="1" dirty="0">
+                <a:solidFill>
+                  <a:srgbClr val="7A1524"/>
+                </a:solidFill>
+                <a:latin typeface="Yu Gothic" pitchFamily="34" charset="0"/>
+                <a:ea typeface="Yu Gothic" pitchFamily="34" charset="-122"/>
+                <a:cs typeface="Yu Gothic" pitchFamily="34" charset="-120"/>
+              </a:rPr>
+              <a:t>1回60分</a:t>
+            </a:r>
+            <a:endParaRPr lang="en-US" sz="1700" dirty="0"/>
+          </a:p>
+        </p:txBody>
+      </p:sp>
+      <p:sp>
+        <p:nvSpPr>
+          <p:cNvPr id="12" name="Shape 10"/>
+          <p:cNvSpPr/>
+          <p:nvPr/>
+        </p:nvSpPr>
+        <p:spPr>
+          <a:xfrm>
+            <a:off x="6766560" y="3200400"/>
+            <a:ext cx="1920240" cy="658368"/>
+          </a:xfrm>
+          <a:prstGeom prst="roundRect">
+            <a:avLst>
+              <a:gd name="adj" fmla="val 50000"/>
+            </a:avLst>
+          </a:prstGeom>
+          <a:solidFill>
+            <a:srgbClr val="FAF3F4"/>
+          </a:solidFill>
+          <a:ln w="12700">
+            <a:solidFill>
+              <a:srgbClr val="FAF3F4"/>
+            </a:solidFill>
+            <a:prstDash val="solid"/>
+          </a:ln>
+        </p:spPr>
+      </p:sp>
+      <p:sp>
+        <p:nvSpPr>
+          <p:cNvPr id="13" name="Text 11"/>
+          <p:cNvSpPr txBox="1"/>
+          <p:nvPr/>
+        </p:nvSpPr>
+        <p:spPr>
+          <a:xfrm>
+            <a:off x="6766560" y="3200400"/>
+            <a:ext cx="1920240" cy="658368"/>
+          </a:xfrm>
+          <a:prstGeom prst="rect">
+            <a:avLst/>
+          </a:prstGeom>
+          <a:noFill/>
+          <a:ln/>
+        </p:spPr>
+        <p:txBody>
+          <a:bodyPr wrap="square" lIns="0" tIns="0" rIns="0" bIns="0" rtlCol="0" anchor="ctr"/>
+          <a:lstStyle/>
+          <a:p>
+            <a:pPr algn="ctr" indent="0" marL="0">
+              <a:buNone/>
+            </a:pPr>
+            <a:r>
+              <a:rPr lang="en-US" sz="1700" b="1" dirty="0">
+                <a:solidFill>
+                  <a:srgbClr val="7A1524"/>
+                </a:solidFill>
+                <a:latin typeface="Yu Gothic" pitchFamily="34" charset="0"/>
+                <a:ea typeface="Yu Gothic" pitchFamily="34" charset="-122"/>
+                <a:cs typeface="Yu Gothic" pitchFamily="34" charset="-120"/>
+              </a:rPr>
+              <a:t>完全1対1</a:t>
+            </a:r>
+            <a:endParaRPr lang="en-US" sz="1700" dirty="0"/>
           </a:p>
         </p:txBody>
       </p:sp>
@@ -18134,7 +18321,7 @@
                 <a:ea typeface="Yu Gothic" pitchFamily="34" charset="-122"/>
                 <a:cs typeface="Yu Gothic" pitchFamily="34" charset="-120"/>
               </a:rPr>
-              <a:t>PHASE 8　クロージング</a:t>
+              <a:t>PHASE 7　講座のご案内</a:t>
             </a:r>
             <a:endParaRPr lang="en-US" sz="1200" dirty="0"/>
           </a:p>
@@ -18215,7 +18402,7 @@
                 <a:ea typeface="Yu Mincho" pitchFamily="34" charset="-122"/>
                 <a:cs typeface="Yu Mincho" pitchFamily="34" charset="-120"/>
               </a:rPr>
-              <a:t>今日、決めなくて大丈夫です</a:t>
+              <a:t>一人ひとり、中身が違います</a:t>
             </a:r>
             <a:endParaRPr lang="en-US" sz="3300" dirty="0"/>
           </a:p>
@@ -18229,24 +18416,64 @@
         </p:nvSpPr>
         <p:spPr>
           <a:xfrm>
-            <a:off x="457200" y="1783080"/>
-            <a:ext cx="8229600" cy="914400"/>
-          </a:xfrm>
-          <a:prstGeom prst="rect">
-            <a:avLst/>
-          </a:prstGeom>
-          <a:noFill/>
-          <a:ln/>
-        </p:spPr>
-        <p:txBody>
-          <a:bodyPr wrap="square" lIns="0" tIns="0" rIns="0" bIns="0" rtlCol="0" anchor="ctr"/>
-          <a:lstStyle/>
-          <a:p>
-            <a:pPr indent="0" marL="0">
-              <a:lnSpc>
-                <a:spcPts val="3000"/>
-              </a:lnSpc>
-              <a:buNone/>
+            <a:off x="457200" y="1737360"/>
+            <a:ext cx="7863840" cy="411480"/>
+          </a:xfrm>
+          <a:prstGeom prst="rect">
+            <a:avLst/>
+          </a:prstGeom>
+          <a:noFill/>
+          <a:ln/>
+        </p:spPr>
+        <p:txBody>
+          <a:bodyPr wrap="square" lIns="0" tIns="0" rIns="0" bIns="0" rtlCol="0" anchor="ctr"/>
+          <a:lstStyle/>
+          <a:p>
+            <a:pPr indent="0" marL="0">
+              <a:buNone/>
+            </a:pPr>
+            <a:r>
+              <a:rPr lang="en-US" sz="1700" dirty="0">
+                <a:solidFill>
+                  <a:srgbClr val="3B3634"/>
+                </a:solidFill>
+                <a:latin typeface="Yu Gothic" pitchFamily="34" charset="0"/>
+                <a:ea typeface="Yu Gothic" pitchFamily="34" charset="-122"/>
+                <a:cs typeface="Yu Gothic" pitchFamily="34" charset="-120"/>
+              </a:rPr>
+              <a:t>たくさんの方へ一斉に教える講座ではありません。次の5つを見て、組み立てます。</a:t>
+            </a:r>
+            <a:endParaRPr lang="en-US" sz="1700" dirty="0"/>
+          </a:p>
+        </p:txBody>
+      </p:sp>
+      <p:sp>
+        <p:nvSpPr>
+          <p:cNvPr id="6" name="Text 4"/>
+          <p:cNvSpPr txBox="1"/>
+          <p:nvPr/>
+        </p:nvSpPr>
+        <p:spPr>
+          <a:xfrm>
+            <a:off x="640080" y="2240280"/>
+            <a:ext cx="7680960" cy="1554480"/>
+          </a:xfrm>
+          <a:prstGeom prst="rect">
+            <a:avLst/>
+          </a:prstGeom>
+          <a:noFill/>
+          <a:ln/>
+        </p:spPr>
+        <p:txBody>
+          <a:bodyPr wrap="square" lIns="0" tIns="0" rIns="0" bIns="0" rtlCol="0" anchor="ctr"/>
+          <a:lstStyle/>
+          <a:p>
+            <a:pPr marL="342900" indent="-342900">
+              <a:spcAft>
+                <a:spcPts val="600"/>
+              </a:spcAft>
+              <a:buSzPct val="100000"/>
+              <a:buChar char="•"/>
             </a:pPr>
             <a:r>
               <a:rPr lang="en-US" sz="1800" dirty="0">
@@ -18257,16 +18484,17 @@
                 <a:ea typeface="Yu Gothic" pitchFamily="34" charset="-122"/>
                 <a:cs typeface="Yu Gothic" pitchFamily="34" charset="-120"/>
               </a:rPr>
-              <a:t>持ち帰って、考えてください。</a:t>
+              <a:t>次の大会</a:t>
             </a:r>
             <a:endParaRPr lang="en-US" sz="1800" dirty="0"/>
           </a:p>
           <a:p>
-            <a:pPr indent="0" marL="0">
-              <a:lnSpc>
-                <a:spcPts val="3000"/>
-              </a:lnSpc>
-              <a:buNone/>
+            <a:pPr marL="342900" indent="-342900">
+              <a:spcAft>
+                <a:spcPts val="600"/>
+              </a:spcAft>
+              <a:buSzPct val="100000"/>
+              <a:buChar char="•"/>
             </a:pPr>
             <a:r>
               <a:rPr lang="en-US" sz="1800" dirty="0">
@@ -18277,92 +18505,89 @@
                 <a:ea typeface="Yu Gothic" pitchFamily="34" charset="-122"/>
                 <a:cs typeface="Yu Gothic" pitchFamily="34" charset="-120"/>
               </a:rPr>
-              <a:t>ご家族やコーチに相談してからでも、まったく問題ありません。</a:t>
+              <a:t>取りたい記録</a:t>
             </a:r>
             <a:endParaRPr lang="en-US" sz="1800" dirty="0"/>
           </a:p>
-        </p:txBody>
-      </p:sp>
-      <p:sp>
-        <p:nvSpPr>
-          <p:cNvPr id="6" name="Shape 4"/>
+          <a:p>
+            <a:pPr marL="342900" indent="-342900">
+              <a:spcAft>
+                <a:spcPts val="600"/>
+              </a:spcAft>
+              <a:buSzPct val="100000"/>
+              <a:buChar char="•"/>
+            </a:pPr>
+            <a:r>
+              <a:rPr lang="en-US" sz="1800" dirty="0">
+                <a:solidFill>
+                  <a:srgbClr val="3B3634"/>
+                </a:solidFill>
+                <a:latin typeface="Yu Gothic" pitchFamily="34" charset="0"/>
+                <a:ea typeface="Yu Gothic" pitchFamily="34" charset="-122"/>
+                <a:cs typeface="Yu Gothic" pitchFamily="34" charset="-120"/>
+              </a:rPr>
+              <a:t>過去の試合</a:t>
+            </a:r>
+            <a:endParaRPr lang="en-US" sz="1800" dirty="0"/>
+          </a:p>
+          <a:p>
+            <a:pPr marL="342900" indent="-342900">
+              <a:spcAft>
+                <a:spcPts val="600"/>
+              </a:spcAft>
+              <a:buSzPct val="100000"/>
+              <a:buChar char="•"/>
+            </a:pPr>
+            <a:r>
+              <a:rPr lang="en-US" sz="1800" dirty="0">
+                <a:solidFill>
+                  <a:srgbClr val="3B3634"/>
+                </a:solidFill>
+                <a:latin typeface="Yu Gothic" pitchFamily="34" charset="0"/>
+                <a:ea typeface="Yu Gothic" pitchFamily="34" charset="-122"/>
+                <a:cs typeface="Yu Gothic" pitchFamily="34" charset="-120"/>
+              </a:rPr>
+              <a:t>考え方の特徴</a:t>
+            </a:r>
+            <a:endParaRPr lang="en-US" sz="1800" dirty="0"/>
+          </a:p>
+          <a:p>
+            <a:pPr marL="342900" indent="-342900">
+              <a:spcAft>
+                <a:spcPts val="600"/>
+              </a:spcAft>
+              <a:buSzPct val="100000"/>
+              <a:buChar char="•"/>
+            </a:pPr>
+            <a:r>
+              <a:rPr lang="en-US" sz="1800" dirty="0">
+                <a:solidFill>
+                  <a:srgbClr val="3B3634"/>
+                </a:solidFill>
+                <a:latin typeface="Yu Gothic" pitchFamily="34" charset="0"/>
+                <a:ea typeface="Yu Gothic" pitchFamily="34" charset="-122"/>
+                <a:cs typeface="Yu Gothic" pitchFamily="34" charset="-120"/>
+              </a:rPr>
+              <a:t>その人に必要なメンタルスキル</a:t>
+            </a:r>
+            <a:endParaRPr lang="en-US" sz="1800" dirty="0"/>
+          </a:p>
+        </p:txBody>
+      </p:sp>
+      <p:sp>
+        <p:nvSpPr>
+          <p:cNvPr id="7" name="Shape 5"/>
           <p:cNvSpPr/>
           <p:nvPr/>
         </p:nvSpPr>
         <p:spPr>
           <a:xfrm>
-            <a:off x="457200" y="2788920"/>
-            <a:ext cx="8229600" cy="731520"/>
+            <a:off x="457200" y="3931920"/>
+            <a:ext cx="7863840" cy="685800"/>
           </a:xfrm>
           <a:prstGeom prst="roundRect">
             <a:avLst>
-              <a:gd name="adj" fmla="val 8750"/>
-            </a:avLst>
-          </a:prstGeom>
-          <a:solidFill>
-            <a:srgbClr val="FAF3F4"/>
-          </a:solidFill>
-          <a:ln w="12700">
-            <a:solidFill>
-              <a:srgbClr val="FAF3F4"/>
-            </a:solidFill>
-            <a:prstDash val="solid"/>
-          </a:ln>
-        </p:spPr>
-      </p:sp>
-      <p:sp>
-        <p:nvSpPr>
-          <p:cNvPr id="7" name="Text 5"/>
-          <p:cNvSpPr txBox="1"/>
-          <p:nvPr/>
-        </p:nvSpPr>
-        <p:spPr>
-          <a:xfrm>
-            <a:off x="822960" y="2788920"/>
-            <a:ext cx="7498080" cy="731520"/>
-          </a:xfrm>
-          <a:prstGeom prst="rect">
-            <a:avLst/>
-          </a:prstGeom>
-          <a:noFill/>
-          <a:ln/>
-        </p:spPr>
-        <p:txBody>
-          <a:bodyPr wrap="square" lIns="0" tIns="0" rIns="0" bIns="0" rtlCol="0" anchor="ctr"/>
-          <a:lstStyle/>
-          <a:p>
-            <a:pPr indent="0" marL="0">
-              <a:buNone/>
-            </a:pPr>
-            <a:r>
-              <a:rPr lang="en-US" sz="1800" b="1" dirty="0">
-                <a:solidFill>
-                  <a:srgbClr val="7A1524"/>
-                </a:solidFill>
-                <a:latin typeface="Yu Gothic" pitchFamily="34" charset="0"/>
-                <a:ea typeface="Yu Gothic" pitchFamily="34" charset="-122"/>
-                <a:cs typeface="Yu Gothic" pitchFamily="34" charset="-120"/>
-              </a:rPr>
-              <a:t>「やっぱり聞きたい」が出てきたら、いつでも連絡してください。</a:t>
-            </a:r>
-            <a:endParaRPr lang="en-US" sz="1800" dirty="0"/>
-          </a:p>
-        </p:txBody>
-      </p:sp>
-      <p:sp>
-        <p:nvSpPr>
-          <p:cNvPr id="8" name="Shape 6"/>
-          <p:cNvSpPr/>
-          <p:nvPr/>
-        </p:nvSpPr>
-        <p:spPr>
-          <a:xfrm>
-            <a:off x="457200" y="3749040"/>
-            <a:ext cx="8229600" cy="868680"/>
-          </a:xfrm>
-          <a:prstGeom prst="roundRect">
-            <a:avLst>
-              <a:gd name="adj" fmla="val 8421"/>
+              <a:gd name="adj" fmla="val 10667"/>
             </a:avLst>
           </a:prstGeom>
           <a:solidFill>
@@ -18378,29 +18603,26 @@
       </p:sp>
       <p:sp>
         <p:nvSpPr>
-          <p:cNvPr id="9" name="Text 7"/>
-          <p:cNvSpPr txBox="1"/>
-          <p:nvPr/>
-        </p:nvSpPr>
-        <p:spPr>
-          <a:xfrm>
-            <a:off x="822960" y="3749040"/>
-            <a:ext cx="7498080" cy="868680"/>
-          </a:xfrm>
-          <a:prstGeom prst="rect">
-            <a:avLst/>
-          </a:prstGeom>
-          <a:noFill/>
-          <a:ln/>
-        </p:spPr>
-        <p:txBody>
-          <a:bodyPr wrap="square" lIns="0" tIns="0" rIns="0" bIns="0" rtlCol="0" anchor="ctr"/>
-          <a:lstStyle/>
-          <a:p>
-            <a:pPr indent="0" marL="0">
-              <a:lnSpc>
-                <a:spcPts val="2600"/>
-              </a:lnSpc>
+          <p:cNvPr id="8" name="Text 6"/>
+          <p:cNvSpPr txBox="1"/>
+          <p:nvPr/>
+        </p:nvSpPr>
+        <p:spPr>
+          <a:xfrm>
+            <a:off x="822960" y="3931920"/>
+            <a:ext cx="7406640" cy="685800"/>
+          </a:xfrm>
+          <a:prstGeom prst="rect">
+            <a:avLst/>
+          </a:prstGeom>
+          <a:noFill/>
+          <a:ln/>
+        </p:spPr>
+        <p:txBody>
+          <a:bodyPr wrap="square" lIns="0" tIns="0" rIns="0" bIns="0" rtlCol="0" anchor="ctr"/>
+          <a:lstStyle/>
+          <a:p>
+            <a:pPr indent="0" marL="0">
               <a:buNone/>
             </a:pPr>
             <a:r>
@@ -18408,31 +18630,11 @@
                 <a:solidFill>
                   <a:srgbClr val="FFFFFF"/>
                 </a:solidFill>
-                <a:latin typeface="Yu Mincho" pitchFamily="34" charset="0"/>
-                <a:ea typeface="Yu Mincho" pitchFamily="34" charset="-122"/>
-                <a:cs typeface="Yu Mincho" pitchFamily="34" charset="-120"/>
-              </a:rPr>
-              <a:t>今日いちばん大事なのは、</a:t>
-            </a:r>
-            <a:endParaRPr lang="en-US" sz="1800" dirty="0"/>
-          </a:p>
-          <a:p>
-            <a:pPr indent="0" marL="0">
-              <a:lnSpc>
-                <a:spcPts val="2600"/>
-              </a:lnSpc>
-              <a:buNone/>
-            </a:pPr>
-            <a:r>
-              <a:rPr lang="en-US" sz="1800" b="1" dirty="0">
-                <a:solidFill>
-                  <a:srgbClr val="FFFFFF"/>
-                </a:solidFill>
-                <a:latin typeface="Yu Mincho" pitchFamily="34" charset="0"/>
-                <a:ea typeface="Yu Mincho" pitchFamily="34" charset="-122"/>
-                <a:cs typeface="Yu Mincho" pitchFamily="34" charset="-120"/>
-              </a:rPr>
-              <a:t>あなたが次の試合に向けて動き出せることです。</a:t>
+                <a:latin typeface="Yu Gothic" pitchFamily="34" charset="0"/>
+                <a:ea typeface="Yu Gothic" pitchFamily="34" charset="-122"/>
+                <a:cs typeface="Yu Gothic" pitchFamily="34" charset="-120"/>
+              </a:rPr>
+              <a:t>一人ひとりを把握し、じっくり関わりたいから。</a:t>
             </a:r>
             <a:endParaRPr lang="en-US" sz="1800" dirty="0"/>
           </a:p>
@@ -18556,8 +18758,8 @@
         </p:nvSpPr>
         <p:spPr>
           <a:xfrm>
-            <a:off x="457200" y="914400"/>
-            <a:ext cx="7863840" cy="1188720"/>
+            <a:off x="457200" y="777240"/>
+            <a:ext cx="8138160" cy="1188720"/>
           </a:xfrm>
           <a:prstGeom prst="rect">
             <a:avLst/>
@@ -18571,12 +18773,12 @@
           <a:p>
             <a:pPr algn="l" indent="0" marL="0">
               <a:lnSpc>
-                <a:spcPts val="4930"/>
+                <a:spcPts val="4785"/>
               </a:lnSpc>
               <a:buNone/>
             </a:pPr>
             <a:r>
-              <a:rPr lang="en-US" sz="3400" b="1" dirty="0">
+              <a:rPr lang="en-US" sz="3300" b="1" dirty="0">
                 <a:solidFill>
                   <a:srgbClr val="141416"/>
                 </a:solidFill>
@@ -18584,46 +18786,88 @@
                 <a:ea typeface="Yu Mincho" pitchFamily="34" charset="-122"/>
                 <a:cs typeface="Yu Mincho" pitchFamily="34" charset="-120"/>
               </a:rPr>
-              <a:t>今日話してみて、</a:t>
-            </a:r>
-            <a:endParaRPr lang="en-US" sz="3400" dirty="0"/>
-          </a:p>
-          <a:p>
-            <a:pPr algn="l" indent="0" marL="0">
+              <a:t>今日、決めなくて大丈夫です</a:t>
+            </a:r>
+            <a:endParaRPr lang="en-US" sz="3300" dirty="0"/>
+          </a:p>
+        </p:txBody>
+      </p:sp>
+      <p:sp>
+        <p:nvSpPr>
+          <p:cNvPr id="5" name="Text 3"/>
+          <p:cNvSpPr txBox="1"/>
+          <p:nvPr/>
+        </p:nvSpPr>
+        <p:spPr>
+          <a:xfrm>
+            <a:off x="457200" y="1783080"/>
+            <a:ext cx="8229600" cy="914400"/>
+          </a:xfrm>
+          <a:prstGeom prst="rect">
+            <a:avLst/>
+          </a:prstGeom>
+          <a:noFill/>
+          <a:ln/>
+        </p:spPr>
+        <p:txBody>
+          <a:bodyPr wrap="square" lIns="0" tIns="0" rIns="0" bIns="0" rtlCol="0" anchor="ctr"/>
+          <a:lstStyle/>
+          <a:p>
+            <a:pPr indent="0" marL="0">
               <a:lnSpc>
-                <a:spcPts val="4930"/>
+                <a:spcPts val="3000"/>
               </a:lnSpc>
               <a:buNone/>
             </a:pPr>
             <a:r>
-              <a:rPr lang="en-US" sz="3400" b="1" dirty="0">
-                <a:solidFill>
-                  <a:srgbClr val="141416"/>
-                </a:solidFill>
-                <a:latin typeface="Yu Mincho" pitchFamily="34" charset="0"/>
-                <a:ea typeface="Yu Mincho" pitchFamily="34" charset="-122"/>
-                <a:cs typeface="Yu Mincho" pitchFamily="34" charset="-120"/>
-              </a:rPr>
-              <a:t>何が一番印象に残りましたか？</a:t>
-            </a:r>
-            <a:endParaRPr lang="en-US" sz="3400" dirty="0"/>
-          </a:p>
-        </p:txBody>
-      </p:sp>
-      <p:sp>
-        <p:nvSpPr>
-          <p:cNvPr id="5" name="Shape 3"/>
+              <a:rPr lang="en-US" sz="1800" dirty="0">
+                <a:solidFill>
+                  <a:srgbClr val="3B3634"/>
+                </a:solidFill>
+                <a:latin typeface="Yu Gothic" pitchFamily="34" charset="0"/>
+                <a:ea typeface="Yu Gothic" pitchFamily="34" charset="-122"/>
+                <a:cs typeface="Yu Gothic" pitchFamily="34" charset="-120"/>
+              </a:rPr>
+              <a:t>持ち帰って、考えてください。</a:t>
+            </a:r>
+            <a:endParaRPr lang="en-US" sz="1800" dirty="0"/>
+          </a:p>
+          <a:p>
+            <a:pPr indent="0" marL="0">
+              <a:lnSpc>
+                <a:spcPts val="3000"/>
+              </a:lnSpc>
+              <a:buNone/>
+            </a:pPr>
+            <a:r>
+              <a:rPr lang="en-US" sz="1800" dirty="0">
+                <a:solidFill>
+                  <a:srgbClr val="3B3634"/>
+                </a:solidFill>
+                <a:latin typeface="Yu Gothic" pitchFamily="34" charset="0"/>
+                <a:ea typeface="Yu Gothic" pitchFamily="34" charset="-122"/>
+                <a:cs typeface="Yu Gothic" pitchFamily="34" charset="-120"/>
+              </a:rPr>
+              <a:t>ご家族やコーチに相談してからでも、まったく問題ありません。</a:t>
+            </a:r>
+            <a:endParaRPr lang="en-US" sz="1800" dirty="0"/>
+          </a:p>
+        </p:txBody>
+      </p:sp>
+      <p:sp>
+        <p:nvSpPr>
+          <p:cNvPr id="6" name="Shape 4"/>
           <p:cNvSpPr/>
           <p:nvPr/>
         </p:nvSpPr>
         <p:spPr>
           <a:xfrm>
-            <a:off x="457200" y="2651760"/>
-            <a:ext cx="7863840" cy="512064"/>
+            <a:off x="457200" y="2788920"/>
+            <a:ext cx="8229600" cy="731520"/>
           </a:xfrm>
           <a:prstGeom prst="roundRect">
             <a:avLst>
-              <a:gd name="adj" fmla="val 10714"/>
+              <a:gd name="adj" fmla="val 8750"/>
             </a:avLst>
           </a:prstGeom>
           <a:solidFill>
@@ -18639,65 +18883,65 @@
       </p:sp>
       <p:sp>
         <p:nvSpPr>
-          <p:cNvPr id="6" name="Text 4"/>
-          <p:cNvSpPr txBox="1"/>
-          <p:nvPr/>
-        </p:nvSpPr>
-        <p:spPr>
-          <a:xfrm>
-            <a:off x="713232" y="2651760"/>
-            <a:ext cx="7406640" cy="512064"/>
-          </a:xfrm>
-          <a:prstGeom prst="rect">
-            <a:avLst/>
-          </a:prstGeom>
-          <a:noFill/>
-          <a:ln/>
-        </p:spPr>
-        <p:txBody>
-          <a:bodyPr wrap="square" lIns="0" tIns="0" rIns="0" bIns="0" rtlCol="0" anchor="ctr"/>
-          <a:lstStyle/>
-          <a:p>
-            <a:pPr indent="0" marL="0">
-              <a:buNone/>
-            </a:pPr>
-            <a:r>
-              <a:rPr lang="en-US" sz="1900" dirty="0">
-                <a:solidFill>
-                  <a:srgbClr val="3B3634"/>
-                </a:solidFill>
-                <a:latin typeface="Yu Gothic" pitchFamily="34" charset="0"/>
-                <a:ea typeface="Yu Gothic" pitchFamily="34" charset="-122"/>
-                <a:cs typeface="Yu Gothic" pitchFamily="34" charset="-120"/>
-              </a:rPr>
-              <a:t>今の自分に必要だと思ったこと</a:t>
-            </a:r>
-            <a:endParaRPr lang="en-US" sz="1900" dirty="0"/>
-          </a:p>
-        </p:txBody>
-      </p:sp>
-      <p:sp>
-        <p:nvSpPr>
-          <p:cNvPr id="7" name="Shape 5"/>
+          <p:cNvPr id="7" name="Text 5"/>
+          <p:cNvSpPr txBox="1"/>
+          <p:nvPr/>
+        </p:nvSpPr>
+        <p:spPr>
+          <a:xfrm>
+            <a:off x="822960" y="2788920"/>
+            <a:ext cx="7498080" cy="731520"/>
+          </a:xfrm>
+          <a:prstGeom prst="rect">
+            <a:avLst/>
+          </a:prstGeom>
+          <a:noFill/>
+          <a:ln/>
+        </p:spPr>
+        <p:txBody>
+          <a:bodyPr wrap="square" lIns="0" tIns="0" rIns="0" bIns="0" rtlCol="0" anchor="ctr"/>
+          <a:lstStyle/>
+          <a:p>
+            <a:pPr indent="0" marL="0">
+              <a:buNone/>
+            </a:pPr>
+            <a:r>
+              <a:rPr lang="en-US" sz="1800" b="1" dirty="0">
+                <a:solidFill>
+                  <a:srgbClr val="7A1524"/>
+                </a:solidFill>
+                <a:latin typeface="Yu Gothic" pitchFamily="34" charset="0"/>
+                <a:ea typeface="Yu Gothic" pitchFamily="34" charset="-122"/>
+                <a:cs typeface="Yu Gothic" pitchFamily="34" charset="-120"/>
+              </a:rPr>
+              <a:t>「やっぱり聞きたい」が出てきたら、いつでも連絡してください。</a:t>
+            </a:r>
+            <a:endParaRPr lang="en-US" sz="1800" dirty="0"/>
+          </a:p>
+        </p:txBody>
+      </p:sp>
+      <p:sp>
+        <p:nvSpPr>
+          <p:cNvPr id="8" name="Shape 6"/>
           <p:cNvSpPr/>
           <p:nvPr/>
         </p:nvSpPr>
         <p:spPr>
           <a:xfrm>
-            <a:off x="457200" y="3255264"/>
-            <a:ext cx="7863840" cy="512064"/>
+            <a:off x="457200" y="3749040"/>
+            <a:ext cx="8229600" cy="868680"/>
           </a:xfrm>
           <a:prstGeom prst="roundRect">
             <a:avLst>
-              <a:gd name="adj" fmla="val 10714"/>
+              <a:gd name="adj" fmla="val 8421"/>
             </a:avLst>
           </a:prstGeom>
           <a:solidFill>
-            <a:srgbClr val="FAF3F4"/>
+            <a:srgbClr val="540E19"/>
           </a:solidFill>
           <a:ln w="12700">
             <a:solidFill>
-              <a:srgbClr val="FAF3F4"/>
+              <a:srgbClr val="540E19"/>
             </a:solidFill>
             <a:prstDash val="solid"/>
           </a:ln>
@@ -18705,143 +18949,61 @@
       </p:sp>
       <p:sp>
         <p:nvSpPr>
-          <p:cNvPr id="8" name="Text 6"/>
-          <p:cNvSpPr txBox="1"/>
-          <p:nvPr/>
-        </p:nvSpPr>
-        <p:spPr>
-          <a:xfrm>
-            <a:off x="713232" y="3255264"/>
-            <a:ext cx="7406640" cy="512064"/>
-          </a:xfrm>
-          <a:prstGeom prst="rect">
-            <a:avLst/>
-          </a:prstGeom>
-          <a:noFill/>
-          <a:ln/>
-        </p:spPr>
-        <p:txBody>
-          <a:bodyPr wrap="square" lIns="0" tIns="0" rIns="0" bIns="0" rtlCol="0" anchor="ctr"/>
-          <a:lstStyle/>
-          <a:p>
-            <a:pPr indent="0" marL="0">
-              <a:buNone/>
-            </a:pPr>
-            <a:r>
-              <a:rPr lang="en-US" sz="1900" dirty="0">
-                <a:solidFill>
-                  <a:srgbClr val="3B3634"/>
-                </a:solidFill>
-                <a:latin typeface="Yu Gothic" pitchFamily="34" charset="0"/>
-                <a:ea typeface="Yu Gothic" pitchFamily="34" charset="-122"/>
-                <a:cs typeface="Yu Gothic" pitchFamily="34" charset="-120"/>
-              </a:rPr>
-              <a:t>次の試合までに変えたいこと</a:t>
-            </a:r>
-            <a:endParaRPr lang="en-US" sz="1900" dirty="0"/>
-          </a:p>
-        </p:txBody>
-      </p:sp>
-      <p:sp>
-        <p:nvSpPr>
-          <p:cNvPr id="9" name="Shape 7"/>
-          <p:cNvSpPr/>
-          <p:nvPr/>
-        </p:nvSpPr>
-        <p:spPr>
-          <a:xfrm>
-            <a:off x="457200" y="3858768"/>
-            <a:ext cx="7863840" cy="512064"/>
-          </a:xfrm>
-          <a:prstGeom prst="roundRect">
-            <a:avLst>
-              <a:gd name="adj" fmla="val 10714"/>
-            </a:avLst>
-          </a:prstGeom>
-          <a:solidFill>
-            <a:srgbClr val="FAF3F4"/>
-          </a:solidFill>
-          <a:ln w="12700">
-            <a:solidFill>
-              <a:srgbClr val="FAF3F4"/>
-            </a:solidFill>
-            <a:prstDash val="solid"/>
-          </a:ln>
-        </p:spPr>
-      </p:sp>
-      <p:sp>
-        <p:nvSpPr>
-          <p:cNvPr id="10" name="Text 8"/>
-          <p:cNvSpPr txBox="1"/>
-          <p:nvPr/>
-        </p:nvSpPr>
-        <p:spPr>
-          <a:xfrm>
-            <a:off x="713232" y="3858768"/>
-            <a:ext cx="7406640" cy="512064"/>
-          </a:xfrm>
-          <a:prstGeom prst="rect">
-            <a:avLst/>
-          </a:prstGeom>
-          <a:noFill/>
-          <a:ln/>
-        </p:spPr>
-        <p:txBody>
-          <a:bodyPr wrap="square" lIns="0" tIns="0" rIns="0" bIns="0" rtlCol="0" anchor="ctr"/>
-          <a:lstStyle/>
-          <a:p>
-            <a:pPr indent="0" marL="0">
-              <a:buNone/>
-            </a:pPr>
-            <a:r>
-              <a:rPr lang="en-US" sz="1900" dirty="0">
-                <a:solidFill>
-                  <a:srgbClr val="3B3634"/>
-                </a:solidFill>
-                <a:latin typeface="Yu Gothic" pitchFamily="34" charset="0"/>
-                <a:ea typeface="Yu Gothic" pitchFamily="34" charset="-122"/>
-                <a:cs typeface="Yu Gothic" pitchFamily="34" charset="-120"/>
-              </a:rPr>
-              <a:t>聞いておきたいこと</a:t>
-            </a:r>
-            <a:endParaRPr lang="en-US" sz="1900" dirty="0"/>
-          </a:p>
-        </p:txBody>
-      </p:sp>
-      <p:sp>
-        <p:nvSpPr>
-          <p:cNvPr id="11" name="Text 9"/>
-          <p:cNvSpPr txBox="1"/>
-          <p:nvPr/>
-        </p:nvSpPr>
-        <p:spPr>
-          <a:xfrm>
-            <a:off x="457200" y="4572000"/>
-            <a:ext cx="7863840" cy="411480"/>
-          </a:xfrm>
-          <a:prstGeom prst="rect">
-            <a:avLst/>
-          </a:prstGeom>
-          <a:noFill/>
-          <a:ln/>
-        </p:spPr>
-        <p:txBody>
-          <a:bodyPr wrap="square" lIns="0" tIns="0" rIns="0" bIns="0" rtlCol="0" anchor="ctr"/>
-          <a:lstStyle/>
-          <a:p>
-            <a:pPr indent="0" marL="0">
+          <p:cNvPr id="9" name="Text 7"/>
+          <p:cNvSpPr txBox="1"/>
+          <p:nvPr/>
+        </p:nvSpPr>
+        <p:spPr>
+          <a:xfrm>
+            <a:off x="822960" y="3749040"/>
+            <a:ext cx="7498080" cy="868680"/>
+          </a:xfrm>
+          <a:prstGeom prst="rect">
+            <a:avLst/>
+          </a:prstGeom>
+          <a:noFill/>
+          <a:ln/>
+        </p:spPr>
+        <p:txBody>
+          <a:bodyPr wrap="square" lIns="0" tIns="0" rIns="0" bIns="0" rtlCol="0" anchor="ctr"/>
+          <a:lstStyle/>
+          <a:p>
+            <a:pPr indent="0" marL="0">
+              <a:lnSpc>
+                <a:spcPts val="2600"/>
+              </a:lnSpc>
               <a:buNone/>
             </a:pPr>
             <a:r>
               <a:rPr lang="en-US" sz="1800" b="1" dirty="0">
                 <a:solidFill>
-                  <a:srgbClr val="7A1524"/>
-                </a:solidFill>
-                <a:latin typeface="Yu Gothic" pitchFamily="34" charset="0"/>
-                <a:ea typeface="Yu Gothic" pitchFamily="34" charset="-122"/>
-                <a:cs typeface="Yu Gothic" pitchFamily="34" charset="-120"/>
-              </a:rPr>
-              <a:t>まず、あなたの感想を聞かせてください。</a:t>
+                  <a:srgbClr val="FFFFFF"/>
+                </a:solidFill>
+                <a:latin typeface="Yu Mincho" pitchFamily="34" charset="0"/>
+                <a:ea typeface="Yu Mincho" pitchFamily="34" charset="-122"/>
+                <a:cs typeface="Yu Mincho" pitchFamily="34" charset="-120"/>
+              </a:rPr>
+              <a:t>今日いちばん大事なのは、</a:t>
+            </a:r>
+            <a:endParaRPr lang="en-US" sz="1800" dirty="0"/>
+          </a:p>
+          <a:p>
+            <a:pPr indent="0" marL="0">
+              <a:lnSpc>
+                <a:spcPts val="2600"/>
+              </a:lnSpc>
+              <a:buNone/>
+            </a:pPr>
+            <a:r>
+              <a:rPr lang="en-US" sz="1800" b="1" dirty="0">
+                <a:solidFill>
+                  <a:srgbClr val="FFFFFF"/>
+                </a:solidFill>
+                <a:latin typeface="Yu Mincho" pitchFamily="34" charset="0"/>
+                <a:ea typeface="Yu Mincho" pitchFamily="34" charset="-122"/>
+                <a:cs typeface="Yu Mincho" pitchFamily="34" charset="-120"/>
+              </a:rPr>
+              <a:t>あなたが次の試合に向けて動き出せることです。</a:t>
             </a:r>
             <a:endParaRPr lang="en-US" sz="1800" dirty="0"/>
           </a:p>
@@ -18861,7 +19023,7 @@
     <p:bg>
       <p:bgPr>
         <a:solidFill>
-          <a:srgbClr val="540E19"/>
+          <a:srgbClr val="FFFFFF"/>
         </a:solidFill>
       </p:bgPr>
     </p:bg>
@@ -18887,6 +19049,45 @@
         </p:nvSpPr>
         <p:spPr>
           <a:xfrm>
+            <a:off x="457200" y="237744"/>
+            <a:ext cx="5486400" cy="274320"/>
+          </a:xfrm>
+          <a:prstGeom prst="rect">
+            <a:avLst/>
+          </a:prstGeom>
+          <a:noFill/>
+          <a:ln/>
+        </p:spPr>
+        <p:txBody>
+          <a:bodyPr wrap="square" lIns="0" tIns="0" rIns="0" bIns="0" rtlCol="0" anchor="ctr"/>
+          <a:lstStyle/>
+          <a:p>
+            <a:pPr indent="0" marL="0">
+              <a:buNone/>
+            </a:pPr>
+            <a:r>
+              <a:rPr lang="en-US" sz="1200" b="1" spc="200" kern="0" dirty="0">
+                <a:solidFill>
+                  <a:srgbClr val="7A1524"/>
+                </a:solidFill>
+                <a:latin typeface="Yu Gothic" pitchFamily="34" charset="0"/>
+                <a:ea typeface="Yu Gothic" pitchFamily="34" charset="-122"/>
+                <a:cs typeface="Yu Gothic" pitchFamily="34" charset="-120"/>
+              </a:rPr>
+              <a:t>PHASE 8　クロージング</a:t>
+            </a:r>
+            <a:endParaRPr lang="en-US" sz="1200" dirty="0"/>
+          </a:p>
+        </p:txBody>
+      </p:sp>
+      <p:sp>
+        <p:nvSpPr>
+          <p:cNvPr id="3" name="Text 1"/>
+          <p:cNvSpPr txBox="1"/>
+          <p:nvPr/>
+        </p:nvSpPr>
+        <p:spPr>
+          <a:xfrm>
             <a:off x="8138160" y="4576572"/>
             <a:ext cx="548640" cy="274320"/>
           </a:xfrm>
@@ -18906,7 +19107,7 @@
             <a:r>
               <a:rPr lang="en-US" sz="1100" dirty="0">
                 <a:solidFill>
-                  <a:srgbClr val="8A6870"/>
+                  <a:srgbClr val="6B6360"/>
                 </a:solidFill>
                 <a:latin typeface="Yu Gothic" pitchFamily="34" charset="0"/>
                 <a:ea typeface="Yu Gothic" pitchFamily="34" charset="-122"/>
@@ -18918,152 +19119,90 @@
           </a:p>
         </p:txBody>
       </p:sp>
-      <p:pic>
-        <p:nvPicPr>
-          <p:cNvPr id="3" name="Image 0" descr="images/closing-dark.jpg">    </p:cNvPr>
-          <p:cNvPicPr>
-            <a:picLocks noChangeAspect="1"/>
-          </p:cNvPicPr>
-          <p:nvPr/>
-        </p:nvPicPr>
-        <p:blipFill>
-          <a:blip r:embed="rId1"/>
-          <a:srcRect l="0" r="0" t="0" b="0"/>
-          <a:stretch/>
-        </p:blipFill>
-        <p:spPr>
-          <a:xfrm>
-            <a:off x="0" y="0"/>
-            <a:ext cx="9144000" cy="5143500"/>
-          </a:xfrm>
-          <a:prstGeom prst="rect">
-            <a:avLst/>
-          </a:prstGeom>
-        </p:spPr>
-      </p:pic>
-      <p:sp>
-        <p:nvSpPr>
-          <p:cNvPr id="4" name="Text 1"/>
-          <p:cNvSpPr txBox="1"/>
-          <p:nvPr/>
-        </p:nvSpPr>
-        <p:spPr>
-          <a:xfrm>
-            <a:off x="640080" y="960120"/>
-            <a:ext cx="7863840" cy="1371600"/>
-          </a:xfrm>
-          <a:prstGeom prst="rect">
-            <a:avLst/>
-          </a:prstGeom>
-          <a:noFill/>
-          <a:ln/>
-        </p:spPr>
-        <p:txBody>
-          <a:bodyPr wrap="square" lIns="0" tIns="0" rIns="0" bIns="0" rtlCol="0" anchor="ctr"/>
-          <a:lstStyle/>
-          <a:p>
-            <a:pPr algn="ctr" indent="0" marL="0">
+      <p:sp>
+        <p:nvSpPr>
+          <p:cNvPr id="4" name="Text 2"/>
+          <p:cNvSpPr txBox="1"/>
+          <p:nvPr/>
+        </p:nvSpPr>
+        <p:spPr>
+          <a:xfrm>
+            <a:off x="457200" y="914400"/>
+            <a:ext cx="7863840" cy="1188720"/>
+          </a:xfrm>
+          <a:prstGeom prst="rect">
+            <a:avLst/>
+          </a:prstGeom>
+          <a:noFill/>
+          <a:ln/>
+        </p:spPr>
+        <p:txBody>
+          <a:bodyPr wrap="square" lIns="0" tIns="0" rIns="0" bIns="0" rtlCol="0" anchor="t"/>
+          <a:lstStyle/>
+          <a:p>
+            <a:pPr algn="l" indent="0" marL="0">
               <a:lnSpc>
-                <a:spcPts val="5000"/>
+                <a:spcPts val="4930"/>
               </a:lnSpc>
               <a:buNone/>
             </a:pPr>
             <a:r>
-              <a:rPr lang="en-US" sz="3200" b="1" dirty="0">
-                <a:solidFill>
-                  <a:srgbClr val="FFFFFF"/>
+              <a:rPr lang="en-US" sz="3400" b="1" dirty="0">
+                <a:solidFill>
+                  <a:srgbClr val="141416"/>
                 </a:solidFill>
                 <a:latin typeface="Yu Mincho" pitchFamily="34" charset="0"/>
                 <a:ea typeface="Yu Mincho" pitchFamily="34" charset="-122"/>
                 <a:cs typeface="Yu Mincho" pitchFamily="34" charset="-120"/>
               </a:rPr>
-              <a:t>次の試合で変えたいのは、</a:t>
-            </a:r>
-            <a:endParaRPr lang="en-US" sz="3200" dirty="0"/>
-          </a:p>
-          <a:p>
-            <a:pPr algn="ctr" indent="0" marL="0">
+              <a:t>今日話してみて、</a:t>
+            </a:r>
+            <a:endParaRPr lang="en-US" sz="3400" dirty="0"/>
+          </a:p>
+          <a:p>
+            <a:pPr algn="l" indent="0" marL="0">
               <a:lnSpc>
-                <a:spcPts val="5000"/>
+                <a:spcPts val="4930"/>
               </a:lnSpc>
               <a:buNone/>
             </a:pPr>
             <a:r>
-              <a:rPr lang="en-US" sz="3200" b="1" dirty="0">
-                <a:solidFill>
-                  <a:srgbClr val="FFFFFF"/>
+              <a:rPr lang="en-US" sz="3400" b="1" dirty="0">
+                <a:solidFill>
+                  <a:srgbClr val="141416"/>
                 </a:solidFill>
                 <a:latin typeface="Yu Mincho" pitchFamily="34" charset="0"/>
                 <a:ea typeface="Yu Mincho" pitchFamily="34" charset="-122"/>
                 <a:cs typeface="Yu Mincho" pitchFamily="34" charset="-120"/>
               </a:rPr>
-              <a:t>重量だけでしょうか。</a:t>
-            </a:r>
-            <a:endParaRPr lang="en-US" sz="3200" dirty="0"/>
-          </a:p>
-        </p:txBody>
-      </p:sp>
-      <p:sp>
-        <p:nvSpPr>
-          <p:cNvPr id="5" name="Text 2"/>
-          <p:cNvSpPr txBox="1"/>
-          <p:nvPr/>
-        </p:nvSpPr>
-        <p:spPr>
-          <a:xfrm>
-            <a:off x="640080" y="2651760"/>
-            <a:ext cx="7863840" cy="457200"/>
-          </a:xfrm>
-          <a:prstGeom prst="rect">
-            <a:avLst/>
-          </a:prstGeom>
-          <a:noFill/>
-          <a:ln/>
-        </p:spPr>
-        <p:txBody>
-          <a:bodyPr wrap="square" lIns="0" tIns="0" rIns="0" bIns="0" rtlCol="0" anchor="ctr"/>
-          <a:lstStyle/>
-          <a:p>
-            <a:pPr algn="ctr" indent="0" marL="0">
-              <a:buNone/>
-            </a:pPr>
-            <a:r>
-              <a:rPr lang="en-US" sz="1900" dirty="0">
-                <a:solidFill>
-                  <a:srgbClr val="F2E7E9"/>
-                </a:solidFill>
-                <a:latin typeface="Yu Gothic" pitchFamily="34" charset="0"/>
-                <a:ea typeface="Yu Gothic" pitchFamily="34" charset="-122"/>
-                <a:cs typeface="Yu Gothic" pitchFamily="34" charset="-120"/>
-              </a:rPr>
-              <a:t>身体を準備する。技術を準備する。そして、メンタルも準備する。</a:t>
-            </a:r>
-            <a:endParaRPr lang="en-US" sz="1900" dirty="0"/>
-          </a:p>
-        </p:txBody>
-      </p:sp>
-      <p:sp>
-        <p:nvSpPr>
-          <p:cNvPr id="6" name="Shape 3"/>
+              <a:t>何が一番印象に残りましたか？</a:t>
+            </a:r>
+            <a:endParaRPr lang="en-US" sz="3400" dirty="0"/>
+          </a:p>
+        </p:txBody>
+      </p:sp>
+      <p:sp>
+        <p:nvSpPr>
+          <p:cNvPr id="5" name="Shape 3"/>
           <p:cNvSpPr/>
           <p:nvPr/>
         </p:nvSpPr>
         <p:spPr>
           <a:xfrm>
-            <a:off x="1828800" y="3429000"/>
-            <a:ext cx="5486400" cy="914400"/>
+            <a:off x="457200" y="2651760"/>
+            <a:ext cx="7863840" cy="512064"/>
           </a:xfrm>
           <a:prstGeom prst="roundRect">
             <a:avLst>
-              <a:gd name="adj" fmla="val 10000"/>
+              <a:gd name="adj" fmla="val 10714"/>
             </a:avLst>
           </a:prstGeom>
           <a:solidFill>
-            <a:srgbClr val="FFFFFF"/>
+            <a:srgbClr val="FAF3F4"/>
           </a:solidFill>
           <a:ln w="12700">
             <a:solidFill>
-              <a:srgbClr val="FFFFFF"/>
+              <a:srgbClr val="FAF3F4"/>
             </a:solidFill>
             <a:prstDash val="solid"/>
           </a:ln>
@@ -19071,61 +19210,209 @@
       </p:sp>
       <p:sp>
         <p:nvSpPr>
-          <p:cNvPr id="7" name="Text 4"/>
-          <p:cNvSpPr txBox="1"/>
-          <p:nvPr/>
-        </p:nvSpPr>
-        <p:spPr>
-          <a:xfrm>
-            <a:off x="1828800" y="3429000"/>
-            <a:ext cx="5486400" cy="914400"/>
-          </a:xfrm>
-          <a:prstGeom prst="rect">
-            <a:avLst/>
-          </a:prstGeom>
-          <a:noFill/>
-          <a:ln/>
-        </p:spPr>
-        <p:txBody>
-          <a:bodyPr wrap="square" lIns="0" tIns="0" rIns="0" bIns="0" rtlCol="0" anchor="ctr"/>
-          <a:lstStyle/>
-          <a:p>
-            <a:pPr algn="ctr" indent="0" marL="0">
-              <a:lnSpc>
-                <a:spcPts val="2800"/>
-              </a:lnSpc>
+          <p:cNvPr id="6" name="Text 4"/>
+          <p:cNvSpPr txBox="1"/>
+          <p:nvPr/>
+        </p:nvSpPr>
+        <p:spPr>
+          <a:xfrm>
+            <a:off x="713232" y="2651760"/>
+            <a:ext cx="7406640" cy="512064"/>
+          </a:xfrm>
+          <a:prstGeom prst="rect">
+            <a:avLst/>
+          </a:prstGeom>
+          <a:noFill/>
+          <a:ln/>
+        </p:spPr>
+        <p:txBody>
+          <a:bodyPr wrap="square" lIns="0" tIns="0" rIns="0" bIns="0" rtlCol="0" anchor="ctr"/>
+          <a:lstStyle/>
+          <a:p>
+            <a:pPr indent="0" marL="0">
+              <a:buNone/>
+            </a:pPr>
+            <a:r>
+              <a:rPr lang="en-US" sz="1900" dirty="0">
+                <a:solidFill>
+                  <a:srgbClr val="3B3634"/>
+                </a:solidFill>
+                <a:latin typeface="Yu Gothic" pitchFamily="34" charset="0"/>
+                <a:ea typeface="Yu Gothic" pitchFamily="34" charset="-122"/>
+                <a:cs typeface="Yu Gothic" pitchFamily="34" charset="-120"/>
+              </a:rPr>
+              <a:t>今の自分に必要だと思ったこと</a:t>
+            </a:r>
+            <a:endParaRPr lang="en-US" sz="1900" dirty="0"/>
+          </a:p>
+        </p:txBody>
+      </p:sp>
+      <p:sp>
+        <p:nvSpPr>
+          <p:cNvPr id="7" name="Shape 5"/>
+          <p:cNvSpPr/>
+          <p:nvPr/>
+        </p:nvSpPr>
+        <p:spPr>
+          <a:xfrm>
+            <a:off x="457200" y="3255264"/>
+            <a:ext cx="7863840" cy="512064"/>
+          </a:xfrm>
+          <a:prstGeom prst="roundRect">
+            <a:avLst>
+              <a:gd name="adj" fmla="val 10714"/>
+            </a:avLst>
+          </a:prstGeom>
+          <a:solidFill>
+            <a:srgbClr val="FAF3F4"/>
+          </a:solidFill>
+          <a:ln w="12700">
+            <a:solidFill>
+              <a:srgbClr val="FAF3F4"/>
+            </a:solidFill>
+            <a:prstDash val="solid"/>
+          </a:ln>
+        </p:spPr>
+      </p:sp>
+      <p:sp>
+        <p:nvSpPr>
+          <p:cNvPr id="8" name="Text 6"/>
+          <p:cNvSpPr txBox="1"/>
+          <p:nvPr/>
+        </p:nvSpPr>
+        <p:spPr>
+          <a:xfrm>
+            <a:off x="713232" y="3255264"/>
+            <a:ext cx="7406640" cy="512064"/>
+          </a:xfrm>
+          <a:prstGeom prst="rect">
+            <a:avLst/>
+          </a:prstGeom>
+          <a:noFill/>
+          <a:ln/>
+        </p:spPr>
+        <p:txBody>
+          <a:bodyPr wrap="square" lIns="0" tIns="0" rIns="0" bIns="0" rtlCol="0" anchor="ctr"/>
+          <a:lstStyle/>
+          <a:p>
+            <a:pPr indent="0" marL="0">
+              <a:buNone/>
+            </a:pPr>
+            <a:r>
+              <a:rPr lang="en-US" sz="1900" dirty="0">
+                <a:solidFill>
+                  <a:srgbClr val="3B3634"/>
+                </a:solidFill>
+                <a:latin typeface="Yu Gothic" pitchFamily="34" charset="0"/>
+                <a:ea typeface="Yu Gothic" pitchFamily="34" charset="-122"/>
+                <a:cs typeface="Yu Gothic" pitchFamily="34" charset="-120"/>
+              </a:rPr>
+              <a:t>次の試合までに変えたいこと</a:t>
+            </a:r>
+            <a:endParaRPr lang="en-US" sz="1900" dirty="0"/>
+          </a:p>
+        </p:txBody>
+      </p:sp>
+      <p:sp>
+        <p:nvSpPr>
+          <p:cNvPr id="9" name="Shape 7"/>
+          <p:cNvSpPr/>
+          <p:nvPr/>
+        </p:nvSpPr>
+        <p:spPr>
+          <a:xfrm>
+            <a:off x="457200" y="3858768"/>
+            <a:ext cx="7863840" cy="512064"/>
+          </a:xfrm>
+          <a:prstGeom prst="roundRect">
+            <a:avLst>
+              <a:gd name="adj" fmla="val 10714"/>
+            </a:avLst>
+          </a:prstGeom>
+          <a:solidFill>
+            <a:srgbClr val="FAF3F4"/>
+          </a:solidFill>
+          <a:ln w="12700">
+            <a:solidFill>
+              <a:srgbClr val="FAF3F4"/>
+            </a:solidFill>
+            <a:prstDash val="solid"/>
+          </a:ln>
+        </p:spPr>
+      </p:sp>
+      <p:sp>
+        <p:nvSpPr>
+          <p:cNvPr id="10" name="Text 8"/>
+          <p:cNvSpPr txBox="1"/>
+          <p:nvPr/>
+        </p:nvSpPr>
+        <p:spPr>
+          <a:xfrm>
+            <a:off x="713232" y="3858768"/>
+            <a:ext cx="7406640" cy="512064"/>
+          </a:xfrm>
+          <a:prstGeom prst="rect">
+            <a:avLst/>
+          </a:prstGeom>
+          <a:noFill/>
+          <a:ln/>
+        </p:spPr>
+        <p:txBody>
+          <a:bodyPr wrap="square" lIns="0" tIns="0" rIns="0" bIns="0" rtlCol="0" anchor="ctr"/>
+          <a:lstStyle/>
+          <a:p>
+            <a:pPr indent="0" marL="0">
+              <a:buNone/>
+            </a:pPr>
+            <a:r>
+              <a:rPr lang="en-US" sz="1900" dirty="0">
+                <a:solidFill>
+                  <a:srgbClr val="3B3634"/>
+                </a:solidFill>
+                <a:latin typeface="Yu Gothic" pitchFamily="34" charset="0"/>
+                <a:ea typeface="Yu Gothic" pitchFamily="34" charset="-122"/>
+                <a:cs typeface="Yu Gothic" pitchFamily="34" charset="-120"/>
+              </a:rPr>
+              <a:t>聞いておきたいこと</a:t>
+            </a:r>
+            <a:endParaRPr lang="en-US" sz="1900" dirty="0"/>
+          </a:p>
+        </p:txBody>
+      </p:sp>
+      <p:sp>
+        <p:nvSpPr>
+          <p:cNvPr id="11" name="Text 9"/>
+          <p:cNvSpPr txBox="1"/>
+          <p:nvPr/>
+        </p:nvSpPr>
+        <p:spPr>
+          <a:xfrm>
+            <a:off x="457200" y="4572000"/>
+            <a:ext cx="7863840" cy="411480"/>
+          </a:xfrm>
+          <a:prstGeom prst="rect">
+            <a:avLst/>
+          </a:prstGeom>
+          <a:noFill/>
+          <a:ln/>
+        </p:spPr>
+        <p:txBody>
+          <a:bodyPr wrap="square" lIns="0" tIns="0" rIns="0" bIns="0" rtlCol="0" anchor="ctr"/>
+          <a:lstStyle/>
+          <a:p>
+            <a:pPr indent="0" marL="0">
               <a:buNone/>
             </a:pPr>
             <a:r>
               <a:rPr lang="en-US" sz="1800" b="1" dirty="0">
                 <a:solidFill>
-                  <a:srgbClr val="540E19"/>
-                </a:solidFill>
-                <a:latin typeface="Yu Gothic" pitchFamily="34" charset="0"/>
-                <a:ea typeface="Yu Gothic" pitchFamily="34" charset="-122"/>
-                <a:cs typeface="Yu Gothic" pitchFamily="34" charset="-120"/>
-              </a:rPr>
-              <a:t>ここぞの一本で、積み重ねてきた力を</a:t>
-            </a:r>
-            <a:endParaRPr lang="en-US" sz="1800" dirty="0"/>
-          </a:p>
-          <a:p>
-            <a:pPr algn="ctr" indent="0" marL="0">
-              <a:lnSpc>
-                <a:spcPts val="2800"/>
-              </a:lnSpc>
-              <a:buNone/>
-            </a:pPr>
-            <a:r>
-              <a:rPr lang="en-US" sz="1800" b="1" dirty="0">
-                <a:solidFill>
-                  <a:srgbClr val="540E19"/>
-                </a:solidFill>
-                <a:latin typeface="Yu Gothic" pitchFamily="34" charset="0"/>
-                <a:ea typeface="Yu Gothic" pitchFamily="34" charset="-122"/>
-                <a:cs typeface="Yu Gothic" pitchFamily="34" charset="-120"/>
-              </a:rPr>
-              <a:t>発揮できる選手へ。</a:t>
+                  <a:srgbClr val="7A1524"/>
+                </a:solidFill>
+                <a:latin typeface="Yu Gothic" pitchFamily="34" charset="0"/>
+                <a:ea typeface="Yu Gothic" pitchFamily="34" charset="-122"/>
+                <a:cs typeface="Yu Gothic" pitchFamily="34" charset="-120"/>
+              </a:rPr>
+              <a:t>まず、あなたの感想を聞かせてください。</a:t>
             </a:r>
             <a:endParaRPr lang="en-US" sz="1800" dirty="0"/>
           </a:p>
@@ -19647,6 +19934,290 @@
                 <a:cs typeface="Yu Gothic" pitchFamily="34" charset="-120"/>
               </a:rPr>
               <a:t>今日、一番整理したいことを教えてください。</a:t>
+            </a:r>
+            <a:endParaRPr lang="en-US" sz="1800" dirty="0"/>
+          </a:p>
+        </p:txBody>
+      </p:sp>
+    </p:spTree>
+  </p:cSld>
+  <p:clrMapOvr>
+    <a:masterClrMapping/>
+  </p:clrMapOvr>
+</p:sld>
+</file>
+
+<file path=ppt/slides/slide40.xml><?xml version="1.0" encoding="utf-8"?>
+<p:sld xmlns:a="http://schemas.openxmlformats.org/drawingml/2006/main" xmlns:r="http://schemas.openxmlformats.org/officeDocument/2006/relationships" xmlns:p="http://schemas.openxmlformats.org/presentationml/2006/main">
+  <p:cSld name="Slide 40">
+    <p:bg>
+      <p:bgPr>
+        <a:solidFill>
+          <a:srgbClr val="540E19"/>
+        </a:solidFill>
+      </p:bgPr>
+    </p:bg>
+    <p:spTree>
+      <p:nvGrpSpPr>
+        <p:cNvPr id="1" name=""/>
+        <p:cNvGrpSpPr/>
+        <p:nvPr/>
+      </p:nvGrpSpPr>
+      <p:grpSpPr>
+        <a:xfrm>
+          <a:off x="0" y="0"/>
+          <a:ext cx="0" cy="0"/>
+          <a:chOff x="0" y="0"/>
+          <a:chExt cx="0" cy="0"/>
+        </a:xfrm>
+      </p:grpSpPr>
+      <p:sp>
+        <p:nvSpPr>
+          <p:cNvPr id="2" name="Text 0"/>
+          <p:cNvSpPr txBox="1"/>
+          <p:nvPr/>
+        </p:nvSpPr>
+        <p:spPr>
+          <a:xfrm>
+            <a:off x="8138160" y="4576572"/>
+            <a:ext cx="548640" cy="274320"/>
+          </a:xfrm>
+          <a:prstGeom prst="rect">
+            <a:avLst/>
+          </a:prstGeom>
+          <a:noFill/>
+          <a:ln/>
+        </p:spPr>
+        <p:txBody>
+          <a:bodyPr wrap="square" lIns="0" tIns="0" rIns="0" bIns="0" rtlCol="0" anchor="ctr"/>
+          <a:lstStyle/>
+          <a:p>
+            <a:pPr algn="r" indent="0" marL="0">
+              <a:buNone/>
+            </a:pPr>
+            <a:r>
+              <a:rPr lang="en-US" sz="1100" dirty="0">
+                <a:solidFill>
+                  <a:srgbClr val="8A6870"/>
+                </a:solidFill>
+                <a:latin typeface="Yu Gothic" pitchFamily="34" charset="0"/>
+                <a:ea typeface="Yu Gothic" pitchFamily="34" charset="-122"/>
+                <a:cs typeface="Yu Gothic" pitchFamily="34" charset="-120"/>
+              </a:rPr>
+              <a:t>40</a:t>
+            </a:r>
+            <a:endParaRPr lang="en-US" sz="1100" dirty="0"/>
+          </a:p>
+        </p:txBody>
+      </p:sp>
+      <p:pic>
+        <p:nvPicPr>
+          <p:cNvPr id="3" name="Image 0" descr="images/closing-dark.jpg">    </p:cNvPr>
+          <p:cNvPicPr>
+            <a:picLocks noChangeAspect="1"/>
+          </p:cNvPicPr>
+          <p:nvPr/>
+        </p:nvPicPr>
+        <p:blipFill>
+          <a:blip r:embed="rId1"/>
+          <a:srcRect l="0" r="0" t="0" b="0"/>
+          <a:stretch/>
+        </p:blipFill>
+        <p:spPr>
+          <a:xfrm>
+            <a:off x="0" y="0"/>
+            <a:ext cx="9144000" cy="5143500"/>
+          </a:xfrm>
+          <a:prstGeom prst="rect">
+            <a:avLst/>
+          </a:prstGeom>
+        </p:spPr>
+      </p:pic>
+      <p:sp>
+        <p:nvSpPr>
+          <p:cNvPr id="4" name="Text 1"/>
+          <p:cNvSpPr txBox="1"/>
+          <p:nvPr/>
+        </p:nvSpPr>
+        <p:spPr>
+          <a:xfrm>
+            <a:off x="640080" y="960120"/>
+            <a:ext cx="7863840" cy="1371600"/>
+          </a:xfrm>
+          <a:prstGeom prst="rect">
+            <a:avLst/>
+          </a:prstGeom>
+          <a:noFill/>
+          <a:ln/>
+        </p:spPr>
+        <p:txBody>
+          <a:bodyPr wrap="square" lIns="0" tIns="0" rIns="0" bIns="0" rtlCol="0" anchor="ctr"/>
+          <a:lstStyle/>
+          <a:p>
+            <a:pPr algn="ctr" indent="0" marL="0">
+              <a:lnSpc>
+                <a:spcPts val="5000"/>
+              </a:lnSpc>
+              <a:buNone/>
+            </a:pPr>
+            <a:r>
+              <a:rPr lang="en-US" sz="3200" b="1" dirty="0">
+                <a:solidFill>
+                  <a:srgbClr val="FFFFFF"/>
+                </a:solidFill>
+                <a:latin typeface="Yu Mincho" pitchFamily="34" charset="0"/>
+                <a:ea typeface="Yu Mincho" pitchFamily="34" charset="-122"/>
+                <a:cs typeface="Yu Mincho" pitchFamily="34" charset="-120"/>
+              </a:rPr>
+              <a:t>次の試合で変えたいのは、</a:t>
+            </a:r>
+            <a:endParaRPr lang="en-US" sz="3200" dirty="0"/>
+          </a:p>
+          <a:p>
+            <a:pPr algn="ctr" indent="0" marL="0">
+              <a:lnSpc>
+                <a:spcPts val="5000"/>
+              </a:lnSpc>
+              <a:buNone/>
+            </a:pPr>
+            <a:r>
+              <a:rPr lang="en-US" sz="3200" b="1" dirty="0">
+                <a:solidFill>
+                  <a:srgbClr val="FFFFFF"/>
+                </a:solidFill>
+                <a:latin typeface="Yu Mincho" pitchFamily="34" charset="0"/>
+                <a:ea typeface="Yu Mincho" pitchFamily="34" charset="-122"/>
+                <a:cs typeface="Yu Mincho" pitchFamily="34" charset="-120"/>
+              </a:rPr>
+              <a:t>重量だけでしょうか。</a:t>
+            </a:r>
+            <a:endParaRPr lang="en-US" sz="3200" dirty="0"/>
+          </a:p>
+        </p:txBody>
+      </p:sp>
+      <p:sp>
+        <p:nvSpPr>
+          <p:cNvPr id="5" name="Text 2"/>
+          <p:cNvSpPr txBox="1"/>
+          <p:nvPr/>
+        </p:nvSpPr>
+        <p:spPr>
+          <a:xfrm>
+            <a:off x="640080" y="2651760"/>
+            <a:ext cx="7863840" cy="457200"/>
+          </a:xfrm>
+          <a:prstGeom prst="rect">
+            <a:avLst/>
+          </a:prstGeom>
+          <a:noFill/>
+          <a:ln/>
+        </p:spPr>
+        <p:txBody>
+          <a:bodyPr wrap="square" lIns="0" tIns="0" rIns="0" bIns="0" rtlCol="0" anchor="ctr"/>
+          <a:lstStyle/>
+          <a:p>
+            <a:pPr algn="ctr" indent="0" marL="0">
+              <a:buNone/>
+            </a:pPr>
+            <a:r>
+              <a:rPr lang="en-US" sz="1900" dirty="0">
+                <a:solidFill>
+                  <a:srgbClr val="F2E7E9"/>
+                </a:solidFill>
+                <a:latin typeface="Yu Gothic" pitchFamily="34" charset="0"/>
+                <a:ea typeface="Yu Gothic" pitchFamily="34" charset="-122"/>
+                <a:cs typeface="Yu Gothic" pitchFamily="34" charset="-120"/>
+              </a:rPr>
+              <a:t>身体を準備する。技術を準備する。そして、メンタルも準備する。</a:t>
+            </a:r>
+            <a:endParaRPr lang="en-US" sz="1900" dirty="0"/>
+          </a:p>
+        </p:txBody>
+      </p:sp>
+      <p:sp>
+        <p:nvSpPr>
+          <p:cNvPr id="6" name="Shape 3"/>
+          <p:cNvSpPr/>
+          <p:nvPr/>
+        </p:nvSpPr>
+        <p:spPr>
+          <a:xfrm>
+            <a:off x="1828800" y="3429000"/>
+            <a:ext cx="5486400" cy="914400"/>
+          </a:xfrm>
+          <a:prstGeom prst="roundRect">
+            <a:avLst>
+              <a:gd name="adj" fmla="val 10000"/>
+            </a:avLst>
+          </a:prstGeom>
+          <a:solidFill>
+            <a:srgbClr val="FFFFFF"/>
+          </a:solidFill>
+          <a:ln w="12700">
+            <a:solidFill>
+              <a:srgbClr val="FFFFFF"/>
+            </a:solidFill>
+            <a:prstDash val="solid"/>
+          </a:ln>
+        </p:spPr>
+      </p:sp>
+      <p:sp>
+        <p:nvSpPr>
+          <p:cNvPr id="7" name="Text 4"/>
+          <p:cNvSpPr txBox="1"/>
+          <p:nvPr/>
+        </p:nvSpPr>
+        <p:spPr>
+          <a:xfrm>
+            <a:off x="1828800" y="3429000"/>
+            <a:ext cx="5486400" cy="914400"/>
+          </a:xfrm>
+          <a:prstGeom prst="rect">
+            <a:avLst/>
+          </a:prstGeom>
+          <a:noFill/>
+          <a:ln/>
+        </p:spPr>
+        <p:txBody>
+          <a:bodyPr wrap="square" lIns="0" tIns="0" rIns="0" bIns="0" rtlCol="0" anchor="ctr"/>
+          <a:lstStyle/>
+          <a:p>
+            <a:pPr algn="ctr" indent="0" marL="0">
+              <a:lnSpc>
+                <a:spcPts val="2800"/>
+              </a:lnSpc>
+              <a:buNone/>
+            </a:pPr>
+            <a:r>
+              <a:rPr lang="en-US" sz="1800" b="1" dirty="0">
+                <a:solidFill>
+                  <a:srgbClr val="540E19"/>
+                </a:solidFill>
+                <a:latin typeface="Yu Gothic" pitchFamily="34" charset="0"/>
+                <a:ea typeface="Yu Gothic" pitchFamily="34" charset="-122"/>
+                <a:cs typeface="Yu Gothic" pitchFamily="34" charset="-120"/>
+              </a:rPr>
+              <a:t>ここぞの一本で、積み重ねてきた力を</a:t>
+            </a:r>
+            <a:endParaRPr lang="en-US" sz="1800" dirty="0"/>
+          </a:p>
+          <a:p>
+            <a:pPr algn="ctr" indent="0" marL="0">
+              <a:lnSpc>
+                <a:spcPts val="2800"/>
+              </a:lnSpc>
+              <a:buNone/>
+            </a:pPr>
+            <a:r>
+              <a:rPr lang="en-US" sz="1800" b="1" dirty="0">
+                <a:solidFill>
+                  <a:srgbClr val="540E19"/>
+                </a:solidFill>
+                <a:latin typeface="Yu Gothic" pitchFamily="34" charset="0"/>
+                <a:ea typeface="Yu Gothic" pitchFamily="34" charset="-122"/>
+                <a:cs typeface="Yu Gothic" pitchFamily="34" charset="-120"/>
+              </a:rPr>
+              <a:t>発揮できる選手へ。</a:t>
             </a:r>
             <a:endParaRPr lang="en-US" sz="1800" dirty="0"/>
           </a:p>
